--- a/slides/9.Pointer_2/Pointer_2.pptx
+++ b/slides/9.Pointer_2/Pointer_2.pptx
@@ -6,7 +6,7 @@
     <p:sldMasterId id="2147483673" r:id="rId2"/>
   </p:sldMasterIdLst>
   <p:notesMasterIdLst>
-    <p:notesMasterId r:id="rId15"/>
+    <p:notesMasterId r:id="rId13"/>
   </p:notesMasterIdLst>
   <p:sldIdLst>
     <p:sldId id="256" r:id="rId3"/>
@@ -18,17 +18,15 @@
     <p:sldId id="332" r:id="rId9"/>
     <p:sldId id="327" r:id="rId10"/>
     <p:sldId id="328" r:id="rId11"/>
-    <p:sldId id="330" r:id="rId12"/>
-    <p:sldId id="331" r:id="rId13"/>
-    <p:sldId id="329" r:id="rId14"/>
+    <p:sldId id="329" r:id="rId12"/>
   </p:sldIdLst>
   <p:sldSz cx="9144000" cy="5143500" type="screen16x9"/>
   <p:notesSz cx="6858000" cy="9144000"/>
   <p:embeddedFontLst>
     <p:embeddedFont>
       <p:font typeface="Fira Code" panose="020B0809050000020004" pitchFamily="49" charset="0"/>
-      <p:regular r:id="rId16"/>
-      <p:bold r:id="rId17"/>
+      <p:regular r:id="rId14"/>
+      <p:bold r:id="rId15"/>
     </p:embeddedFont>
   </p:embeddedFontLst>
   <p:defaultTextStyle>
@@ -814,260 +812,6 @@
 </file>
 
 <file path=ppt/notesSlides/notesSlide10.xml><?xml version="1.0" encoding="utf-8"?>
-<p:notes xmlns:a="http://schemas.openxmlformats.org/drawingml/2006/main" xmlns:r="http://schemas.openxmlformats.org/officeDocument/2006/relationships" xmlns:p="http://schemas.openxmlformats.org/presentationml/2006/main" showMasterSp="0" showMasterPhAnim="0">
-  <p:cSld>
-    <p:spTree>
-      <p:nvGrpSpPr>
-        <p:cNvPr id="1" name="Shape 454">
-          <a:extLst>
-            <a:ext uri="{FF2B5EF4-FFF2-40B4-BE49-F238E27FC236}">
-              <a16:creationId xmlns:a16="http://schemas.microsoft.com/office/drawing/2014/main" id="{9F117321-B177-10B6-6566-B16EF566F262}"/>
-            </a:ext>
-          </a:extLst>
-        </p:cNvPr>
-        <p:cNvGrpSpPr/>
-        <p:nvPr/>
-      </p:nvGrpSpPr>
-      <p:grpSpPr>
-        <a:xfrm>
-          <a:off x="0" y="0"/>
-          <a:ext cx="0" cy="0"/>
-          <a:chOff x="0" y="0"/>
-          <a:chExt cx="0" cy="0"/>
-        </a:xfrm>
-      </p:grpSpPr>
-      <p:sp>
-        <p:nvSpPr>
-          <p:cNvPr id="455" name="Google Shape;455;ge7b5133482_0_0:notes">
-            <a:extLst>
-              <a:ext uri="{FF2B5EF4-FFF2-40B4-BE49-F238E27FC236}">
-                <a16:creationId xmlns:a16="http://schemas.microsoft.com/office/drawing/2014/main" id="{62A29A39-313E-EF41-3870-8D3461836B41}"/>
-              </a:ext>
-            </a:extLst>
-          </p:cNvPr>
-          <p:cNvSpPr>
-            <a:spLocks noGrp="1" noRot="1" noChangeAspect="1"/>
-          </p:cNvSpPr>
-          <p:nvPr>
-            <p:ph type="sldImg" idx="2"/>
-          </p:nvPr>
-        </p:nvSpPr>
-        <p:spPr>
-          <a:xfrm>
-            <a:off x="381000" y="685800"/>
-            <a:ext cx="6096000" cy="3429000"/>
-          </a:xfrm>
-          <a:custGeom>
-            <a:avLst/>
-            <a:gdLst/>
-            <a:ahLst/>
-            <a:cxnLst/>
-            <a:rect l="l" t="t" r="r" b="b"/>
-            <a:pathLst>
-              <a:path w="120000" h="120000" extrusionOk="0">
-                <a:moveTo>
-                  <a:pt x="0" y="0"/>
-                </a:moveTo>
-                <a:lnTo>
-                  <a:pt x="120000" y="0"/>
-                </a:lnTo>
-                <a:lnTo>
-                  <a:pt x="120000" y="120000"/>
-                </a:lnTo>
-                <a:lnTo>
-                  <a:pt x="0" y="120000"/>
-                </a:lnTo>
-                <a:close/>
-              </a:path>
-            </a:pathLst>
-          </a:custGeom>
-        </p:spPr>
-      </p:sp>
-      <p:sp>
-        <p:nvSpPr>
-          <p:cNvPr id="456" name="Google Shape;456;ge7b5133482_0_0:notes">
-            <a:extLst>
-              <a:ext uri="{FF2B5EF4-FFF2-40B4-BE49-F238E27FC236}">
-                <a16:creationId xmlns:a16="http://schemas.microsoft.com/office/drawing/2014/main" id="{68AE8E04-B5CB-7F6E-C282-02939AB7A0ED}"/>
-              </a:ext>
-            </a:extLst>
-          </p:cNvPr>
-          <p:cNvSpPr txBox="1">
-            <a:spLocks noGrp="1"/>
-          </p:cNvSpPr>
-          <p:nvPr>
-            <p:ph type="body" idx="1"/>
-          </p:nvPr>
-        </p:nvSpPr>
-        <p:spPr>
-          <a:xfrm>
-            <a:off x="685800" y="4343400"/>
-            <a:ext cx="5486400" cy="4114800"/>
-          </a:xfrm>
-          <a:prstGeom prst="rect">
-            <a:avLst/>
-          </a:prstGeom>
-        </p:spPr>
-        <p:txBody>
-          <a:bodyPr spcFirstLastPara="1" wrap="square" lIns="91425" tIns="91425" rIns="91425" bIns="91425" anchor="t" anchorCtr="0">
-            <a:noAutofit/>
-          </a:bodyPr>
-          <a:lstStyle/>
-          <a:p>
-            <a:pPr marL="0" lvl="0" indent="0" algn="l" rtl="0">
-              <a:spcBef>
-                <a:spcPts val="0"/>
-              </a:spcBef>
-              <a:spcAft>
-                <a:spcPts val="0"/>
-              </a:spcAft>
-              <a:buNone/>
-            </a:pPr>
-            <a:endParaRPr dirty="0"/>
-          </a:p>
-        </p:txBody>
-      </p:sp>
-    </p:spTree>
-    <p:extLst>
-      <p:ext uri="{BB962C8B-B14F-4D97-AF65-F5344CB8AC3E}">
-        <p14:creationId xmlns:p14="http://schemas.microsoft.com/office/powerpoint/2010/main" val="2938046952"/>
-      </p:ext>
-    </p:extLst>
-  </p:cSld>
-  <p:clrMapOvr>
-    <a:masterClrMapping/>
-  </p:clrMapOvr>
-</p:notes>
-</file>
-
-<file path=ppt/notesSlides/notesSlide11.xml><?xml version="1.0" encoding="utf-8"?>
-<p:notes xmlns:a="http://schemas.openxmlformats.org/drawingml/2006/main" xmlns:r="http://schemas.openxmlformats.org/officeDocument/2006/relationships" xmlns:p="http://schemas.openxmlformats.org/presentationml/2006/main" showMasterSp="0" showMasterPhAnim="0">
-  <p:cSld>
-    <p:spTree>
-      <p:nvGrpSpPr>
-        <p:cNvPr id="1" name="Shape 454">
-          <a:extLst>
-            <a:ext uri="{FF2B5EF4-FFF2-40B4-BE49-F238E27FC236}">
-              <a16:creationId xmlns:a16="http://schemas.microsoft.com/office/drawing/2014/main" id="{53A6F1E3-CA25-EE97-DFEB-C1CA1FBF952E}"/>
-            </a:ext>
-          </a:extLst>
-        </p:cNvPr>
-        <p:cNvGrpSpPr/>
-        <p:nvPr/>
-      </p:nvGrpSpPr>
-      <p:grpSpPr>
-        <a:xfrm>
-          <a:off x="0" y="0"/>
-          <a:ext cx="0" cy="0"/>
-          <a:chOff x="0" y="0"/>
-          <a:chExt cx="0" cy="0"/>
-        </a:xfrm>
-      </p:grpSpPr>
-      <p:sp>
-        <p:nvSpPr>
-          <p:cNvPr id="455" name="Google Shape;455;ge7b5133482_0_0:notes">
-            <a:extLst>
-              <a:ext uri="{FF2B5EF4-FFF2-40B4-BE49-F238E27FC236}">
-                <a16:creationId xmlns:a16="http://schemas.microsoft.com/office/drawing/2014/main" id="{90DBEA6A-1D77-74C2-7BF3-5B2B7D56B328}"/>
-              </a:ext>
-            </a:extLst>
-          </p:cNvPr>
-          <p:cNvSpPr>
-            <a:spLocks noGrp="1" noRot="1" noChangeAspect="1"/>
-          </p:cNvSpPr>
-          <p:nvPr>
-            <p:ph type="sldImg" idx="2"/>
-          </p:nvPr>
-        </p:nvSpPr>
-        <p:spPr>
-          <a:xfrm>
-            <a:off x="381000" y="685800"/>
-            <a:ext cx="6096000" cy="3429000"/>
-          </a:xfrm>
-          <a:custGeom>
-            <a:avLst/>
-            <a:gdLst/>
-            <a:ahLst/>
-            <a:cxnLst/>
-            <a:rect l="l" t="t" r="r" b="b"/>
-            <a:pathLst>
-              <a:path w="120000" h="120000" extrusionOk="0">
-                <a:moveTo>
-                  <a:pt x="0" y="0"/>
-                </a:moveTo>
-                <a:lnTo>
-                  <a:pt x="120000" y="0"/>
-                </a:lnTo>
-                <a:lnTo>
-                  <a:pt x="120000" y="120000"/>
-                </a:lnTo>
-                <a:lnTo>
-                  <a:pt x="0" y="120000"/>
-                </a:lnTo>
-                <a:close/>
-              </a:path>
-            </a:pathLst>
-          </a:custGeom>
-        </p:spPr>
-      </p:sp>
-      <p:sp>
-        <p:nvSpPr>
-          <p:cNvPr id="456" name="Google Shape;456;ge7b5133482_0_0:notes">
-            <a:extLst>
-              <a:ext uri="{FF2B5EF4-FFF2-40B4-BE49-F238E27FC236}">
-                <a16:creationId xmlns:a16="http://schemas.microsoft.com/office/drawing/2014/main" id="{5EEE3C3A-0071-5400-5E74-0122EB4AE7A6}"/>
-              </a:ext>
-            </a:extLst>
-          </p:cNvPr>
-          <p:cNvSpPr txBox="1">
-            <a:spLocks noGrp="1"/>
-          </p:cNvSpPr>
-          <p:nvPr>
-            <p:ph type="body" idx="1"/>
-          </p:nvPr>
-        </p:nvSpPr>
-        <p:spPr>
-          <a:xfrm>
-            <a:off x="685800" y="4343400"/>
-            <a:ext cx="5486400" cy="4114800"/>
-          </a:xfrm>
-          <a:prstGeom prst="rect">
-            <a:avLst/>
-          </a:prstGeom>
-        </p:spPr>
-        <p:txBody>
-          <a:bodyPr spcFirstLastPara="1" wrap="square" lIns="91425" tIns="91425" rIns="91425" bIns="91425" anchor="t" anchorCtr="0">
-            <a:noAutofit/>
-          </a:bodyPr>
-          <a:lstStyle/>
-          <a:p>
-            <a:pPr marL="0" lvl="0" indent="0" algn="l" rtl="0">
-              <a:spcBef>
-                <a:spcPts val="0"/>
-              </a:spcBef>
-              <a:spcAft>
-                <a:spcPts val="0"/>
-              </a:spcAft>
-              <a:buNone/>
-            </a:pPr>
-            <a:endParaRPr dirty="0"/>
-          </a:p>
-        </p:txBody>
-      </p:sp>
-    </p:spTree>
-    <p:extLst>
-      <p:ext uri="{BB962C8B-B14F-4D97-AF65-F5344CB8AC3E}">
-        <p14:creationId xmlns:p14="http://schemas.microsoft.com/office/powerpoint/2010/main" val="4241065409"/>
-      </p:ext>
-    </p:extLst>
-  </p:cSld>
-  <p:clrMapOvr>
-    <a:masterClrMapping/>
-  </p:clrMapOvr>
-</p:notes>
-</file>
-
-<file path=ppt/notesSlides/notesSlide12.xml><?xml version="1.0" encoding="utf-8"?>
 <p:notes xmlns:a="http://schemas.openxmlformats.org/drawingml/2006/main" xmlns:r="http://schemas.openxmlformats.org/officeDocument/2006/relationships" xmlns:p="http://schemas.openxmlformats.org/presentationml/2006/main" showMasterSp="0" showMasterPhAnim="0">
   <p:cSld>
     <p:spTree>
@@ -11187,4056 +10931,6 @@
         <p:cNvPr id="1" name="Shape 457">
           <a:extLst>
             <a:ext uri="{FF2B5EF4-FFF2-40B4-BE49-F238E27FC236}">
-              <a16:creationId xmlns:a16="http://schemas.microsoft.com/office/drawing/2014/main" id="{A431F104-247F-F86C-E7C0-E14F0CA59DED}"/>
-            </a:ext>
-          </a:extLst>
-        </p:cNvPr>
-        <p:cNvGrpSpPr/>
-        <p:nvPr/>
-      </p:nvGrpSpPr>
-      <p:grpSpPr>
-        <a:xfrm>
-          <a:off x="0" y="0"/>
-          <a:ext cx="0" cy="0"/>
-          <a:chOff x="0" y="0"/>
-          <a:chExt cx="0" cy="0"/>
-        </a:xfrm>
-      </p:grpSpPr>
-      <p:sp>
-        <p:nvSpPr>
-          <p:cNvPr id="465" name="Google Shape;465;p27">
-            <a:extLst>
-              <a:ext uri="{FF2B5EF4-FFF2-40B4-BE49-F238E27FC236}">
-                <a16:creationId xmlns:a16="http://schemas.microsoft.com/office/drawing/2014/main" id="{A9272013-26E2-6857-0F59-A0FACC1AE1EE}"/>
-              </a:ext>
-            </a:extLst>
-          </p:cNvPr>
-          <p:cNvSpPr txBox="1">
-            <a:spLocks noGrp="1"/>
-          </p:cNvSpPr>
-          <p:nvPr>
-            <p:ph type="subTitle" idx="1"/>
-          </p:nvPr>
-        </p:nvSpPr>
-        <p:spPr>
-          <a:xfrm>
-            <a:off x="-5975" y="91525"/>
-            <a:ext cx="4572000" cy="357300"/>
-          </a:xfrm>
-          <a:prstGeom prst="rect">
-            <a:avLst/>
-          </a:prstGeom>
-        </p:spPr>
-        <p:txBody>
-          <a:bodyPr spcFirstLastPara="1" wrap="square" lIns="91425" tIns="91425" rIns="91425" bIns="91425" anchor="ctr" anchorCtr="0">
-            <a:noAutofit/>
-          </a:bodyPr>
-          <a:lstStyle/>
-          <a:p>
-            <a:pPr marL="0" lvl="0" indent="0" algn="ctr" rtl="0">
-              <a:spcBef>
-                <a:spcPts val="0"/>
-              </a:spcBef>
-              <a:spcAft>
-                <a:spcPts val="0"/>
-              </a:spcAft>
-              <a:buNone/>
-            </a:pPr>
-            <a:r>
-              <a:rPr lang="en-US" sz="1000" dirty="0" err="1"/>
-              <a:t>Pointer.c</a:t>
-            </a:r>
-            <a:endParaRPr sz="1000" dirty="0"/>
-          </a:p>
-        </p:txBody>
-      </p:sp>
-      <p:sp>
-        <p:nvSpPr>
-          <p:cNvPr id="12" name="AutoShape 4">
-            <a:extLst>
-              <a:ext uri="{FF2B5EF4-FFF2-40B4-BE49-F238E27FC236}">
-                <a16:creationId xmlns:a16="http://schemas.microsoft.com/office/drawing/2014/main" id="{EB1F1CD9-4A5B-A39B-8D0C-ECD6D6E9DF78}"/>
-              </a:ext>
-            </a:extLst>
-          </p:cNvPr>
-          <p:cNvSpPr>
-            <a:spLocks noChangeAspect="1" noChangeArrowheads="1"/>
-          </p:cNvSpPr>
-          <p:nvPr/>
-        </p:nvSpPr>
-        <p:spPr bwMode="auto">
-          <a:xfrm>
-            <a:off x="3405600" y="2362439"/>
-            <a:ext cx="1318800" cy="1318800"/>
-          </a:xfrm>
-          <a:prstGeom prst="rect">
-            <a:avLst/>
-          </a:prstGeom>
-          <a:noFill/>
-          <a:extLst>
-            <a:ext uri="{909E8E84-426E-40DD-AFC4-6F175D3DCCD1}">
-              <a14:hiddenFill xmlns:a14="http://schemas.microsoft.com/office/drawing/2010/main">
-                <a:solidFill>
-                  <a:srgbClr val="FFFFFF"/>
-                </a:solidFill>
-              </a14:hiddenFill>
-            </a:ext>
-          </a:extLst>
-        </p:spPr>
-        <p:txBody>
-          <a:bodyPr vert="horz" wrap="square" lIns="91440" tIns="45720" rIns="91440" bIns="45720" numCol="1" anchor="t" anchorCtr="0" compatLnSpc="1">
-            <a:prstTxWarp prst="textNoShape">
-              <a:avLst/>
-            </a:prstTxWarp>
-          </a:bodyPr>
-          <a:lstStyle/>
-          <a:p>
-            <a:endParaRPr lang="en-US"/>
-          </a:p>
-        </p:txBody>
-      </p:sp>
-      <p:sp>
-        <p:nvSpPr>
-          <p:cNvPr id="4" name="TextBox 3">
-            <a:extLst>
-              <a:ext uri="{FF2B5EF4-FFF2-40B4-BE49-F238E27FC236}">
-                <a16:creationId xmlns:a16="http://schemas.microsoft.com/office/drawing/2014/main" id="{11F1135F-6C40-B481-5276-6145AC1CD2C2}"/>
-              </a:ext>
-            </a:extLst>
-          </p:cNvPr>
-          <p:cNvSpPr txBox="1"/>
-          <p:nvPr/>
-        </p:nvSpPr>
-        <p:spPr>
-          <a:xfrm>
-            <a:off x="1005895" y="757579"/>
-            <a:ext cx="7993294" cy="584775"/>
-          </a:xfrm>
-          <a:prstGeom prst="rect">
-            <a:avLst/>
-          </a:prstGeom>
-          <a:noFill/>
-          <a:effectLst>
-            <a:outerShdw blurRad="50800" dist="38100" dir="10800000" algn="r" rotWithShape="0">
-              <a:prstClr val="black">
-                <a:alpha val="40000"/>
-              </a:prstClr>
-            </a:outerShdw>
-          </a:effectLst>
-        </p:spPr>
-        <p:txBody>
-          <a:bodyPr wrap="square">
-            <a:spAutoFit/>
-          </a:bodyPr>
-          <a:lstStyle/>
-          <a:p>
-            <a:pPr algn="just">
-              <a:buClr>
-                <a:schemeClr val="accent3"/>
-              </a:buClr>
-            </a:pPr>
-            <a:endParaRPr lang="en-US" sz="1600" dirty="0">
-              <a:solidFill>
-                <a:schemeClr val="accent3"/>
-              </a:solidFill>
-              <a:latin typeface="Fira Code"/>
-              <a:ea typeface="Fira Code"/>
-              <a:cs typeface="B Nazanin" panose="00000400000000000000" pitchFamily="2" charset="-78"/>
-              <a:sym typeface="Fira Code"/>
-            </a:endParaRPr>
-          </a:p>
-          <a:p>
-            <a:pPr algn="just" rtl="1">
-              <a:buClr>
-                <a:schemeClr val="accent3"/>
-              </a:buClr>
-            </a:pPr>
-            <a:endParaRPr lang="en-US" sz="1600" dirty="0">
-              <a:solidFill>
-                <a:schemeClr val="accent3"/>
-              </a:solidFill>
-              <a:latin typeface="Fira Code"/>
-              <a:ea typeface="Fira Code"/>
-              <a:cs typeface="B Nazanin" panose="00000400000000000000" pitchFamily="2" charset="-78"/>
-              <a:sym typeface="Fira Code"/>
-            </a:endParaRPr>
-          </a:p>
-        </p:txBody>
-      </p:sp>
-      <p:sp>
-        <p:nvSpPr>
-          <p:cNvPr id="14" name="Google Shape;814;p39">
-            <a:extLst>
-              <a:ext uri="{FF2B5EF4-FFF2-40B4-BE49-F238E27FC236}">
-                <a16:creationId xmlns:a16="http://schemas.microsoft.com/office/drawing/2014/main" id="{809AF1CF-EB07-F8AC-9052-6BE517B5B9F1}"/>
-              </a:ext>
-            </a:extLst>
-          </p:cNvPr>
-          <p:cNvSpPr txBox="1">
-            <a:spLocks/>
-          </p:cNvSpPr>
-          <p:nvPr/>
-        </p:nvSpPr>
-        <p:spPr>
-          <a:xfrm>
-            <a:off x="1005895" y="270175"/>
-            <a:ext cx="5877790" cy="974809"/>
-          </a:xfrm>
-          <a:prstGeom prst="rect">
-            <a:avLst/>
-          </a:prstGeom>
-          <a:noFill/>
-          <a:ln>
-            <a:noFill/>
-          </a:ln>
-        </p:spPr>
-        <p:txBody>
-          <a:bodyPr spcFirstLastPara="1" wrap="square" lIns="91425" tIns="91425" rIns="91425" bIns="91425" anchor="ctr" anchorCtr="0">
-            <a:noAutofit/>
-          </a:bodyPr>
-          <a:lstStyle>
-            <a:defPPr marR="0" lvl="0" algn="l" rtl="0">
-              <a:lnSpc>
-                <a:spcPct val="100000"/>
-              </a:lnSpc>
-              <a:spcBef>
-                <a:spcPts val="0"/>
-              </a:spcBef>
-              <a:spcAft>
-                <a:spcPts val="0"/>
-              </a:spcAft>
-            </a:defPPr>
-            <a:lvl1pPr marR="0" lvl="0" algn="l" rtl="0">
-              <a:lnSpc>
-                <a:spcPct val="100000"/>
-              </a:lnSpc>
-              <a:spcBef>
-                <a:spcPts val="0"/>
-              </a:spcBef>
-              <a:spcAft>
-                <a:spcPts val="0"/>
-              </a:spcAft>
-              <a:buClr>
-                <a:schemeClr val="lt1"/>
-              </a:buClr>
-              <a:buSzPts val="5200"/>
-              <a:buFont typeface="Fira Code"/>
-              <a:buNone/>
-              <a:defRPr sz="3000" b="0" i="0" u="none" strike="noStrike" cap="none">
-                <a:solidFill>
-                  <a:schemeClr val="lt1"/>
-                </a:solidFill>
-                <a:latin typeface="Fira Code"/>
-                <a:ea typeface="Fira Code"/>
-                <a:cs typeface="Fira Code"/>
-                <a:sym typeface="Fira Code"/>
-              </a:defRPr>
-            </a:lvl1pPr>
-            <a:lvl2pPr marR="0" lvl="1" algn="ctr" rtl="0">
-              <a:lnSpc>
-                <a:spcPct val="100000"/>
-              </a:lnSpc>
-              <a:spcBef>
-                <a:spcPts val="0"/>
-              </a:spcBef>
-              <a:spcAft>
-                <a:spcPts val="0"/>
-              </a:spcAft>
-              <a:buClr>
-                <a:schemeClr val="dk1"/>
-              </a:buClr>
-              <a:buSzPts val="5200"/>
-              <a:buFont typeface="Fira Code"/>
-              <a:buNone/>
-              <a:defRPr sz="5200" b="0" i="0" u="none" strike="noStrike" cap="none">
-                <a:solidFill>
-                  <a:schemeClr val="dk1"/>
-                </a:solidFill>
-                <a:latin typeface="Fira Code"/>
-                <a:ea typeface="Fira Code"/>
-                <a:cs typeface="Fira Code"/>
-                <a:sym typeface="Fira Code"/>
-              </a:defRPr>
-            </a:lvl2pPr>
-            <a:lvl3pPr marR="0" lvl="2" algn="ctr" rtl="0">
-              <a:lnSpc>
-                <a:spcPct val="100000"/>
-              </a:lnSpc>
-              <a:spcBef>
-                <a:spcPts val="0"/>
-              </a:spcBef>
-              <a:spcAft>
-                <a:spcPts val="0"/>
-              </a:spcAft>
-              <a:buClr>
-                <a:schemeClr val="dk1"/>
-              </a:buClr>
-              <a:buSzPts val="5200"/>
-              <a:buFont typeface="Fira Code"/>
-              <a:buNone/>
-              <a:defRPr sz="5200" b="0" i="0" u="none" strike="noStrike" cap="none">
-                <a:solidFill>
-                  <a:schemeClr val="dk1"/>
-                </a:solidFill>
-                <a:latin typeface="Fira Code"/>
-                <a:ea typeface="Fira Code"/>
-                <a:cs typeface="Fira Code"/>
-                <a:sym typeface="Fira Code"/>
-              </a:defRPr>
-            </a:lvl3pPr>
-            <a:lvl4pPr marR="0" lvl="3" algn="ctr" rtl="0">
-              <a:lnSpc>
-                <a:spcPct val="100000"/>
-              </a:lnSpc>
-              <a:spcBef>
-                <a:spcPts val="0"/>
-              </a:spcBef>
-              <a:spcAft>
-                <a:spcPts val="0"/>
-              </a:spcAft>
-              <a:buClr>
-                <a:schemeClr val="dk1"/>
-              </a:buClr>
-              <a:buSzPts val="5200"/>
-              <a:buFont typeface="Fira Code"/>
-              <a:buNone/>
-              <a:defRPr sz="5200" b="0" i="0" u="none" strike="noStrike" cap="none">
-                <a:solidFill>
-                  <a:schemeClr val="dk1"/>
-                </a:solidFill>
-                <a:latin typeface="Fira Code"/>
-                <a:ea typeface="Fira Code"/>
-                <a:cs typeface="Fira Code"/>
-                <a:sym typeface="Fira Code"/>
-              </a:defRPr>
-            </a:lvl4pPr>
-            <a:lvl5pPr marR="0" lvl="4" algn="ctr" rtl="0">
-              <a:lnSpc>
-                <a:spcPct val="100000"/>
-              </a:lnSpc>
-              <a:spcBef>
-                <a:spcPts val="0"/>
-              </a:spcBef>
-              <a:spcAft>
-                <a:spcPts val="0"/>
-              </a:spcAft>
-              <a:buClr>
-                <a:schemeClr val="dk1"/>
-              </a:buClr>
-              <a:buSzPts val="5200"/>
-              <a:buFont typeface="Fira Code"/>
-              <a:buNone/>
-              <a:defRPr sz="5200" b="0" i="0" u="none" strike="noStrike" cap="none">
-                <a:solidFill>
-                  <a:schemeClr val="dk1"/>
-                </a:solidFill>
-                <a:latin typeface="Fira Code"/>
-                <a:ea typeface="Fira Code"/>
-                <a:cs typeface="Fira Code"/>
-                <a:sym typeface="Fira Code"/>
-              </a:defRPr>
-            </a:lvl5pPr>
-            <a:lvl6pPr marR="0" lvl="5" algn="ctr" rtl="0">
-              <a:lnSpc>
-                <a:spcPct val="100000"/>
-              </a:lnSpc>
-              <a:spcBef>
-                <a:spcPts val="0"/>
-              </a:spcBef>
-              <a:spcAft>
-                <a:spcPts val="0"/>
-              </a:spcAft>
-              <a:buClr>
-                <a:schemeClr val="dk1"/>
-              </a:buClr>
-              <a:buSzPts val="5200"/>
-              <a:buFont typeface="Fira Code"/>
-              <a:buNone/>
-              <a:defRPr sz="5200" b="0" i="0" u="none" strike="noStrike" cap="none">
-                <a:solidFill>
-                  <a:schemeClr val="dk1"/>
-                </a:solidFill>
-                <a:latin typeface="Fira Code"/>
-                <a:ea typeface="Fira Code"/>
-                <a:cs typeface="Fira Code"/>
-                <a:sym typeface="Fira Code"/>
-              </a:defRPr>
-            </a:lvl6pPr>
-            <a:lvl7pPr marR="0" lvl="6" algn="ctr" rtl="0">
-              <a:lnSpc>
-                <a:spcPct val="100000"/>
-              </a:lnSpc>
-              <a:spcBef>
-                <a:spcPts val="0"/>
-              </a:spcBef>
-              <a:spcAft>
-                <a:spcPts val="0"/>
-              </a:spcAft>
-              <a:buClr>
-                <a:schemeClr val="dk1"/>
-              </a:buClr>
-              <a:buSzPts val="5200"/>
-              <a:buFont typeface="Fira Code"/>
-              <a:buNone/>
-              <a:defRPr sz="5200" b="0" i="0" u="none" strike="noStrike" cap="none">
-                <a:solidFill>
-                  <a:schemeClr val="dk1"/>
-                </a:solidFill>
-                <a:latin typeface="Fira Code"/>
-                <a:ea typeface="Fira Code"/>
-                <a:cs typeface="Fira Code"/>
-                <a:sym typeface="Fira Code"/>
-              </a:defRPr>
-            </a:lvl7pPr>
-            <a:lvl8pPr marR="0" lvl="7" algn="ctr" rtl="0">
-              <a:lnSpc>
-                <a:spcPct val="100000"/>
-              </a:lnSpc>
-              <a:spcBef>
-                <a:spcPts val="0"/>
-              </a:spcBef>
-              <a:spcAft>
-                <a:spcPts val="0"/>
-              </a:spcAft>
-              <a:buClr>
-                <a:schemeClr val="dk1"/>
-              </a:buClr>
-              <a:buSzPts val="5200"/>
-              <a:buFont typeface="Fira Code"/>
-              <a:buNone/>
-              <a:defRPr sz="5200" b="0" i="0" u="none" strike="noStrike" cap="none">
-                <a:solidFill>
-                  <a:schemeClr val="dk1"/>
-                </a:solidFill>
-                <a:latin typeface="Fira Code"/>
-                <a:ea typeface="Fira Code"/>
-                <a:cs typeface="Fira Code"/>
-                <a:sym typeface="Fira Code"/>
-              </a:defRPr>
-            </a:lvl8pPr>
-            <a:lvl9pPr marR="0" lvl="8" algn="ctr" rtl="0">
-              <a:lnSpc>
-                <a:spcPct val="100000"/>
-              </a:lnSpc>
-              <a:spcBef>
-                <a:spcPts val="0"/>
-              </a:spcBef>
-              <a:spcAft>
-                <a:spcPts val="0"/>
-              </a:spcAft>
-              <a:buClr>
-                <a:schemeClr val="dk1"/>
-              </a:buClr>
-              <a:buSzPts val="5200"/>
-              <a:buFont typeface="Fira Code"/>
-              <a:buNone/>
-              <a:defRPr sz="5200" b="0" i="0" u="none" strike="noStrike" cap="none">
-                <a:solidFill>
-                  <a:schemeClr val="dk1"/>
-                </a:solidFill>
-                <a:latin typeface="Fira Code"/>
-                <a:ea typeface="Fira Code"/>
-                <a:cs typeface="Fira Code"/>
-                <a:sym typeface="Fira Code"/>
-              </a:defRPr>
-            </a:lvl9pPr>
-          </a:lstStyle>
-          <a:p>
-            <a:r>
-              <a:rPr lang="en-US" sz="2400" dirty="0">
-                <a:solidFill>
-                  <a:schemeClr val="accent2"/>
-                </a:solidFill>
-              </a:rPr>
-              <a:t>Function Pointer</a:t>
-            </a:r>
-          </a:p>
-        </p:txBody>
-      </p:sp>
-      <p:sp>
-        <p:nvSpPr>
-          <p:cNvPr id="6" name="Google Shape;473;p28">
-            <a:extLst>
-              <a:ext uri="{FF2B5EF4-FFF2-40B4-BE49-F238E27FC236}">
-                <a16:creationId xmlns:a16="http://schemas.microsoft.com/office/drawing/2014/main" id="{BBE80714-B1BF-95F1-3480-8065211C1742}"/>
-              </a:ext>
-            </a:extLst>
-          </p:cNvPr>
-          <p:cNvSpPr txBox="1">
-            <a:spLocks/>
-          </p:cNvSpPr>
-          <p:nvPr/>
-        </p:nvSpPr>
-        <p:spPr>
-          <a:xfrm>
-            <a:off x="729503" y="4701324"/>
-            <a:ext cx="4865100" cy="357300"/>
-          </a:xfrm>
-          <a:prstGeom prst="rect">
-            <a:avLst/>
-          </a:prstGeom>
-          <a:noFill/>
-          <a:ln>
-            <a:noFill/>
-          </a:ln>
-        </p:spPr>
-        <p:txBody>
-          <a:bodyPr spcFirstLastPara="1" wrap="square" lIns="91425" tIns="91425" rIns="91425" bIns="91425" anchor="ctr" anchorCtr="0">
-            <a:noAutofit/>
-          </a:bodyPr>
-          <a:lstStyle>
-            <a:defPPr marR="0" lvl="0" algn="l" rtl="0">
-              <a:lnSpc>
-                <a:spcPct val="100000"/>
-              </a:lnSpc>
-              <a:spcBef>
-                <a:spcPts val="0"/>
-              </a:spcBef>
-              <a:spcAft>
-                <a:spcPts val="0"/>
-              </a:spcAft>
-            </a:defPPr>
-            <a:lvl1pPr marL="457200" marR="0" lvl="0" indent="-317500" algn="l" rtl="0">
-              <a:lnSpc>
-                <a:spcPct val="100000"/>
-              </a:lnSpc>
-              <a:spcBef>
-                <a:spcPts val="0"/>
-              </a:spcBef>
-              <a:spcAft>
-                <a:spcPts val="0"/>
-              </a:spcAft>
-              <a:buClr>
-                <a:schemeClr val="dk2"/>
-              </a:buClr>
-              <a:buSzPts val="1400"/>
-              <a:buFont typeface="Fira Code"/>
-              <a:buChar char="●"/>
-              <a:defRPr sz="1400" b="0" i="0" u="none" strike="noStrike" cap="none">
-                <a:solidFill>
-                  <a:schemeClr val="dk2"/>
-                </a:solidFill>
-                <a:latin typeface="Fira Code"/>
-                <a:ea typeface="Fira Code"/>
-                <a:cs typeface="Fira Code"/>
-                <a:sym typeface="Fira Code"/>
-              </a:defRPr>
-            </a:lvl1pPr>
-            <a:lvl2pPr marL="914400" marR="0" lvl="1" indent="-317500" algn="l" rtl="0">
-              <a:lnSpc>
-                <a:spcPct val="100000"/>
-              </a:lnSpc>
-              <a:spcBef>
-                <a:spcPts val="0"/>
-              </a:spcBef>
-              <a:spcAft>
-                <a:spcPts val="0"/>
-              </a:spcAft>
-              <a:buClr>
-                <a:schemeClr val="dk2"/>
-              </a:buClr>
-              <a:buSzPts val="1400"/>
-              <a:buFont typeface="Fira Code"/>
-              <a:buChar char="○"/>
-              <a:defRPr sz="1400" b="0" i="0" u="none" strike="noStrike" cap="none">
-                <a:solidFill>
-                  <a:schemeClr val="dk2"/>
-                </a:solidFill>
-                <a:latin typeface="Fira Code"/>
-                <a:ea typeface="Fira Code"/>
-                <a:cs typeface="Fira Code"/>
-                <a:sym typeface="Fira Code"/>
-              </a:defRPr>
-            </a:lvl2pPr>
-            <a:lvl3pPr marL="1371600" marR="0" lvl="2" indent="-317500" algn="l" rtl="0">
-              <a:lnSpc>
-                <a:spcPct val="100000"/>
-              </a:lnSpc>
-              <a:spcBef>
-                <a:spcPts val="0"/>
-              </a:spcBef>
-              <a:spcAft>
-                <a:spcPts val="0"/>
-              </a:spcAft>
-              <a:buClr>
-                <a:schemeClr val="dk2"/>
-              </a:buClr>
-              <a:buSzPts val="1400"/>
-              <a:buFont typeface="Fira Code"/>
-              <a:buChar char="■"/>
-              <a:defRPr sz="1400" b="0" i="0" u="none" strike="noStrike" cap="none">
-                <a:solidFill>
-                  <a:schemeClr val="dk2"/>
-                </a:solidFill>
-                <a:latin typeface="Fira Code"/>
-                <a:ea typeface="Fira Code"/>
-                <a:cs typeface="Fira Code"/>
-                <a:sym typeface="Fira Code"/>
-              </a:defRPr>
-            </a:lvl3pPr>
-            <a:lvl4pPr marL="1828800" marR="0" lvl="3" indent="-317500" algn="l" rtl="0">
-              <a:lnSpc>
-                <a:spcPct val="100000"/>
-              </a:lnSpc>
-              <a:spcBef>
-                <a:spcPts val="0"/>
-              </a:spcBef>
-              <a:spcAft>
-                <a:spcPts val="0"/>
-              </a:spcAft>
-              <a:buClr>
-                <a:schemeClr val="dk2"/>
-              </a:buClr>
-              <a:buSzPts val="1400"/>
-              <a:buFont typeface="Fira Code"/>
-              <a:buChar char="●"/>
-              <a:defRPr sz="1400" b="0" i="0" u="none" strike="noStrike" cap="none">
-                <a:solidFill>
-                  <a:schemeClr val="dk2"/>
-                </a:solidFill>
-                <a:latin typeface="Fira Code"/>
-                <a:ea typeface="Fira Code"/>
-                <a:cs typeface="Fira Code"/>
-                <a:sym typeface="Fira Code"/>
-              </a:defRPr>
-            </a:lvl4pPr>
-            <a:lvl5pPr marL="2286000" marR="0" lvl="4" indent="-317500" algn="l" rtl="0">
-              <a:lnSpc>
-                <a:spcPct val="100000"/>
-              </a:lnSpc>
-              <a:spcBef>
-                <a:spcPts val="0"/>
-              </a:spcBef>
-              <a:spcAft>
-                <a:spcPts val="0"/>
-              </a:spcAft>
-              <a:buClr>
-                <a:schemeClr val="dk2"/>
-              </a:buClr>
-              <a:buSzPts val="1400"/>
-              <a:buFont typeface="Fira Code"/>
-              <a:buChar char="○"/>
-              <a:defRPr sz="1400" b="0" i="0" u="none" strike="noStrike" cap="none">
-                <a:solidFill>
-                  <a:schemeClr val="dk2"/>
-                </a:solidFill>
-                <a:latin typeface="Fira Code"/>
-                <a:ea typeface="Fira Code"/>
-                <a:cs typeface="Fira Code"/>
-                <a:sym typeface="Fira Code"/>
-              </a:defRPr>
-            </a:lvl5pPr>
-            <a:lvl6pPr marL="2743200" marR="0" lvl="5" indent="-317500" algn="l" rtl="0">
-              <a:lnSpc>
-                <a:spcPct val="100000"/>
-              </a:lnSpc>
-              <a:spcBef>
-                <a:spcPts val="0"/>
-              </a:spcBef>
-              <a:spcAft>
-                <a:spcPts val="0"/>
-              </a:spcAft>
-              <a:buClr>
-                <a:schemeClr val="dk2"/>
-              </a:buClr>
-              <a:buSzPts val="1400"/>
-              <a:buFont typeface="Fira Code"/>
-              <a:buChar char="■"/>
-              <a:defRPr sz="1400" b="0" i="0" u="none" strike="noStrike" cap="none">
-                <a:solidFill>
-                  <a:schemeClr val="dk2"/>
-                </a:solidFill>
-                <a:latin typeface="Fira Code"/>
-                <a:ea typeface="Fira Code"/>
-                <a:cs typeface="Fira Code"/>
-                <a:sym typeface="Fira Code"/>
-              </a:defRPr>
-            </a:lvl6pPr>
-            <a:lvl7pPr marL="3200400" marR="0" lvl="6" indent="-317500" algn="l" rtl="0">
-              <a:lnSpc>
-                <a:spcPct val="100000"/>
-              </a:lnSpc>
-              <a:spcBef>
-                <a:spcPts val="0"/>
-              </a:spcBef>
-              <a:spcAft>
-                <a:spcPts val="0"/>
-              </a:spcAft>
-              <a:buClr>
-                <a:schemeClr val="dk2"/>
-              </a:buClr>
-              <a:buSzPts val="1400"/>
-              <a:buFont typeface="Fira Code"/>
-              <a:buChar char="●"/>
-              <a:defRPr sz="1400" b="0" i="0" u="none" strike="noStrike" cap="none">
-                <a:solidFill>
-                  <a:schemeClr val="dk2"/>
-                </a:solidFill>
-                <a:latin typeface="Fira Code"/>
-                <a:ea typeface="Fira Code"/>
-                <a:cs typeface="Fira Code"/>
-                <a:sym typeface="Fira Code"/>
-              </a:defRPr>
-            </a:lvl7pPr>
-            <a:lvl8pPr marL="3657600" marR="0" lvl="7" indent="-317500" algn="l" rtl="0">
-              <a:lnSpc>
-                <a:spcPct val="100000"/>
-              </a:lnSpc>
-              <a:spcBef>
-                <a:spcPts val="0"/>
-              </a:spcBef>
-              <a:spcAft>
-                <a:spcPts val="0"/>
-              </a:spcAft>
-              <a:buClr>
-                <a:schemeClr val="dk2"/>
-              </a:buClr>
-              <a:buSzPts val="1400"/>
-              <a:buFont typeface="Fira Code"/>
-              <a:buChar char="○"/>
-              <a:defRPr sz="1400" b="0" i="0" u="none" strike="noStrike" cap="none">
-                <a:solidFill>
-                  <a:schemeClr val="dk2"/>
-                </a:solidFill>
-                <a:latin typeface="Fira Code"/>
-                <a:ea typeface="Fira Code"/>
-                <a:cs typeface="Fira Code"/>
-                <a:sym typeface="Fira Code"/>
-              </a:defRPr>
-            </a:lvl8pPr>
-            <a:lvl9pPr marL="4114800" marR="0" lvl="8" indent="-317500" algn="l" rtl="0">
-              <a:lnSpc>
-                <a:spcPct val="100000"/>
-              </a:lnSpc>
-              <a:spcBef>
-                <a:spcPts val="0"/>
-              </a:spcBef>
-              <a:spcAft>
-                <a:spcPts val="0"/>
-              </a:spcAft>
-              <a:buClr>
-                <a:schemeClr val="dk2"/>
-              </a:buClr>
-              <a:buSzPts val="1400"/>
-              <a:buFont typeface="Fira Code"/>
-              <a:buChar char="■"/>
-              <a:defRPr sz="1400" b="0" i="0" u="none" strike="noStrike" cap="none">
-                <a:solidFill>
-                  <a:schemeClr val="dk2"/>
-                </a:solidFill>
-                <a:latin typeface="Fira Code"/>
-                <a:ea typeface="Fira Code"/>
-                <a:cs typeface="Fira Code"/>
-                <a:sym typeface="Fira Code"/>
-              </a:defRPr>
-            </a:lvl9pPr>
-          </a:lstStyle>
-          <a:p>
-            <a:pPr marL="0" indent="0">
-              <a:buFont typeface="Fira Code"/>
-              <a:buNone/>
-            </a:pPr>
-            <a:r>
-              <a:rPr lang="en-US" dirty="0">
-                <a:solidFill>
-                  <a:schemeClr val="accent3"/>
-                </a:solidFill>
-              </a:rPr>
-              <a:t>Programming Language Lab</a:t>
-            </a:r>
-          </a:p>
-        </p:txBody>
-      </p:sp>
-      <p:sp>
-        <p:nvSpPr>
-          <p:cNvPr id="7" name="Google Shape;473;p28">
-            <a:extLst>
-              <a:ext uri="{FF2B5EF4-FFF2-40B4-BE49-F238E27FC236}">
-                <a16:creationId xmlns:a16="http://schemas.microsoft.com/office/drawing/2014/main" id="{F4A99DFE-96ED-A018-2144-9312BE137D4C}"/>
-              </a:ext>
-            </a:extLst>
-          </p:cNvPr>
-          <p:cNvSpPr txBox="1">
-            <a:spLocks/>
-          </p:cNvSpPr>
-          <p:nvPr/>
-        </p:nvSpPr>
-        <p:spPr>
-          <a:xfrm>
-            <a:off x="8433851" y="4694675"/>
-            <a:ext cx="319124" cy="357300"/>
-          </a:xfrm>
-          <a:prstGeom prst="rect">
-            <a:avLst/>
-          </a:prstGeom>
-          <a:noFill/>
-          <a:ln>
-            <a:noFill/>
-          </a:ln>
-        </p:spPr>
-        <p:txBody>
-          <a:bodyPr spcFirstLastPara="1" wrap="square" lIns="91425" tIns="91425" rIns="91425" bIns="91425" anchor="ctr" anchorCtr="0">
-            <a:noAutofit/>
-          </a:bodyPr>
-          <a:lstStyle>
-            <a:defPPr marR="0" lvl="0" algn="l" rtl="0">
-              <a:lnSpc>
-                <a:spcPct val="100000"/>
-              </a:lnSpc>
-              <a:spcBef>
-                <a:spcPts val="0"/>
-              </a:spcBef>
-              <a:spcAft>
-                <a:spcPts val="0"/>
-              </a:spcAft>
-            </a:defPPr>
-            <a:lvl1pPr marL="457200" marR="0" lvl="0" indent="-317500" algn="l" rtl="0">
-              <a:lnSpc>
-                <a:spcPct val="100000"/>
-              </a:lnSpc>
-              <a:spcBef>
-                <a:spcPts val="0"/>
-              </a:spcBef>
-              <a:spcAft>
-                <a:spcPts val="0"/>
-              </a:spcAft>
-              <a:buClr>
-                <a:schemeClr val="dk2"/>
-              </a:buClr>
-              <a:buSzPts val="1400"/>
-              <a:buFont typeface="Fira Code"/>
-              <a:buChar char="●"/>
-              <a:defRPr sz="1400" b="0" i="0" u="none" strike="noStrike" cap="none">
-                <a:solidFill>
-                  <a:schemeClr val="dk2"/>
-                </a:solidFill>
-                <a:latin typeface="Fira Code"/>
-                <a:ea typeface="Fira Code"/>
-                <a:cs typeface="Fira Code"/>
-                <a:sym typeface="Fira Code"/>
-              </a:defRPr>
-            </a:lvl1pPr>
-            <a:lvl2pPr marL="914400" marR="0" lvl="1" indent="-317500" algn="l" rtl="0">
-              <a:lnSpc>
-                <a:spcPct val="100000"/>
-              </a:lnSpc>
-              <a:spcBef>
-                <a:spcPts val="0"/>
-              </a:spcBef>
-              <a:spcAft>
-                <a:spcPts val="0"/>
-              </a:spcAft>
-              <a:buClr>
-                <a:schemeClr val="dk2"/>
-              </a:buClr>
-              <a:buSzPts val="1400"/>
-              <a:buFont typeface="Fira Code"/>
-              <a:buChar char="○"/>
-              <a:defRPr sz="1400" b="0" i="0" u="none" strike="noStrike" cap="none">
-                <a:solidFill>
-                  <a:schemeClr val="dk2"/>
-                </a:solidFill>
-                <a:latin typeface="Fira Code"/>
-                <a:ea typeface="Fira Code"/>
-                <a:cs typeface="Fira Code"/>
-                <a:sym typeface="Fira Code"/>
-              </a:defRPr>
-            </a:lvl2pPr>
-            <a:lvl3pPr marL="1371600" marR="0" lvl="2" indent="-317500" algn="l" rtl="0">
-              <a:lnSpc>
-                <a:spcPct val="100000"/>
-              </a:lnSpc>
-              <a:spcBef>
-                <a:spcPts val="0"/>
-              </a:spcBef>
-              <a:spcAft>
-                <a:spcPts val="0"/>
-              </a:spcAft>
-              <a:buClr>
-                <a:schemeClr val="dk2"/>
-              </a:buClr>
-              <a:buSzPts val="1400"/>
-              <a:buFont typeface="Fira Code"/>
-              <a:buChar char="■"/>
-              <a:defRPr sz="1400" b="0" i="0" u="none" strike="noStrike" cap="none">
-                <a:solidFill>
-                  <a:schemeClr val="dk2"/>
-                </a:solidFill>
-                <a:latin typeface="Fira Code"/>
-                <a:ea typeface="Fira Code"/>
-                <a:cs typeface="Fira Code"/>
-                <a:sym typeface="Fira Code"/>
-              </a:defRPr>
-            </a:lvl3pPr>
-            <a:lvl4pPr marL="1828800" marR="0" lvl="3" indent="-317500" algn="l" rtl="0">
-              <a:lnSpc>
-                <a:spcPct val="100000"/>
-              </a:lnSpc>
-              <a:spcBef>
-                <a:spcPts val="0"/>
-              </a:spcBef>
-              <a:spcAft>
-                <a:spcPts val="0"/>
-              </a:spcAft>
-              <a:buClr>
-                <a:schemeClr val="dk2"/>
-              </a:buClr>
-              <a:buSzPts val="1400"/>
-              <a:buFont typeface="Fira Code"/>
-              <a:buChar char="●"/>
-              <a:defRPr sz="1400" b="0" i="0" u="none" strike="noStrike" cap="none">
-                <a:solidFill>
-                  <a:schemeClr val="dk2"/>
-                </a:solidFill>
-                <a:latin typeface="Fira Code"/>
-                <a:ea typeface="Fira Code"/>
-                <a:cs typeface="Fira Code"/>
-                <a:sym typeface="Fira Code"/>
-              </a:defRPr>
-            </a:lvl4pPr>
-            <a:lvl5pPr marL="2286000" marR="0" lvl="4" indent="-317500" algn="l" rtl="0">
-              <a:lnSpc>
-                <a:spcPct val="100000"/>
-              </a:lnSpc>
-              <a:spcBef>
-                <a:spcPts val="0"/>
-              </a:spcBef>
-              <a:spcAft>
-                <a:spcPts val="0"/>
-              </a:spcAft>
-              <a:buClr>
-                <a:schemeClr val="dk2"/>
-              </a:buClr>
-              <a:buSzPts val="1400"/>
-              <a:buFont typeface="Fira Code"/>
-              <a:buChar char="○"/>
-              <a:defRPr sz="1400" b="0" i="0" u="none" strike="noStrike" cap="none">
-                <a:solidFill>
-                  <a:schemeClr val="dk2"/>
-                </a:solidFill>
-                <a:latin typeface="Fira Code"/>
-                <a:ea typeface="Fira Code"/>
-                <a:cs typeface="Fira Code"/>
-                <a:sym typeface="Fira Code"/>
-              </a:defRPr>
-            </a:lvl5pPr>
-            <a:lvl6pPr marL="2743200" marR="0" lvl="5" indent="-317500" algn="l" rtl="0">
-              <a:lnSpc>
-                <a:spcPct val="100000"/>
-              </a:lnSpc>
-              <a:spcBef>
-                <a:spcPts val="0"/>
-              </a:spcBef>
-              <a:spcAft>
-                <a:spcPts val="0"/>
-              </a:spcAft>
-              <a:buClr>
-                <a:schemeClr val="dk2"/>
-              </a:buClr>
-              <a:buSzPts val="1400"/>
-              <a:buFont typeface="Fira Code"/>
-              <a:buChar char="■"/>
-              <a:defRPr sz="1400" b="0" i="0" u="none" strike="noStrike" cap="none">
-                <a:solidFill>
-                  <a:schemeClr val="dk2"/>
-                </a:solidFill>
-                <a:latin typeface="Fira Code"/>
-                <a:ea typeface="Fira Code"/>
-                <a:cs typeface="Fira Code"/>
-                <a:sym typeface="Fira Code"/>
-              </a:defRPr>
-            </a:lvl6pPr>
-            <a:lvl7pPr marL="3200400" marR="0" lvl="6" indent="-317500" algn="l" rtl="0">
-              <a:lnSpc>
-                <a:spcPct val="100000"/>
-              </a:lnSpc>
-              <a:spcBef>
-                <a:spcPts val="0"/>
-              </a:spcBef>
-              <a:spcAft>
-                <a:spcPts val="0"/>
-              </a:spcAft>
-              <a:buClr>
-                <a:schemeClr val="dk2"/>
-              </a:buClr>
-              <a:buSzPts val="1400"/>
-              <a:buFont typeface="Fira Code"/>
-              <a:buChar char="●"/>
-              <a:defRPr sz="1400" b="0" i="0" u="none" strike="noStrike" cap="none">
-                <a:solidFill>
-                  <a:schemeClr val="dk2"/>
-                </a:solidFill>
-                <a:latin typeface="Fira Code"/>
-                <a:ea typeface="Fira Code"/>
-                <a:cs typeface="Fira Code"/>
-                <a:sym typeface="Fira Code"/>
-              </a:defRPr>
-            </a:lvl7pPr>
-            <a:lvl8pPr marL="3657600" marR="0" lvl="7" indent="-317500" algn="l" rtl="0">
-              <a:lnSpc>
-                <a:spcPct val="100000"/>
-              </a:lnSpc>
-              <a:spcBef>
-                <a:spcPts val="0"/>
-              </a:spcBef>
-              <a:spcAft>
-                <a:spcPts val="0"/>
-              </a:spcAft>
-              <a:buClr>
-                <a:schemeClr val="dk2"/>
-              </a:buClr>
-              <a:buSzPts val="1400"/>
-              <a:buFont typeface="Fira Code"/>
-              <a:buChar char="○"/>
-              <a:defRPr sz="1400" b="0" i="0" u="none" strike="noStrike" cap="none">
-                <a:solidFill>
-                  <a:schemeClr val="dk2"/>
-                </a:solidFill>
-                <a:latin typeface="Fira Code"/>
-                <a:ea typeface="Fira Code"/>
-                <a:cs typeface="Fira Code"/>
-                <a:sym typeface="Fira Code"/>
-              </a:defRPr>
-            </a:lvl8pPr>
-            <a:lvl9pPr marL="4114800" marR="0" lvl="8" indent="-317500" algn="l" rtl="0">
-              <a:lnSpc>
-                <a:spcPct val="100000"/>
-              </a:lnSpc>
-              <a:spcBef>
-                <a:spcPts val="0"/>
-              </a:spcBef>
-              <a:spcAft>
-                <a:spcPts val="0"/>
-              </a:spcAft>
-              <a:buClr>
-                <a:schemeClr val="dk2"/>
-              </a:buClr>
-              <a:buSzPts val="1400"/>
-              <a:buFont typeface="Fira Code"/>
-              <a:buChar char="■"/>
-              <a:defRPr sz="1400" b="0" i="0" u="none" strike="noStrike" cap="none">
-                <a:solidFill>
-                  <a:schemeClr val="dk2"/>
-                </a:solidFill>
-                <a:latin typeface="Fira Code"/>
-                <a:ea typeface="Fira Code"/>
-                <a:cs typeface="Fira Code"/>
-                <a:sym typeface="Fira Code"/>
-              </a:defRPr>
-            </a:lvl9pPr>
-          </a:lstStyle>
-          <a:p>
-            <a:pPr marL="0" indent="0">
-              <a:buFont typeface="Fira Code"/>
-              <a:buNone/>
-            </a:pPr>
-            <a:r>
-              <a:rPr lang="en" sz="1100" dirty="0">
-                <a:solidFill>
-                  <a:schemeClr val="accent3"/>
-                </a:solidFill>
-              </a:rPr>
-              <a:t>1</a:t>
-            </a:r>
-            <a:endParaRPr lang="en" dirty="0">
-              <a:solidFill>
-                <a:schemeClr val="accent3"/>
-              </a:solidFill>
-            </a:endParaRPr>
-          </a:p>
-        </p:txBody>
-      </p:sp>
-      <p:sp>
-        <p:nvSpPr>
-          <p:cNvPr id="8" name="TextBox 7">
-            <a:extLst>
-              <a:ext uri="{FF2B5EF4-FFF2-40B4-BE49-F238E27FC236}">
-                <a16:creationId xmlns:a16="http://schemas.microsoft.com/office/drawing/2014/main" id="{F09C5871-2D25-1CB4-CCF3-F1CA57637BC9}"/>
-              </a:ext>
-            </a:extLst>
-          </p:cNvPr>
-          <p:cNvSpPr txBox="1"/>
-          <p:nvPr/>
-        </p:nvSpPr>
-        <p:spPr>
-          <a:xfrm>
-            <a:off x="1129002" y="1316889"/>
-            <a:ext cx="7993294" cy="800219"/>
-          </a:xfrm>
-          <a:prstGeom prst="rect">
-            <a:avLst/>
-          </a:prstGeom>
-          <a:noFill/>
-          <a:effectLst>
-            <a:outerShdw blurRad="50800" dist="38100" dir="10800000" algn="r" rotWithShape="0">
-              <a:prstClr val="black">
-                <a:alpha val="40000"/>
-              </a:prstClr>
-            </a:outerShdw>
-          </a:effectLst>
-        </p:spPr>
-        <p:txBody>
-          <a:bodyPr wrap="square">
-            <a:spAutoFit/>
-          </a:bodyPr>
-          <a:lstStyle/>
-          <a:p>
-            <a:pPr>
-              <a:buClr>
-                <a:schemeClr val="accent3"/>
-              </a:buClr>
-            </a:pPr>
-            <a:endParaRPr lang="en-US" dirty="0">
-              <a:solidFill>
-                <a:schemeClr val="accent3"/>
-              </a:solidFill>
-              <a:latin typeface="Fira Code"/>
-              <a:ea typeface="Fira Code"/>
-              <a:cs typeface="B Nazanin" panose="00000400000000000000" pitchFamily="2" charset="-78"/>
-              <a:sym typeface="Fira Code"/>
-            </a:endParaRPr>
-          </a:p>
-          <a:p>
-            <a:pPr>
-              <a:buClr>
-                <a:schemeClr val="accent3"/>
-              </a:buClr>
-            </a:pPr>
-            <a:endParaRPr lang="en-US" sz="1600" dirty="0">
-              <a:solidFill>
-                <a:schemeClr val="accent3"/>
-              </a:solidFill>
-              <a:latin typeface="Fira Code"/>
-              <a:ea typeface="Fira Code"/>
-              <a:cs typeface="B Nazanin" panose="00000400000000000000" pitchFamily="2" charset="-78"/>
-              <a:sym typeface="Fira Code"/>
-            </a:endParaRPr>
-          </a:p>
-          <a:p>
-            <a:pPr>
-              <a:buClr>
-                <a:schemeClr val="accent3"/>
-              </a:buClr>
-            </a:pPr>
-            <a:endParaRPr lang="fa-IR" sz="1600" dirty="0">
-              <a:solidFill>
-                <a:schemeClr val="accent3"/>
-              </a:solidFill>
-              <a:latin typeface="Fira Code"/>
-              <a:ea typeface="Fira Code"/>
-              <a:cs typeface="B Nazanin" panose="00000400000000000000" pitchFamily="2" charset="-78"/>
-              <a:sym typeface="Fira Code"/>
-            </a:endParaRPr>
-          </a:p>
-        </p:txBody>
-      </p:sp>
-      <p:sp>
-        <p:nvSpPr>
-          <p:cNvPr id="2" name="AutoShape 2" descr="Memory Management in Operating System - GeeksforGeeks">
-            <a:extLst>
-              <a:ext uri="{FF2B5EF4-FFF2-40B4-BE49-F238E27FC236}">
-                <a16:creationId xmlns:a16="http://schemas.microsoft.com/office/drawing/2014/main" id="{F28B857E-193C-C2E7-59A8-D17653F3F5FF}"/>
-              </a:ext>
-            </a:extLst>
-          </p:cNvPr>
-          <p:cNvSpPr>
-            <a:spLocks noChangeAspect="1" noChangeArrowheads="1"/>
-          </p:cNvSpPr>
-          <p:nvPr/>
-        </p:nvSpPr>
-        <p:spPr bwMode="auto">
-          <a:xfrm>
-            <a:off x="4572000" y="2571750"/>
-            <a:ext cx="304800" cy="304800"/>
-          </a:xfrm>
-          <a:prstGeom prst="rect">
-            <a:avLst/>
-          </a:prstGeom>
-          <a:noFill/>
-          <a:extLst>
-            <a:ext uri="{909E8E84-426E-40DD-AFC4-6F175D3DCCD1}">
-              <a14:hiddenFill xmlns:a14="http://schemas.microsoft.com/office/drawing/2010/main">
-                <a:solidFill>
-                  <a:srgbClr val="FFFFFF"/>
-                </a:solidFill>
-              </a14:hiddenFill>
-            </a:ext>
-          </a:extLst>
-        </p:spPr>
-        <p:txBody>
-          <a:bodyPr vert="horz" wrap="square" lIns="91440" tIns="45720" rIns="91440" bIns="45720" numCol="1" anchor="t" anchorCtr="0" compatLnSpc="1">
-            <a:prstTxWarp prst="textNoShape">
-              <a:avLst/>
-            </a:prstTxWarp>
-          </a:bodyPr>
-          <a:lstStyle/>
-          <a:p>
-            <a:endParaRPr lang="en-US"/>
-          </a:p>
-        </p:txBody>
-      </p:sp>
-      <p:sp>
-        <p:nvSpPr>
-          <p:cNvPr id="3" name="AutoShape 4" descr="Memory Management in Operating System - GeeksforGeeks">
-            <a:extLst>
-              <a:ext uri="{FF2B5EF4-FFF2-40B4-BE49-F238E27FC236}">
-                <a16:creationId xmlns:a16="http://schemas.microsoft.com/office/drawing/2014/main" id="{0EFEB046-8BB6-A5CA-D5B2-E7D2ED28F0D9}"/>
-              </a:ext>
-            </a:extLst>
-          </p:cNvPr>
-          <p:cNvSpPr>
-            <a:spLocks noChangeAspect="1" noChangeArrowheads="1"/>
-          </p:cNvSpPr>
-          <p:nvPr/>
-        </p:nvSpPr>
-        <p:spPr bwMode="auto">
-          <a:xfrm>
-            <a:off x="4419600" y="2419350"/>
-            <a:ext cx="304800" cy="304800"/>
-          </a:xfrm>
-          <a:prstGeom prst="rect">
-            <a:avLst/>
-          </a:prstGeom>
-          <a:noFill/>
-          <a:extLst>
-            <a:ext uri="{909E8E84-426E-40DD-AFC4-6F175D3DCCD1}">
-              <a14:hiddenFill xmlns:a14="http://schemas.microsoft.com/office/drawing/2010/main">
-                <a:solidFill>
-                  <a:srgbClr val="FFFFFF"/>
-                </a:solidFill>
-              </a14:hiddenFill>
-            </a:ext>
-          </a:extLst>
-        </p:spPr>
-        <p:txBody>
-          <a:bodyPr vert="horz" wrap="square" lIns="91440" tIns="45720" rIns="91440" bIns="45720" numCol="1" anchor="t" anchorCtr="0" compatLnSpc="1">
-            <a:prstTxWarp prst="textNoShape">
-              <a:avLst/>
-            </a:prstTxWarp>
-          </a:bodyPr>
-          <a:lstStyle/>
-          <a:p>
-            <a:endParaRPr lang="en-US"/>
-          </a:p>
-        </p:txBody>
-      </p:sp>
-      <p:sp>
-        <p:nvSpPr>
-          <p:cNvPr id="9" name="Google Shape;465;p27">
-            <a:extLst>
-              <a:ext uri="{FF2B5EF4-FFF2-40B4-BE49-F238E27FC236}">
-                <a16:creationId xmlns:a16="http://schemas.microsoft.com/office/drawing/2014/main" id="{FF785872-21B8-616D-1BDA-FCD6A7B8FDE0}"/>
-              </a:ext>
-            </a:extLst>
-          </p:cNvPr>
-          <p:cNvSpPr txBox="1">
-            <a:spLocks/>
-          </p:cNvSpPr>
-          <p:nvPr/>
-        </p:nvSpPr>
-        <p:spPr>
-          <a:xfrm>
-            <a:off x="4597685" y="55573"/>
-            <a:ext cx="4572000" cy="357300"/>
-          </a:xfrm>
-          <a:prstGeom prst="rect">
-            <a:avLst/>
-          </a:prstGeom>
-          <a:noFill/>
-          <a:ln>
-            <a:noFill/>
-          </a:ln>
-        </p:spPr>
-        <p:txBody>
-          <a:bodyPr spcFirstLastPara="1" wrap="square" lIns="91425" tIns="91425" rIns="91425" bIns="91425" anchor="ctr" anchorCtr="0">
-            <a:noAutofit/>
-          </a:bodyPr>
-          <a:lstStyle>
-            <a:defPPr marR="0" lvl="0" algn="l" rtl="0">
-              <a:lnSpc>
-                <a:spcPct val="100000"/>
-              </a:lnSpc>
-              <a:spcBef>
-                <a:spcPts val="0"/>
-              </a:spcBef>
-              <a:spcAft>
-                <a:spcPts val="0"/>
-              </a:spcAft>
-            </a:defPPr>
-            <a:lvl1pPr marL="457200" marR="0" lvl="0" indent="-317500" algn="l" rtl="0">
-              <a:lnSpc>
-                <a:spcPct val="100000"/>
-              </a:lnSpc>
-              <a:spcBef>
-                <a:spcPts val="0"/>
-              </a:spcBef>
-              <a:spcAft>
-                <a:spcPts val="0"/>
-              </a:spcAft>
-              <a:buClr>
-                <a:schemeClr val="dk2"/>
-              </a:buClr>
-              <a:buSzPts val="2800"/>
-              <a:buFont typeface="Fira Code"/>
-              <a:buNone/>
-              <a:defRPr sz="1800" b="0" i="0" u="none" strike="noStrike" cap="none">
-                <a:solidFill>
-                  <a:schemeClr val="accent3"/>
-                </a:solidFill>
-                <a:latin typeface="Fira Code"/>
-                <a:ea typeface="Fira Code"/>
-                <a:cs typeface="Fira Code"/>
-                <a:sym typeface="Fira Code"/>
-              </a:defRPr>
-            </a:lvl1pPr>
-            <a:lvl2pPr marL="914400" marR="0" lvl="1" indent="-317500" algn="ctr" rtl="0">
-              <a:lnSpc>
-                <a:spcPct val="100000"/>
-              </a:lnSpc>
-              <a:spcBef>
-                <a:spcPts val="0"/>
-              </a:spcBef>
-              <a:spcAft>
-                <a:spcPts val="0"/>
-              </a:spcAft>
-              <a:buClr>
-                <a:schemeClr val="dk2"/>
-              </a:buClr>
-              <a:buSzPts val="2800"/>
-              <a:buFont typeface="Fira Code"/>
-              <a:buNone/>
-              <a:defRPr sz="2800" b="0" i="0" u="none" strike="noStrike" cap="none">
-                <a:solidFill>
-                  <a:schemeClr val="dk2"/>
-                </a:solidFill>
-                <a:latin typeface="Fira Code"/>
-                <a:ea typeface="Fira Code"/>
-                <a:cs typeface="Fira Code"/>
-                <a:sym typeface="Fira Code"/>
-              </a:defRPr>
-            </a:lvl2pPr>
-            <a:lvl3pPr marL="1371600" marR="0" lvl="2" indent="-317500" algn="ctr" rtl="0">
-              <a:lnSpc>
-                <a:spcPct val="100000"/>
-              </a:lnSpc>
-              <a:spcBef>
-                <a:spcPts val="0"/>
-              </a:spcBef>
-              <a:spcAft>
-                <a:spcPts val="0"/>
-              </a:spcAft>
-              <a:buClr>
-                <a:schemeClr val="dk2"/>
-              </a:buClr>
-              <a:buSzPts val="2800"/>
-              <a:buFont typeface="Fira Code"/>
-              <a:buNone/>
-              <a:defRPr sz="2800" b="0" i="0" u="none" strike="noStrike" cap="none">
-                <a:solidFill>
-                  <a:schemeClr val="dk2"/>
-                </a:solidFill>
-                <a:latin typeface="Fira Code"/>
-                <a:ea typeface="Fira Code"/>
-                <a:cs typeface="Fira Code"/>
-                <a:sym typeface="Fira Code"/>
-              </a:defRPr>
-            </a:lvl3pPr>
-            <a:lvl4pPr marL="1828800" marR="0" lvl="3" indent="-317500" algn="ctr" rtl="0">
-              <a:lnSpc>
-                <a:spcPct val="100000"/>
-              </a:lnSpc>
-              <a:spcBef>
-                <a:spcPts val="0"/>
-              </a:spcBef>
-              <a:spcAft>
-                <a:spcPts val="0"/>
-              </a:spcAft>
-              <a:buClr>
-                <a:schemeClr val="dk2"/>
-              </a:buClr>
-              <a:buSzPts val="2800"/>
-              <a:buFont typeface="Fira Code"/>
-              <a:buNone/>
-              <a:defRPr sz="2800" b="0" i="0" u="none" strike="noStrike" cap="none">
-                <a:solidFill>
-                  <a:schemeClr val="dk2"/>
-                </a:solidFill>
-                <a:latin typeface="Fira Code"/>
-                <a:ea typeface="Fira Code"/>
-                <a:cs typeface="Fira Code"/>
-                <a:sym typeface="Fira Code"/>
-              </a:defRPr>
-            </a:lvl4pPr>
-            <a:lvl5pPr marL="2286000" marR="0" lvl="4" indent="-317500" algn="ctr" rtl="0">
-              <a:lnSpc>
-                <a:spcPct val="100000"/>
-              </a:lnSpc>
-              <a:spcBef>
-                <a:spcPts val="0"/>
-              </a:spcBef>
-              <a:spcAft>
-                <a:spcPts val="0"/>
-              </a:spcAft>
-              <a:buClr>
-                <a:schemeClr val="dk2"/>
-              </a:buClr>
-              <a:buSzPts val="2800"/>
-              <a:buFont typeface="Fira Code"/>
-              <a:buNone/>
-              <a:defRPr sz="2800" b="0" i="0" u="none" strike="noStrike" cap="none">
-                <a:solidFill>
-                  <a:schemeClr val="dk2"/>
-                </a:solidFill>
-                <a:latin typeface="Fira Code"/>
-                <a:ea typeface="Fira Code"/>
-                <a:cs typeface="Fira Code"/>
-                <a:sym typeface="Fira Code"/>
-              </a:defRPr>
-            </a:lvl5pPr>
-            <a:lvl6pPr marL="2743200" marR="0" lvl="5" indent="-317500" algn="ctr" rtl="0">
-              <a:lnSpc>
-                <a:spcPct val="100000"/>
-              </a:lnSpc>
-              <a:spcBef>
-                <a:spcPts val="0"/>
-              </a:spcBef>
-              <a:spcAft>
-                <a:spcPts val="0"/>
-              </a:spcAft>
-              <a:buClr>
-                <a:schemeClr val="dk2"/>
-              </a:buClr>
-              <a:buSzPts val="2800"/>
-              <a:buFont typeface="Fira Code"/>
-              <a:buNone/>
-              <a:defRPr sz="2800" b="0" i="0" u="none" strike="noStrike" cap="none">
-                <a:solidFill>
-                  <a:schemeClr val="dk2"/>
-                </a:solidFill>
-                <a:latin typeface="Fira Code"/>
-                <a:ea typeface="Fira Code"/>
-                <a:cs typeface="Fira Code"/>
-                <a:sym typeface="Fira Code"/>
-              </a:defRPr>
-            </a:lvl6pPr>
-            <a:lvl7pPr marL="3200400" marR="0" lvl="6" indent="-317500" algn="ctr" rtl="0">
-              <a:lnSpc>
-                <a:spcPct val="100000"/>
-              </a:lnSpc>
-              <a:spcBef>
-                <a:spcPts val="0"/>
-              </a:spcBef>
-              <a:spcAft>
-                <a:spcPts val="0"/>
-              </a:spcAft>
-              <a:buClr>
-                <a:schemeClr val="dk2"/>
-              </a:buClr>
-              <a:buSzPts val="2800"/>
-              <a:buFont typeface="Fira Code"/>
-              <a:buNone/>
-              <a:defRPr sz="2800" b="0" i="0" u="none" strike="noStrike" cap="none">
-                <a:solidFill>
-                  <a:schemeClr val="dk2"/>
-                </a:solidFill>
-                <a:latin typeface="Fira Code"/>
-                <a:ea typeface="Fira Code"/>
-                <a:cs typeface="Fira Code"/>
-                <a:sym typeface="Fira Code"/>
-              </a:defRPr>
-            </a:lvl7pPr>
-            <a:lvl8pPr marL="3657600" marR="0" lvl="7" indent="-317500" algn="ctr" rtl="0">
-              <a:lnSpc>
-                <a:spcPct val="100000"/>
-              </a:lnSpc>
-              <a:spcBef>
-                <a:spcPts val="0"/>
-              </a:spcBef>
-              <a:spcAft>
-                <a:spcPts val="0"/>
-              </a:spcAft>
-              <a:buClr>
-                <a:schemeClr val="dk2"/>
-              </a:buClr>
-              <a:buSzPts val="2800"/>
-              <a:buFont typeface="Fira Code"/>
-              <a:buNone/>
-              <a:defRPr sz="2800" b="0" i="0" u="none" strike="noStrike" cap="none">
-                <a:solidFill>
-                  <a:schemeClr val="dk2"/>
-                </a:solidFill>
-                <a:latin typeface="Fira Code"/>
-                <a:ea typeface="Fira Code"/>
-                <a:cs typeface="Fira Code"/>
-                <a:sym typeface="Fira Code"/>
-              </a:defRPr>
-            </a:lvl8pPr>
-            <a:lvl9pPr marL="4114800" marR="0" lvl="8" indent="-317500" algn="ctr" rtl="0">
-              <a:lnSpc>
-                <a:spcPct val="100000"/>
-              </a:lnSpc>
-              <a:spcBef>
-                <a:spcPts val="0"/>
-              </a:spcBef>
-              <a:spcAft>
-                <a:spcPts val="0"/>
-              </a:spcAft>
-              <a:buClr>
-                <a:schemeClr val="dk2"/>
-              </a:buClr>
-              <a:buSzPts val="2800"/>
-              <a:buFont typeface="Fira Code"/>
-              <a:buNone/>
-              <a:defRPr sz="2800" b="0" i="0" u="none" strike="noStrike" cap="none">
-                <a:solidFill>
-                  <a:schemeClr val="dk2"/>
-                </a:solidFill>
-                <a:latin typeface="Fira Code"/>
-                <a:ea typeface="Fira Code"/>
-                <a:cs typeface="Fira Code"/>
-                <a:sym typeface="Fira Code"/>
-              </a:defRPr>
-            </a:lvl9pPr>
-          </a:lstStyle>
-          <a:p>
-            <a:pPr marL="0" indent="0" algn="ctr"/>
-            <a:endParaRPr lang="en-US" sz="1000" dirty="0"/>
-          </a:p>
-        </p:txBody>
-      </p:sp>
-      <p:sp>
-        <p:nvSpPr>
-          <p:cNvPr id="16" name="TextBox 15">
-            <a:extLst>
-              <a:ext uri="{FF2B5EF4-FFF2-40B4-BE49-F238E27FC236}">
-                <a16:creationId xmlns:a16="http://schemas.microsoft.com/office/drawing/2014/main" id="{455910D7-EDDC-63E2-BF97-D1B946E445F6}"/>
-              </a:ext>
-            </a:extLst>
-          </p:cNvPr>
-          <p:cNvSpPr txBox="1"/>
-          <p:nvPr/>
-        </p:nvSpPr>
-        <p:spPr>
-          <a:xfrm>
-            <a:off x="1129002" y="1121374"/>
-            <a:ext cx="7489398" cy="584775"/>
-          </a:xfrm>
-          <a:prstGeom prst="rect">
-            <a:avLst/>
-          </a:prstGeom>
-          <a:noFill/>
-          <a:effectLst>
-            <a:outerShdw blurRad="50800" dist="38100" dir="10800000" algn="r" rotWithShape="0">
-              <a:prstClr val="black">
-                <a:alpha val="40000"/>
-              </a:prstClr>
-            </a:outerShdw>
-          </a:effectLst>
-        </p:spPr>
-        <p:txBody>
-          <a:bodyPr wrap="square">
-            <a:spAutoFit/>
-          </a:bodyPr>
-          <a:lstStyle/>
-          <a:p>
-            <a:pPr algn="just">
-              <a:buClr>
-                <a:schemeClr val="accent3"/>
-              </a:buClr>
-            </a:pPr>
-            <a:r>
-              <a:rPr lang="en-US" sz="1600" dirty="0">
-                <a:solidFill>
-                  <a:schemeClr val="accent6"/>
-                </a:solidFill>
-              </a:rPr>
-              <a:t>design a small calculator that can </a:t>
-            </a:r>
-            <a:r>
-              <a:rPr lang="en-US" sz="1600" dirty="0">
-                <a:solidFill>
-                  <a:schemeClr val="accent2"/>
-                </a:solidFill>
-              </a:rPr>
-              <a:t>add</a:t>
-            </a:r>
-            <a:r>
-              <a:rPr lang="en-US" sz="1600" dirty="0">
-                <a:solidFill>
-                  <a:schemeClr val="accent6"/>
-                </a:solidFill>
-              </a:rPr>
-              <a:t>, </a:t>
-            </a:r>
-            <a:r>
-              <a:rPr lang="en-US" sz="1600" dirty="0">
-                <a:solidFill>
-                  <a:schemeClr val="accent2"/>
-                </a:solidFill>
-              </a:rPr>
-              <a:t>subtract, multiply, or divide</a:t>
-            </a:r>
-            <a:r>
-              <a:rPr lang="en-US" sz="1600" dirty="0">
-                <a:solidFill>
-                  <a:schemeClr val="accent6"/>
-                </a:solidFill>
-              </a:rPr>
-              <a:t> two integers using </a:t>
-            </a:r>
-            <a:r>
-              <a:rPr lang="en-US" sz="1600" dirty="0">
-                <a:solidFill>
-                  <a:schemeClr val="accent2"/>
-                </a:solidFill>
-              </a:rPr>
-              <a:t>function pointers</a:t>
-            </a:r>
-            <a:r>
-              <a:rPr lang="en-US" sz="1600" dirty="0">
-                <a:solidFill>
-                  <a:schemeClr val="accent6"/>
-                </a:solidFill>
-              </a:rPr>
-              <a:t>.</a:t>
-            </a:r>
-            <a:endParaRPr lang="en-US" sz="1600" dirty="0">
-              <a:solidFill>
-                <a:schemeClr val="accent6"/>
-              </a:solidFill>
-              <a:latin typeface="Fira Code"/>
-              <a:ea typeface="Fira Code"/>
-              <a:cs typeface="B Nazanin" panose="00000400000000000000" pitchFamily="2" charset="-78"/>
-              <a:sym typeface="Fira Code"/>
-            </a:endParaRPr>
-          </a:p>
-        </p:txBody>
-      </p:sp>
-      <p:pic>
-        <p:nvPicPr>
-          <p:cNvPr id="11" name="Picture 10">
-            <a:extLst>
-              <a:ext uri="{FF2B5EF4-FFF2-40B4-BE49-F238E27FC236}">
-                <a16:creationId xmlns:a16="http://schemas.microsoft.com/office/drawing/2014/main" id="{FA9DA35E-5B7F-01E2-A18D-1C3ADF585B99}"/>
-              </a:ext>
-            </a:extLst>
-          </p:cNvPr>
-          <p:cNvPicPr>
-            <a:picLocks noChangeAspect="1"/>
-          </p:cNvPicPr>
-          <p:nvPr/>
-        </p:nvPicPr>
-        <p:blipFill>
-          <a:blip r:embed="rId3"/>
-          <a:stretch>
-            <a:fillRect/>
-          </a:stretch>
-        </p:blipFill>
-        <p:spPr>
-          <a:xfrm>
-            <a:off x="5323111" y="1778054"/>
-            <a:ext cx="3608615" cy="2247990"/>
-          </a:xfrm>
-          <a:prstGeom prst="rect">
-            <a:avLst/>
-          </a:prstGeom>
-        </p:spPr>
-      </p:pic>
-      <p:sp>
-        <p:nvSpPr>
-          <p:cNvPr id="15" name="TextBox 14">
-            <a:extLst>
-              <a:ext uri="{FF2B5EF4-FFF2-40B4-BE49-F238E27FC236}">
-                <a16:creationId xmlns:a16="http://schemas.microsoft.com/office/drawing/2014/main" id="{285FB9AF-D36E-1562-90EA-36EB1BC891EB}"/>
-              </a:ext>
-            </a:extLst>
-          </p:cNvPr>
-          <p:cNvSpPr txBox="1"/>
-          <p:nvPr/>
-        </p:nvSpPr>
-        <p:spPr>
-          <a:xfrm>
-            <a:off x="1403467" y="2571750"/>
-            <a:ext cx="3729074" cy="584775"/>
-          </a:xfrm>
-          <a:prstGeom prst="rect">
-            <a:avLst/>
-          </a:prstGeom>
-          <a:noFill/>
-          <a:effectLst>
-            <a:outerShdw blurRad="50800" dist="38100" dir="10800000" algn="r" rotWithShape="0">
-              <a:prstClr val="black">
-                <a:alpha val="40000"/>
-              </a:prstClr>
-            </a:outerShdw>
-          </a:effectLst>
-        </p:spPr>
-        <p:txBody>
-          <a:bodyPr wrap="square">
-            <a:spAutoFit/>
-          </a:bodyPr>
-          <a:lstStyle/>
-          <a:p>
-            <a:pPr marL="285750" indent="-285750" algn="just">
-              <a:buClr>
-                <a:schemeClr val="accent3"/>
-              </a:buClr>
-              <a:buFont typeface="Arial" panose="020B0604020202020204" pitchFamily="34" charset="0"/>
-              <a:buChar char="•"/>
-            </a:pPr>
-            <a:r>
-              <a:rPr lang="en-US" sz="1600" dirty="0">
-                <a:solidFill>
-                  <a:schemeClr val="accent6"/>
-                </a:solidFill>
-              </a:rPr>
-              <a:t>Complete the given code by doing what is asked. </a:t>
-            </a:r>
-            <a:endParaRPr lang="en-US" sz="1600" dirty="0">
-              <a:solidFill>
-                <a:schemeClr val="accent6"/>
-              </a:solidFill>
-              <a:latin typeface="Fira Code"/>
-              <a:ea typeface="Fira Code"/>
-              <a:cs typeface="B Nazanin" panose="00000400000000000000" pitchFamily="2" charset="-78"/>
-              <a:sym typeface="Fira Code"/>
-            </a:endParaRPr>
-          </a:p>
-        </p:txBody>
-      </p:sp>
-      <p:sp>
-        <p:nvSpPr>
-          <p:cNvPr id="17" name="Google Shape;465;p27">
-            <a:extLst>
-              <a:ext uri="{FF2B5EF4-FFF2-40B4-BE49-F238E27FC236}">
-                <a16:creationId xmlns:a16="http://schemas.microsoft.com/office/drawing/2014/main" id="{EED8A7AC-1B90-FCE3-456D-AC73B1506AB3}"/>
-              </a:ext>
-            </a:extLst>
-          </p:cNvPr>
-          <p:cNvSpPr txBox="1">
-            <a:spLocks/>
-          </p:cNvSpPr>
-          <p:nvPr/>
-        </p:nvSpPr>
-        <p:spPr>
-          <a:xfrm>
-            <a:off x="4645074" y="104244"/>
-            <a:ext cx="4572000" cy="357300"/>
-          </a:xfrm>
-          <a:prstGeom prst="rect">
-            <a:avLst/>
-          </a:prstGeom>
-          <a:noFill/>
-          <a:ln>
-            <a:noFill/>
-          </a:ln>
-        </p:spPr>
-        <p:txBody>
-          <a:bodyPr spcFirstLastPara="1" wrap="square" lIns="91425" tIns="91425" rIns="91425" bIns="91425" anchor="ctr" anchorCtr="0">
-            <a:noAutofit/>
-          </a:bodyPr>
-          <a:lstStyle>
-            <a:defPPr marR="0" lvl="0" algn="l" rtl="0">
-              <a:lnSpc>
-                <a:spcPct val="100000"/>
-              </a:lnSpc>
-              <a:spcBef>
-                <a:spcPts val="0"/>
-              </a:spcBef>
-              <a:spcAft>
-                <a:spcPts val="0"/>
-              </a:spcAft>
-            </a:defPPr>
-            <a:lvl1pPr marL="457200" marR="0" lvl="0" indent="-317500" algn="l" rtl="0">
-              <a:lnSpc>
-                <a:spcPct val="100000"/>
-              </a:lnSpc>
-              <a:spcBef>
-                <a:spcPts val="0"/>
-              </a:spcBef>
-              <a:spcAft>
-                <a:spcPts val="0"/>
-              </a:spcAft>
-              <a:buClr>
-                <a:schemeClr val="dk2"/>
-              </a:buClr>
-              <a:buSzPts val="2800"/>
-              <a:buFont typeface="Fira Code"/>
-              <a:buNone/>
-              <a:defRPr sz="1800" b="0" i="0" u="none" strike="noStrike" cap="none">
-                <a:solidFill>
-                  <a:schemeClr val="accent3"/>
-                </a:solidFill>
-                <a:latin typeface="Fira Code"/>
-                <a:ea typeface="Fira Code"/>
-                <a:cs typeface="Fira Code"/>
-                <a:sym typeface="Fira Code"/>
-              </a:defRPr>
-            </a:lvl1pPr>
-            <a:lvl2pPr marL="914400" marR="0" lvl="1" indent="-317500" algn="ctr" rtl="0">
-              <a:lnSpc>
-                <a:spcPct val="100000"/>
-              </a:lnSpc>
-              <a:spcBef>
-                <a:spcPts val="0"/>
-              </a:spcBef>
-              <a:spcAft>
-                <a:spcPts val="0"/>
-              </a:spcAft>
-              <a:buClr>
-                <a:schemeClr val="dk2"/>
-              </a:buClr>
-              <a:buSzPts val="2800"/>
-              <a:buFont typeface="Fira Code"/>
-              <a:buNone/>
-              <a:defRPr sz="2800" b="0" i="0" u="none" strike="noStrike" cap="none">
-                <a:solidFill>
-                  <a:schemeClr val="dk2"/>
-                </a:solidFill>
-                <a:latin typeface="Fira Code"/>
-                <a:ea typeface="Fira Code"/>
-                <a:cs typeface="Fira Code"/>
-                <a:sym typeface="Fira Code"/>
-              </a:defRPr>
-            </a:lvl2pPr>
-            <a:lvl3pPr marL="1371600" marR="0" lvl="2" indent="-317500" algn="ctr" rtl="0">
-              <a:lnSpc>
-                <a:spcPct val="100000"/>
-              </a:lnSpc>
-              <a:spcBef>
-                <a:spcPts val="0"/>
-              </a:spcBef>
-              <a:spcAft>
-                <a:spcPts val="0"/>
-              </a:spcAft>
-              <a:buClr>
-                <a:schemeClr val="dk2"/>
-              </a:buClr>
-              <a:buSzPts val="2800"/>
-              <a:buFont typeface="Fira Code"/>
-              <a:buNone/>
-              <a:defRPr sz="2800" b="0" i="0" u="none" strike="noStrike" cap="none">
-                <a:solidFill>
-                  <a:schemeClr val="dk2"/>
-                </a:solidFill>
-                <a:latin typeface="Fira Code"/>
-                <a:ea typeface="Fira Code"/>
-                <a:cs typeface="Fira Code"/>
-                <a:sym typeface="Fira Code"/>
-              </a:defRPr>
-            </a:lvl3pPr>
-            <a:lvl4pPr marL="1828800" marR="0" lvl="3" indent="-317500" algn="ctr" rtl="0">
-              <a:lnSpc>
-                <a:spcPct val="100000"/>
-              </a:lnSpc>
-              <a:spcBef>
-                <a:spcPts val="0"/>
-              </a:spcBef>
-              <a:spcAft>
-                <a:spcPts val="0"/>
-              </a:spcAft>
-              <a:buClr>
-                <a:schemeClr val="dk2"/>
-              </a:buClr>
-              <a:buSzPts val="2800"/>
-              <a:buFont typeface="Fira Code"/>
-              <a:buNone/>
-              <a:defRPr sz="2800" b="0" i="0" u="none" strike="noStrike" cap="none">
-                <a:solidFill>
-                  <a:schemeClr val="dk2"/>
-                </a:solidFill>
-                <a:latin typeface="Fira Code"/>
-                <a:ea typeface="Fira Code"/>
-                <a:cs typeface="Fira Code"/>
-                <a:sym typeface="Fira Code"/>
-              </a:defRPr>
-            </a:lvl4pPr>
-            <a:lvl5pPr marL="2286000" marR="0" lvl="4" indent="-317500" algn="ctr" rtl="0">
-              <a:lnSpc>
-                <a:spcPct val="100000"/>
-              </a:lnSpc>
-              <a:spcBef>
-                <a:spcPts val="0"/>
-              </a:spcBef>
-              <a:spcAft>
-                <a:spcPts val="0"/>
-              </a:spcAft>
-              <a:buClr>
-                <a:schemeClr val="dk2"/>
-              </a:buClr>
-              <a:buSzPts val="2800"/>
-              <a:buFont typeface="Fira Code"/>
-              <a:buNone/>
-              <a:defRPr sz="2800" b="0" i="0" u="none" strike="noStrike" cap="none">
-                <a:solidFill>
-                  <a:schemeClr val="dk2"/>
-                </a:solidFill>
-                <a:latin typeface="Fira Code"/>
-                <a:ea typeface="Fira Code"/>
-                <a:cs typeface="Fira Code"/>
-                <a:sym typeface="Fira Code"/>
-              </a:defRPr>
-            </a:lvl5pPr>
-            <a:lvl6pPr marL="2743200" marR="0" lvl="5" indent="-317500" algn="ctr" rtl="0">
-              <a:lnSpc>
-                <a:spcPct val="100000"/>
-              </a:lnSpc>
-              <a:spcBef>
-                <a:spcPts val="0"/>
-              </a:spcBef>
-              <a:spcAft>
-                <a:spcPts val="0"/>
-              </a:spcAft>
-              <a:buClr>
-                <a:schemeClr val="dk2"/>
-              </a:buClr>
-              <a:buSzPts val="2800"/>
-              <a:buFont typeface="Fira Code"/>
-              <a:buNone/>
-              <a:defRPr sz="2800" b="0" i="0" u="none" strike="noStrike" cap="none">
-                <a:solidFill>
-                  <a:schemeClr val="dk2"/>
-                </a:solidFill>
-                <a:latin typeface="Fira Code"/>
-                <a:ea typeface="Fira Code"/>
-                <a:cs typeface="Fira Code"/>
-                <a:sym typeface="Fira Code"/>
-              </a:defRPr>
-            </a:lvl6pPr>
-            <a:lvl7pPr marL="3200400" marR="0" lvl="6" indent="-317500" algn="ctr" rtl="0">
-              <a:lnSpc>
-                <a:spcPct val="100000"/>
-              </a:lnSpc>
-              <a:spcBef>
-                <a:spcPts val="0"/>
-              </a:spcBef>
-              <a:spcAft>
-                <a:spcPts val="0"/>
-              </a:spcAft>
-              <a:buClr>
-                <a:schemeClr val="dk2"/>
-              </a:buClr>
-              <a:buSzPts val="2800"/>
-              <a:buFont typeface="Fira Code"/>
-              <a:buNone/>
-              <a:defRPr sz="2800" b="0" i="0" u="none" strike="noStrike" cap="none">
-                <a:solidFill>
-                  <a:schemeClr val="dk2"/>
-                </a:solidFill>
-                <a:latin typeface="Fira Code"/>
-                <a:ea typeface="Fira Code"/>
-                <a:cs typeface="Fira Code"/>
-                <a:sym typeface="Fira Code"/>
-              </a:defRPr>
-            </a:lvl7pPr>
-            <a:lvl8pPr marL="3657600" marR="0" lvl="7" indent="-317500" algn="ctr" rtl="0">
-              <a:lnSpc>
-                <a:spcPct val="100000"/>
-              </a:lnSpc>
-              <a:spcBef>
-                <a:spcPts val="0"/>
-              </a:spcBef>
-              <a:spcAft>
-                <a:spcPts val="0"/>
-              </a:spcAft>
-              <a:buClr>
-                <a:schemeClr val="dk2"/>
-              </a:buClr>
-              <a:buSzPts val="2800"/>
-              <a:buFont typeface="Fira Code"/>
-              <a:buNone/>
-              <a:defRPr sz="2800" b="0" i="0" u="none" strike="noStrike" cap="none">
-                <a:solidFill>
-                  <a:schemeClr val="dk2"/>
-                </a:solidFill>
-                <a:latin typeface="Fira Code"/>
-                <a:ea typeface="Fira Code"/>
-                <a:cs typeface="Fira Code"/>
-                <a:sym typeface="Fira Code"/>
-              </a:defRPr>
-            </a:lvl8pPr>
-            <a:lvl9pPr marL="4114800" marR="0" lvl="8" indent="-317500" algn="ctr" rtl="0">
-              <a:lnSpc>
-                <a:spcPct val="100000"/>
-              </a:lnSpc>
-              <a:spcBef>
-                <a:spcPts val="0"/>
-              </a:spcBef>
-              <a:spcAft>
-                <a:spcPts val="0"/>
-              </a:spcAft>
-              <a:buClr>
-                <a:schemeClr val="dk2"/>
-              </a:buClr>
-              <a:buSzPts val="2800"/>
-              <a:buFont typeface="Fira Code"/>
-              <a:buNone/>
-              <a:defRPr sz="2800" b="0" i="0" u="none" strike="noStrike" cap="none">
-                <a:solidFill>
-                  <a:schemeClr val="dk2"/>
-                </a:solidFill>
-                <a:latin typeface="Fira Code"/>
-                <a:ea typeface="Fira Code"/>
-                <a:cs typeface="Fira Code"/>
-                <a:sym typeface="Fira Code"/>
-              </a:defRPr>
-            </a:lvl9pPr>
-          </a:lstStyle>
-          <a:p>
-            <a:pPr marL="0" indent="0" algn="ctr"/>
-            <a:r>
-              <a:rPr lang="en-US" sz="1000" dirty="0"/>
-              <a:t>Task 3</a:t>
-            </a:r>
-          </a:p>
-        </p:txBody>
-      </p:sp>
-    </p:spTree>
-    <p:extLst>
-      <p:ext uri="{BB962C8B-B14F-4D97-AF65-F5344CB8AC3E}">
-        <p14:creationId xmlns:p14="http://schemas.microsoft.com/office/powerpoint/2010/main" val="1376863328"/>
-      </p:ext>
-    </p:extLst>
-  </p:cSld>
-  <p:clrMapOvr>
-    <a:masterClrMapping/>
-  </p:clrMapOvr>
-</p:sld>
-</file>
-
-<file path=ppt/slides/slide11.xml><?xml version="1.0" encoding="utf-8"?>
-<p:sld xmlns:a="http://schemas.openxmlformats.org/drawingml/2006/main" xmlns:r="http://schemas.openxmlformats.org/officeDocument/2006/relationships" xmlns:p="http://schemas.openxmlformats.org/presentationml/2006/main">
-  <p:cSld>
-    <p:spTree>
-      <p:nvGrpSpPr>
-        <p:cNvPr id="1" name="Shape 457">
-          <a:extLst>
-            <a:ext uri="{FF2B5EF4-FFF2-40B4-BE49-F238E27FC236}">
-              <a16:creationId xmlns:a16="http://schemas.microsoft.com/office/drawing/2014/main" id="{DA60A977-4433-2730-2846-A8A1A542F289}"/>
-            </a:ext>
-          </a:extLst>
-        </p:cNvPr>
-        <p:cNvGrpSpPr/>
-        <p:nvPr/>
-      </p:nvGrpSpPr>
-      <p:grpSpPr>
-        <a:xfrm>
-          <a:off x="0" y="0"/>
-          <a:ext cx="0" cy="0"/>
-          <a:chOff x="0" y="0"/>
-          <a:chExt cx="0" cy="0"/>
-        </a:xfrm>
-      </p:grpSpPr>
-      <p:sp>
-        <p:nvSpPr>
-          <p:cNvPr id="465" name="Google Shape;465;p27">
-            <a:extLst>
-              <a:ext uri="{FF2B5EF4-FFF2-40B4-BE49-F238E27FC236}">
-                <a16:creationId xmlns:a16="http://schemas.microsoft.com/office/drawing/2014/main" id="{314B5640-663F-CBFF-607F-6BAE02A24E38}"/>
-              </a:ext>
-            </a:extLst>
-          </p:cNvPr>
-          <p:cNvSpPr txBox="1">
-            <a:spLocks noGrp="1"/>
-          </p:cNvSpPr>
-          <p:nvPr>
-            <p:ph type="subTitle" idx="1"/>
-          </p:nvPr>
-        </p:nvSpPr>
-        <p:spPr>
-          <a:xfrm>
-            <a:off x="-5975" y="91525"/>
-            <a:ext cx="4572000" cy="357300"/>
-          </a:xfrm>
-          <a:prstGeom prst="rect">
-            <a:avLst/>
-          </a:prstGeom>
-        </p:spPr>
-        <p:txBody>
-          <a:bodyPr spcFirstLastPara="1" wrap="square" lIns="91425" tIns="91425" rIns="91425" bIns="91425" anchor="ctr" anchorCtr="0">
-            <a:noAutofit/>
-          </a:bodyPr>
-          <a:lstStyle/>
-          <a:p>
-            <a:pPr marL="0" lvl="0" indent="0" algn="ctr" rtl="0">
-              <a:spcBef>
-                <a:spcPts val="0"/>
-              </a:spcBef>
-              <a:spcAft>
-                <a:spcPts val="0"/>
-              </a:spcAft>
-              <a:buNone/>
-            </a:pPr>
-            <a:r>
-              <a:rPr lang="en-US" sz="1000" dirty="0" err="1"/>
-              <a:t>Pointer.c</a:t>
-            </a:r>
-            <a:endParaRPr sz="1000" dirty="0"/>
-          </a:p>
-        </p:txBody>
-      </p:sp>
-      <p:sp>
-        <p:nvSpPr>
-          <p:cNvPr id="12" name="AutoShape 4">
-            <a:extLst>
-              <a:ext uri="{FF2B5EF4-FFF2-40B4-BE49-F238E27FC236}">
-                <a16:creationId xmlns:a16="http://schemas.microsoft.com/office/drawing/2014/main" id="{3DB073D9-C887-7233-B648-0F11E7D02C04}"/>
-              </a:ext>
-            </a:extLst>
-          </p:cNvPr>
-          <p:cNvSpPr>
-            <a:spLocks noChangeAspect="1" noChangeArrowheads="1"/>
-          </p:cNvSpPr>
-          <p:nvPr/>
-        </p:nvSpPr>
-        <p:spPr bwMode="auto">
-          <a:xfrm>
-            <a:off x="3405600" y="2362439"/>
-            <a:ext cx="1318800" cy="1318800"/>
-          </a:xfrm>
-          <a:prstGeom prst="rect">
-            <a:avLst/>
-          </a:prstGeom>
-          <a:noFill/>
-          <a:extLst>
-            <a:ext uri="{909E8E84-426E-40DD-AFC4-6F175D3DCCD1}">
-              <a14:hiddenFill xmlns:a14="http://schemas.microsoft.com/office/drawing/2010/main">
-                <a:solidFill>
-                  <a:srgbClr val="FFFFFF"/>
-                </a:solidFill>
-              </a14:hiddenFill>
-            </a:ext>
-          </a:extLst>
-        </p:spPr>
-        <p:txBody>
-          <a:bodyPr vert="horz" wrap="square" lIns="91440" tIns="45720" rIns="91440" bIns="45720" numCol="1" anchor="t" anchorCtr="0" compatLnSpc="1">
-            <a:prstTxWarp prst="textNoShape">
-              <a:avLst/>
-            </a:prstTxWarp>
-          </a:bodyPr>
-          <a:lstStyle/>
-          <a:p>
-            <a:endParaRPr lang="en-US"/>
-          </a:p>
-        </p:txBody>
-      </p:sp>
-      <p:sp>
-        <p:nvSpPr>
-          <p:cNvPr id="4" name="TextBox 3">
-            <a:extLst>
-              <a:ext uri="{FF2B5EF4-FFF2-40B4-BE49-F238E27FC236}">
-                <a16:creationId xmlns:a16="http://schemas.microsoft.com/office/drawing/2014/main" id="{7A68449C-E43B-EEA5-AE74-8C30DF34895D}"/>
-              </a:ext>
-            </a:extLst>
-          </p:cNvPr>
-          <p:cNvSpPr txBox="1"/>
-          <p:nvPr/>
-        </p:nvSpPr>
-        <p:spPr>
-          <a:xfrm>
-            <a:off x="1005895" y="757579"/>
-            <a:ext cx="7993294" cy="584775"/>
-          </a:xfrm>
-          <a:prstGeom prst="rect">
-            <a:avLst/>
-          </a:prstGeom>
-          <a:noFill/>
-          <a:effectLst>
-            <a:outerShdw blurRad="50800" dist="38100" dir="10800000" algn="r" rotWithShape="0">
-              <a:prstClr val="black">
-                <a:alpha val="40000"/>
-              </a:prstClr>
-            </a:outerShdw>
-          </a:effectLst>
-        </p:spPr>
-        <p:txBody>
-          <a:bodyPr wrap="square">
-            <a:spAutoFit/>
-          </a:bodyPr>
-          <a:lstStyle/>
-          <a:p>
-            <a:pPr algn="just">
-              <a:buClr>
-                <a:schemeClr val="accent3"/>
-              </a:buClr>
-            </a:pPr>
-            <a:endParaRPr lang="en-US" sz="1600" dirty="0">
-              <a:solidFill>
-                <a:schemeClr val="accent3"/>
-              </a:solidFill>
-              <a:latin typeface="Fira Code"/>
-              <a:ea typeface="Fira Code"/>
-              <a:cs typeface="B Nazanin" panose="00000400000000000000" pitchFamily="2" charset="-78"/>
-              <a:sym typeface="Fira Code"/>
-            </a:endParaRPr>
-          </a:p>
-          <a:p>
-            <a:pPr algn="just" rtl="1">
-              <a:buClr>
-                <a:schemeClr val="accent3"/>
-              </a:buClr>
-            </a:pPr>
-            <a:endParaRPr lang="en-US" sz="1600" dirty="0">
-              <a:solidFill>
-                <a:schemeClr val="accent3"/>
-              </a:solidFill>
-              <a:latin typeface="Fira Code"/>
-              <a:ea typeface="Fira Code"/>
-              <a:cs typeface="B Nazanin" panose="00000400000000000000" pitchFamily="2" charset="-78"/>
-              <a:sym typeface="Fira Code"/>
-            </a:endParaRPr>
-          </a:p>
-        </p:txBody>
-      </p:sp>
-      <p:sp>
-        <p:nvSpPr>
-          <p:cNvPr id="14" name="Google Shape;814;p39">
-            <a:extLst>
-              <a:ext uri="{FF2B5EF4-FFF2-40B4-BE49-F238E27FC236}">
-                <a16:creationId xmlns:a16="http://schemas.microsoft.com/office/drawing/2014/main" id="{9E00D2AF-309D-1F66-73D4-97983600EC73}"/>
-              </a:ext>
-            </a:extLst>
-          </p:cNvPr>
-          <p:cNvSpPr txBox="1">
-            <a:spLocks/>
-          </p:cNvSpPr>
-          <p:nvPr/>
-        </p:nvSpPr>
-        <p:spPr>
-          <a:xfrm>
-            <a:off x="1005895" y="270175"/>
-            <a:ext cx="5877790" cy="974809"/>
-          </a:xfrm>
-          <a:prstGeom prst="rect">
-            <a:avLst/>
-          </a:prstGeom>
-          <a:noFill/>
-          <a:ln>
-            <a:noFill/>
-          </a:ln>
-        </p:spPr>
-        <p:txBody>
-          <a:bodyPr spcFirstLastPara="1" wrap="square" lIns="91425" tIns="91425" rIns="91425" bIns="91425" anchor="ctr" anchorCtr="0">
-            <a:noAutofit/>
-          </a:bodyPr>
-          <a:lstStyle>
-            <a:defPPr marR="0" lvl="0" algn="l" rtl="0">
-              <a:lnSpc>
-                <a:spcPct val="100000"/>
-              </a:lnSpc>
-              <a:spcBef>
-                <a:spcPts val="0"/>
-              </a:spcBef>
-              <a:spcAft>
-                <a:spcPts val="0"/>
-              </a:spcAft>
-            </a:defPPr>
-            <a:lvl1pPr marR="0" lvl="0" algn="l" rtl="0">
-              <a:lnSpc>
-                <a:spcPct val="100000"/>
-              </a:lnSpc>
-              <a:spcBef>
-                <a:spcPts val="0"/>
-              </a:spcBef>
-              <a:spcAft>
-                <a:spcPts val="0"/>
-              </a:spcAft>
-              <a:buClr>
-                <a:schemeClr val="lt1"/>
-              </a:buClr>
-              <a:buSzPts val="5200"/>
-              <a:buFont typeface="Fira Code"/>
-              <a:buNone/>
-              <a:defRPr sz="3000" b="0" i="0" u="none" strike="noStrike" cap="none">
-                <a:solidFill>
-                  <a:schemeClr val="lt1"/>
-                </a:solidFill>
-                <a:latin typeface="Fira Code"/>
-                <a:ea typeface="Fira Code"/>
-                <a:cs typeface="Fira Code"/>
-                <a:sym typeface="Fira Code"/>
-              </a:defRPr>
-            </a:lvl1pPr>
-            <a:lvl2pPr marR="0" lvl="1" algn="ctr" rtl="0">
-              <a:lnSpc>
-                <a:spcPct val="100000"/>
-              </a:lnSpc>
-              <a:spcBef>
-                <a:spcPts val="0"/>
-              </a:spcBef>
-              <a:spcAft>
-                <a:spcPts val="0"/>
-              </a:spcAft>
-              <a:buClr>
-                <a:schemeClr val="dk1"/>
-              </a:buClr>
-              <a:buSzPts val="5200"/>
-              <a:buFont typeface="Fira Code"/>
-              <a:buNone/>
-              <a:defRPr sz="5200" b="0" i="0" u="none" strike="noStrike" cap="none">
-                <a:solidFill>
-                  <a:schemeClr val="dk1"/>
-                </a:solidFill>
-                <a:latin typeface="Fira Code"/>
-                <a:ea typeface="Fira Code"/>
-                <a:cs typeface="Fira Code"/>
-                <a:sym typeface="Fira Code"/>
-              </a:defRPr>
-            </a:lvl2pPr>
-            <a:lvl3pPr marR="0" lvl="2" algn="ctr" rtl="0">
-              <a:lnSpc>
-                <a:spcPct val="100000"/>
-              </a:lnSpc>
-              <a:spcBef>
-                <a:spcPts val="0"/>
-              </a:spcBef>
-              <a:spcAft>
-                <a:spcPts val="0"/>
-              </a:spcAft>
-              <a:buClr>
-                <a:schemeClr val="dk1"/>
-              </a:buClr>
-              <a:buSzPts val="5200"/>
-              <a:buFont typeface="Fira Code"/>
-              <a:buNone/>
-              <a:defRPr sz="5200" b="0" i="0" u="none" strike="noStrike" cap="none">
-                <a:solidFill>
-                  <a:schemeClr val="dk1"/>
-                </a:solidFill>
-                <a:latin typeface="Fira Code"/>
-                <a:ea typeface="Fira Code"/>
-                <a:cs typeface="Fira Code"/>
-                <a:sym typeface="Fira Code"/>
-              </a:defRPr>
-            </a:lvl3pPr>
-            <a:lvl4pPr marR="0" lvl="3" algn="ctr" rtl="0">
-              <a:lnSpc>
-                <a:spcPct val="100000"/>
-              </a:lnSpc>
-              <a:spcBef>
-                <a:spcPts val="0"/>
-              </a:spcBef>
-              <a:spcAft>
-                <a:spcPts val="0"/>
-              </a:spcAft>
-              <a:buClr>
-                <a:schemeClr val="dk1"/>
-              </a:buClr>
-              <a:buSzPts val="5200"/>
-              <a:buFont typeface="Fira Code"/>
-              <a:buNone/>
-              <a:defRPr sz="5200" b="0" i="0" u="none" strike="noStrike" cap="none">
-                <a:solidFill>
-                  <a:schemeClr val="dk1"/>
-                </a:solidFill>
-                <a:latin typeface="Fira Code"/>
-                <a:ea typeface="Fira Code"/>
-                <a:cs typeface="Fira Code"/>
-                <a:sym typeface="Fira Code"/>
-              </a:defRPr>
-            </a:lvl4pPr>
-            <a:lvl5pPr marR="0" lvl="4" algn="ctr" rtl="0">
-              <a:lnSpc>
-                <a:spcPct val="100000"/>
-              </a:lnSpc>
-              <a:spcBef>
-                <a:spcPts val="0"/>
-              </a:spcBef>
-              <a:spcAft>
-                <a:spcPts val="0"/>
-              </a:spcAft>
-              <a:buClr>
-                <a:schemeClr val="dk1"/>
-              </a:buClr>
-              <a:buSzPts val="5200"/>
-              <a:buFont typeface="Fira Code"/>
-              <a:buNone/>
-              <a:defRPr sz="5200" b="0" i="0" u="none" strike="noStrike" cap="none">
-                <a:solidFill>
-                  <a:schemeClr val="dk1"/>
-                </a:solidFill>
-                <a:latin typeface="Fira Code"/>
-                <a:ea typeface="Fira Code"/>
-                <a:cs typeface="Fira Code"/>
-                <a:sym typeface="Fira Code"/>
-              </a:defRPr>
-            </a:lvl5pPr>
-            <a:lvl6pPr marR="0" lvl="5" algn="ctr" rtl="0">
-              <a:lnSpc>
-                <a:spcPct val="100000"/>
-              </a:lnSpc>
-              <a:spcBef>
-                <a:spcPts val="0"/>
-              </a:spcBef>
-              <a:spcAft>
-                <a:spcPts val="0"/>
-              </a:spcAft>
-              <a:buClr>
-                <a:schemeClr val="dk1"/>
-              </a:buClr>
-              <a:buSzPts val="5200"/>
-              <a:buFont typeface="Fira Code"/>
-              <a:buNone/>
-              <a:defRPr sz="5200" b="0" i="0" u="none" strike="noStrike" cap="none">
-                <a:solidFill>
-                  <a:schemeClr val="dk1"/>
-                </a:solidFill>
-                <a:latin typeface="Fira Code"/>
-                <a:ea typeface="Fira Code"/>
-                <a:cs typeface="Fira Code"/>
-                <a:sym typeface="Fira Code"/>
-              </a:defRPr>
-            </a:lvl6pPr>
-            <a:lvl7pPr marR="0" lvl="6" algn="ctr" rtl="0">
-              <a:lnSpc>
-                <a:spcPct val="100000"/>
-              </a:lnSpc>
-              <a:spcBef>
-                <a:spcPts val="0"/>
-              </a:spcBef>
-              <a:spcAft>
-                <a:spcPts val="0"/>
-              </a:spcAft>
-              <a:buClr>
-                <a:schemeClr val="dk1"/>
-              </a:buClr>
-              <a:buSzPts val="5200"/>
-              <a:buFont typeface="Fira Code"/>
-              <a:buNone/>
-              <a:defRPr sz="5200" b="0" i="0" u="none" strike="noStrike" cap="none">
-                <a:solidFill>
-                  <a:schemeClr val="dk1"/>
-                </a:solidFill>
-                <a:latin typeface="Fira Code"/>
-                <a:ea typeface="Fira Code"/>
-                <a:cs typeface="Fira Code"/>
-                <a:sym typeface="Fira Code"/>
-              </a:defRPr>
-            </a:lvl7pPr>
-            <a:lvl8pPr marR="0" lvl="7" algn="ctr" rtl="0">
-              <a:lnSpc>
-                <a:spcPct val="100000"/>
-              </a:lnSpc>
-              <a:spcBef>
-                <a:spcPts val="0"/>
-              </a:spcBef>
-              <a:spcAft>
-                <a:spcPts val="0"/>
-              </a:spcAft>
-              <a:buClr>
-                <a:schemeClr val="dk1"/>
-              </a:buClr>
-              <a:buSzPts val="5200"/>
-              <a:buFont typeface="Fira Code"/>
-              <a:buNone/>
-              <a:defRPr sz="5200" b="0" i="0" u="none" strike="noStrike" cap="none">
-                <a:solidFill>
-                  <a:schemeClr val="dk1"/>
-                </a:solidFill>
-                <a:latin typeface="Fira Code"/>
-                <a:ea typeface="Fira Code"/>
-                <a:cs typeface="Fira Code"/>
-                <a:sym typeface="Fira Code"/>
-              </a:defRPr>
-            </a:lvl8pPr>
-            <a:lvl9pPr marR="0" lvl="8" algn="ctr" rtl="0">
-              <a:lnSpc>
-                <a:spcPct val="100000"/>
-              </a:lnSpc>
-              <a:spcBef>
-                <a:spcPts val="0"/>
-              </a:spcBef>
-              <a:spcAft>
-                <a:spcPts val="0"/>
-              </a:spcAft>
-              <a:buClr>
-                <a:schemeClr val="dk1"/>
-              </a:buClr>
-              <a:buSzPts val="5200"/>
-              <a:buFont typeface="Fira Code"/>
-              <a:buNone/>
-              <a:defRPr sz="5200" b="0" i="0" u="none" strike="noStrike" cap="none">
-                <a:solidFill>
-                  <a:schemeClr val="dk1"/>
-                </a:solidFill>
-                <a:latin typeface="Fira Code"/>
-                <a:ea typeface="Fira Code"/>
-                <a:cs typeface="Fira Code"/>
-                <a:sym typeface="Fira Code"/>
-              </a:defRPr>
-            </a:lvl9pPr>
-          </a:lstStyle>
-          <a:p>
-            <a:r>
-              <a:rPr lang="en-US" sz="2400" dirty="0">
-                <a:solidFill>
-                  <a:schemeClr val="accent2"/>
-                </a:solidFill>
-              </a:rPr>
-              <a:t>Function Pointer</a:t>
-            </a:r>
-          </a:p>
-        </p:txBody>
-      </p:sp>
-      <p:sp>
-        <p:nvSpPr>
-          <p:cNvPr id="6" name="Google Shape;473;p28">
-            <a:extLst>
-              <a:ext uri="{FF2B5EF4-FFF2-40B4-BE49-F238E27FC236}">
-                <a16:creationId xmlns:a16="http://schemas.microsoft.com/office/drawing/2014/main" id="{434C7051-5A92-1FDE-8137-939493FD73BA}"/>
-              </a:ext>
-            </a:extLst>
-          </p:cNvPr>
-          <p:cNvSpPr txBox="1">
-            <a:spLocks/>
-          </p:cNvSpPr>
-          <p:nvPr/>
-        </p:nvSpPr>
-        <p:spPr>
-          <a:xfrm>
-            <a:off x="729503" y="4701324"/>
-            <a:ext cx="4865100" cy="357300"/>
-          </a:xfrm>
-          <a:prstGeom prst="rect">
-            <a:avLst/>
-          </a:prstGeom>
-          <a:noFill/>
-          <a:ln>
-            <a:noFill/>
-          </a:ln>
-        </p:spPr>
-        <p:txBody>
-          <a:bodyPr spcFirstLastPara="1" wrap="square" lIns="91425" tIns="91425" rIns="91425" bIns="91425" anchor="ctr" anchorCtr="0">
-            <a:noAutofit/>
-          </a:bodyPr>
-          <a:lstStyle>
-            <a:defPPr marR="0" lvl="0" algn="l" rtl="0">
-              <a:lnSpc>
-                <a:spcPct val="100000"/>
-              </a:lnSpc>
-              <a:spcBef>
-                <a:spcPts val="0"/>
-              </a:spcBef>
-              <a:spcAft>
-                <a:spcPts val="0"/>
-              </a:spcAft>
-            </a:defPPr>
-            <a:lvl1pPr marL="457200" marR="0" lvl="0" indent="-317500" algn="l" rtl="0">
-              <a:lnSpc>
-                <a:spcPct val="100000"/>
-              </a:lnSpc>
-              <a:spcBef>
-                <a:spcPts val="0"/>
-              </a:spcBef>
-              <a:spcAft>
-                <a:spcPts val="0"/>
-              </a:spcAft>
-              <a:buClr>
-                <a:schemeClr val="dk2"/>
-              </a:buClr>
-              <a:buSzPts val="1400"/>
-              <a:buFont typeface="Fira Code"/>
-              <a:buChar char="●"/>
-              <a:defRPr sz="1400" b="0" i="0" u="none" strike="noStrike" cap="none">
-                <a:solidFill>
-                  <a:schemeClr val="dk2"/>
-                </a:solidFill>
-                <a:latin typeface="Fira Code"/>
-                <a:ea typeface="Fira Code"/>
-                <a:cs typeface="Fira Code"/>
-                <a:sym typeface="Fira Code"/>
-              </a:defRPr>
-            </a:lvl1pPr>
-            <a:lvl2pPr marL="914400" marR="0" lvl="1" indent="-317500" algn="l" rtl="0">
-              <a:lnSpc>
-                <a:spcPct val="100000"/>
-              </a:lnSpc>
-              <a:spcBef>
-                <a:spcPts val="0"/>
-              </a:spcBef>
-              <a:spcAft>
-                <a:spcPts val="0"/>
-              </a:spcAft>
-              <a:buClr>
-                <a:schemeClr val="dk2"/>
-              </a:buClr>
-              <a:buSzPts val="1400"/>
-              <a:buFont typeface="Fira Code"/>
-              <a:buChar char="○"/>
-              <a:defRPr sz="1400" b="0" i="0" u="none" strike="noStrike" cap="none">
-                <a:solidFill>
-                  <a:schemeClr val="dk2"/>
-                </a:solidFill>
-                <a:latin typeface="Fira Code"/>
-                <a:ea typeface="Fira Code"/>
-                <a:cs typeface="Fira Code"/>
-                <a:sym typeface="Fira Code"/>
-              </a:defRPr>
-            </a:lvl2pPr>
-            <a:lvl3pPr marL="1371600" marR="0" lvl="2" indent="-317500" algn="l" rtl="0">
-              <a:lnSpc>
-                <a:spcPct val="100000"/>
-              </a:lnSpc>
-              <a:spcBef>
-                <a:spcPts val="0"/>
-              </a:spcBef>
-              <a:spcAft>
-                <a:spcPts val="0"/>
-              </a:spcAft>
-              <a:buClr>
-                <a:schemeClr val="dk2"/>
-              </a:buClr>
-              <a:buSzPts val="1400"/>
-              <a:buFont typeface="Fira Code"/>
-              <a:buChar char="■"/>
-              <a:defRPr sz="1400" b="0" i="0" u="none" strike="noStrike" cap="none">
-                <a:solidFill>
-                  <a:schemeClr val="dk2"/>
-                </a:solidFill>
-                <a:latin typeface="Fira Code"/>
-                <a:ea typeface="Fira Code"/>
-                <a:cs typeface="Fira Code"/>
-                <a:sym typeface="Fira Code"/>
-              </a:defRPr>
-            </a:lvl3pPr>
-            <a:lvl4pPr marL="1828800" marR="0" lvl="3" indent="-317500" algn="l" rtl="0">
-              <a:lnSpc>
-                <a:spcPct val="100000"/>
-              </a:lnSpc>
-              <a:spcBef>
-                <a:spcPts val="0"/>
-              </a:spcBef>
-              <a:spcAft>
-                <a:spcPts val="0"/>
-              </a:spcAft>
-              <a:buClr>
-                <a:schemeClr val="dk2"/>
-              </a:buClr>
-              <a:buSzPts val="1400"/>
-              <a:buFont typeface="Fira Code"/>
-              <a:buChar char="●"/>
-              <a:defRPr sz="1400" b="0" i="0" u="none" strike="noStrike" cap="none">
-                <a:solidFill>
-                  <a:schemeClr val="dk2"/>
-                </a:solidFill>
-                <a:latin typeface="Fira Code"/>
-                <a:ea typeface="Fira Code"/>
-                <a:cs typeface="Fira Code"/>
-                <a:sym typeface="Fira Code"/>
-              </a:defRPr>
-            </a:lvl4pPr>
-            <a:lvl5pPr marL="2286000" marR="0" lvl="4" indent="-317500" algn="l" rtl="0">
-              <a:lnSpc>
-                <a:spcPct val="100000"/>
-              </a:lnSpc>
-              <a:spcBef>
-                <a:spcPts val="0"/>
-              </a:spcBef>
-              <a:spcAft>
-                <a:spcPts val="0"/>
-              </a:spcAft>
-              <a:buClr>
-                <a:schemeClr val="dk2"/>
-              </a:buClr>
-              <a:buSzPts val="1400"/>
-              <a:buFont typeface="Fira Code"/>
-              <a:buChar char="○"/>
-              <a:defRPr sz="1400" b="0" i="0" u="none" strike="noStrike" cap="none">
-                <a:solidFill>
-                  <a:schemeClr val="dk2"/>
-                </a:solidFill>
-                <a:latin typeface="Fira Code"/>
-                <a:ea typeface="Fira Code"/>
-                <a:cs typeface="Fira Code"/>
-                <a:sym typeface="Fira Code"/>
-              </a:defRPr>
-            </a:lvl5pPr>
-            <a:lvl6pPr marL="2743200" marR="0" lvl="5" indent="-317500" algn="l" rtl="0">
-              <a:lnSpc>
-                <a:spcPct val="100000"/>
-              </a:lnSpc>
-              <a:spcBef>
-                <a:spcPts val="0"/>
-              </a:spcBef>
-              <a:spcAft>
-                <a:spcPts val="0"/>
-              </a:spcAft>
-              <a:buClr>
-                <a:schemeClr val="dk2"/>
-              </a:buClr>
-              <a:buSzPts val="1400"/>
-              <a:buFont typeface="Fira Code"/>
-              <a:buChar char="■"/>
-              <a:defRPr sz="1400" b="0" i="0" u="none" strike="noStrike" cap="none">
-                <a:solidFill>
-                  <a:schemeClr val="dk2"/>
-                </a:solidFill>
-                <a:latin typeface="Fira Code"/>
-                <a:ea typeface="Fira Code"/>
-                <a:cs typeface="Fira Code"/>
-                <a:sym typeface="Fira Code"/>
-              </a:defRPr>
-            </a:lvl6pPr>
-            <a:lvl7pPr marL="3200400" marR="0" lvl="6" indent="-317500" algn="l" rtl="0">
-              <a:lnSpc>
-                <a:spcPct val="100000"/>
-              </a:lnSpc>
-              <a:spcBef>
-                <a:spcPts val="0"/>
-              </a:spcBef>
-              <a:spcAft>
-                <a:spcPts val="0"/>
-              </a:spcAft>
-              <a:buClr>
-                <a:schemeClr val="dk2"/>
-              </a:buClr>
-              <a:buSzPts val="1400"/>
-              <a:buFont typeface="Fira Code"/>
-              <a:buChar char="●"/>
-              <a:defRPr sz="1400" b="0" i="0" u="none" strike="noStrike" cap="none">
-                <a:solidFill>
-                  <a:schemeClr val="dk2"/>
-                </a:solidFill>
-                <a:latin typeface="Fira Code"/>
-                <a:ea typeface="Fira Code"/>
-                <a:cs typeface="Fira Code"/>
-                <a:sym typeface="Fira Code"/>
-              </a:defRPr>
-            </a:lvl7pPr>
-            <a:lvl8pPr marL="3657600" marR="0" lvl="7" indent="-317500" algn="l" rtl="0">
-              <a:lnSpc>
-                <a:spcPct val="100000"/>
-              </a:lnSpc>
-              <a:spcBef>
-                <a:spcPts val="0"/>
-              </a:spcBef>
-              <a:spcAft>
-                <a:spcPts val="0"/>
-              </a:spcAft>
-              <a:buClr>
-                <a:schemeClr val="dk2"/>
-              </a:buClr>
-              <a:buSzPts val="1400"/>
-              <a:buFont typeface="Fira Code"/>
-              <a:buChar char="○"/>
-              <a:defRPr sz="1400" b="0" i="0" u="none" strike="noStrike" cap="none">
-                <a:solidFill>
-                  <a:schemeClr val="dk2"/>
-                </a:solidFill>
-                <a:latin typeface="Fira Code"/>
-                <a:ea typeface="Fira Code"/>
-                <a:cs typeface="Fira Code"/>
-                <a:sym typeface="Fira Code"/>
-              </a:defRPr>
-            </a:lvl8pPr>
-            <a:lvl9pPr marL="4114800" marR="0" lvl="8" indent="-317500" algn="l" rtl="0">
-              <a:lnSpc>
-                <a:spcPct val="100000"/>
-              </a:lnSpc>
-              <a:spcBef>
-                <a:spcPts val="0"/>
-              </a:spcBef>
-              <a:spcAft>
-                <a:spcPts val="0"/>
-              </a:spcAft>
-              <a:buClr>
-                <a:schemeClr val="dk2"/>
-              </a:buClr>
-              <a:buSzPts val="1400"/>
-              <a:buFont typeface="Fira Code"/>
-              <a:buChar char="■"/>
-              <a:defRPr sz="1400" b="0" i="0" u="none" strike="noStrike" cap="none">
-                <a:solidFill>
-                  <a:schemeClr val="dk2"/>
-                </a:solidFill>
-                <a:latin typeface="Fira Code"/>
-                <a:ea typeface="Fira Code"/>
-                <a:cs typeface="Fira Code"/>
-                <a:sym typeface="Fira Code"/>
-              </a:defRPr>
-            </a:lvl9pPr>
-          </a:lstStyle>
-          <a:p>
-            <a:pPr marL="0" indent="0">
-              <a:buFont typeface="Fira Code"/>
-              <a:buNone/>
-            </a:pPr>
-            <a:r>
-              <a:rPr lang="en-US" dirty="0">
-                <a:solidFill>
-                  <a:schemeClr val="accent3"/>
-                </a:solidFill>
-              </a:rPr>
-              <a:t>Programming Language Lab</a:t>
-            </a:r>
-          </a:p>
-        </p:txBody>
-      </p:sp>
-      <p:sp>
-        <p:nvSpPr>
-          <p:cNvPr id="7" name="Google Shape;473;p28">
-            <a:extLst>
-              <a:ext uri="{FF2B5EF4-FFF2-40B4-BE49-F238E27FC236}">
-                <a16:creationId xmlns:a16="http://schemas.microsoft.com/office/drawing/2014/main" id="{97A96B3F-02E9-9941-9A7D-BA3080A0EB67}"/>
-              </a:ext>
-            </a:extLst>
-          </p:cNvPr>
-          <p:cNvSpPr txBox="1">
-            <a:spLocks/>
-          </p:cNvSpPr>
-          <p:nvPr/>
-        </p:nvSpPr>
-        <p:spPr>
-          <a:xfrm>
-            <a:off x="8433851" y="4694675"/>
-            <a:ext cx="319124" cy="357300"/>
-          </a:xfrm>
-          <a:prstGeom prst="rect">
-            <a:avLst/>
-          </a:prstGeom>
-          <a:noFill/>
-          <a:ln>
-            <a:noFill/>
-          </a:ln>
-        </p:spPr>
-        <p:txBody>
-          <a:bodyPr spcFirstLastPara="1" wrap="square" lIns="91425" tIns="91425" rIns="91425" bIns="91425" anchor="ctr" anchorCtr="0">
-            <a:noAutofit/>
-          </a:bodyPr>
-          <a:lstStyle>
-            <a:defPPr marR="0" lvl="0" algn="l" rtl="0">
-              <a:lnSpc>
-                <a:spcPct val="100000"/>
-              </a:lnSpc>
-              <a:spcBef>
-                <a:spcPts val="0"/>
-              </a:spcBef>
-              <a:spcAft>
-                <a:spcPts val="0"/>
-              </a:spcAft>
-            </a:defPPr>
-            <a:lvl1pPr marL="457200" marR="0" lvl="0" indent="-317500" algn="l" rtl="0">
-              <a:lnSpc>
-                <a:spcPct val="100000"/>
-              </a:lnSpc>
-              <a:spcBef>
-                <a:spcPts val="0"/>
-              </a:spcBef>
-              <a:spcAft>
-                <a:spcPts val="0"/>
-              </a:spcAft>
-              <a:buClr>
-                <a:schemeClr val="dk2"/>
-              </a:buClr>
-              <a:buSzPts val="1400"/>
-              <a:buFont typeface="Fira Code"/>
-              <a:buChar char="●"/>
-              <a:defRPr sz="1400" b="0" i="0" u="none" strike="noStrike" cap="none">
-                <a:solidFill>
-                  <a:schemeClr val="dk2"/>
-                </a:solidFill>
-                <a:latin typeface="Fira Code"/>
-                <a:ea typeface="Fira Code"/>
-                <a:cs typeface="Fira Code"/>
-                <a:sym typeface="Fira Code"/>
-              </a:defRPr>
-            </a:lvl1pPr>
-            <a:lvl2pPr marL="914400" marR="0" lvl="1" indent="-317500" algn="l" rtl="0">
-              <a:lnSpc>
-                <a:spcPct val="100000"/>
-              </a:lnSpc>
-              <a:spcBef>
-                <a:spcPts val="0"/>
-              </a:spcBef>
-              <a:spcAft>
-                <a:spcPts val="0"/>
-              </a:spcAft>
-              <a:buClr>
-                <a:schemeClr val="dk2"/>
-              </a:buClr>
-              <a:buSzPts val="1400"/>
-              <a:buFont typeface="Fira Code"/>
-              <a:buChar char="○"/>
-              <a:defRPr sz="1400" b="0" i="0" u="none" strike="noStrike" cap="none">
-                <a:solidFill>
-                  <a:schemeClr val="dk2"/>
-                </a:solidFill>
-                <a:latin typeface="Fira Code"/>
-                <a:ea typeface="Fira Code"/>
-                <a:cs typeface="Fira Code"/>
-                <a:sym typeface="Fira Code"/>
-              </a:defRPr>
-            </a:lvl2pPr>
-            <a:lvl3pPr marL="1371600" marR="0" lvl="2" indent="-317500" algn="l" rtl="0">
-              <a:lnSpc>
-                <a:spcPct val="100000"/>
-              </a:lnSpc>
-              <a:spcBef>
-                <a:spcPts val="0"/>
-              </a:spcBef>
-              <a:spcAft>
-                <a:spcPts val="0"/>
-              </a:spcAft>
-              <a:buClr>
-                <a:schemeClr val="dk2"/>
-              </a:buClr>
-              <a:buSzPts val="1400"/>
-              <a:buFont typeface="Fira Code"/>
-              <a:buChar char="■"/>
-              <a:defRPr sz="1400" b="0" i="0" u="none" strike="noStrike" cap="none">
-                <a:solidFill>
-                  <a:schemeClr val="dk2"/>
-                </a:solidFill>
-                <a:latin typeface="Fira Code"/>
-                <a:ea typeface="Fira Code"/>
-                <a:cs typeface="Fira Code"/>
-                <a:sym typeface="Fira Code"/>
-              </a:defRPr>
-            </a:lvl3pPr>
-            <a:lvl4pPr marL="1828800" marR="0" lvl="3" indent="-317500" algn="l" rtl="0">
-              <a:lnSpc>
-                <a:spcPct val="100000"/>
-              </a:lnSpc>
-              <a:spcBef>
-                <a:spcPts val="0"/>
-              </a:spcBef>
-              <a:spcAft>
-                <a:spcPts val="0"/>
-              </a:spcAft>
-              <a:buClr>
-                <a:schemeClr val="dk2"/>
-              </a:buClr>
-              <a:buSzPts val="1400"/>
-              <a:buFont typeface="Fira Code"/>
-              <a:buChar char="●"/>
-              <a:defRPr sz="1400" b="0" i="0" u="none" strike="noStrike" cap="none">
-                <a:solidFill>
-                  <a:schemeClr val="dk2"/>
-                </a:solidFill>
-                <a:latin typeface="Fira Code"/>
-                <a:ea typeface="Fira Code"/>
-                <a:cs typeface="Fira Code"/>
-                <a:sym typeface="Fira Code"/>
-              </a:defRPr>
-            </a:lvl4pPr>
-            <a:lvl5pPr marL="2286000" marR="0" lvl="4" indent="-317500" algn="l" rtl="0">
-              <a:lnSpc>
-                <a:spcPct val="100000"/>
-              </a:lnSpc>
-              <a:spcBef>
-                <a:spcPts val="0"/>
-              </a:spcBef>
-              <a:spcAft>
-                <a:spcPts val="0"/>
-              </a:spcAft>
-              <a:buClr>
-                <a:schemeClr val="dk2"/>
-              </a:buClr>
-              <a:buSzPts val="1400"/>
-              <a:buFont typeface="Fira Code"/>
-              <a:buChar char="○"/>
-              <a:defRPr sz="1400" b="0" i="0" u="none" strike="noStrike" cap="none">
-                <a:solidFill>
-                  <a:schemeClr val="dk2"/>
-                </a:solidFill>
-                <a:latin typeface="Fira Code"/>
-                <a:ea typeface="Fira Code"/>
-                <a:cs typeface="Fira Code"/>
-                <a:sym typeface="Fira Code"/>
-              </a:defRPr>
-            </a:lvl5pPr>
-            <a:lvl6pPr marL="2743200" marR="0" lvl="5" indent="-317500" algn="l" rtl="0">
-              <a:lnSpc>
-                <a:spcPct val="100000"/>
-              </a:lnSpc>
-              <a:spcBef>
-                <a:spcPts val="0"/>
-              </a:spcBef>
-              <a:spcAft>
-                <a:spcPts val="0"/>
-              </a:spcAft>
-              <a:buClr>
-                <a:schemeClr val="dk2"/>
-              </a:buClr>
-              <a:buSzPts val="1400"/>
-              <a:buFont typeface="Fira Code"/>
-              <a:buChar char="■"/>
-              <a:defRPr sz="1400" b="0" i="0" u="none" strike="noStrike" cap="none">
-                <a:solidFill>
-                  <a:schemeClr val="dk2"/>
-                </a:solidFill>
-                <a:latin typeface="Fira Code"/>
-                <a:ea typeface="Fira Code"/>
-                <a:cs typeface="Fira Code"/>
-                <a:sym typeface="Fira Code"/>
-              </a:defRPr>
-            </a:lvl6pPr>
-            <a:lvl7pPr marL="3200400" marR="0" lvl="6" indent="-317500" algn="l" rtl="0">
-              <a:lnSpc>
-                <a:spcPct val="100000"/>
-              </a:lnSpc>
-              <a:spcBef>
-                <a:spcPts val="0"/>
-              </a:spcBef>
-              <a:spcAft>
-                <a:spcPts val="0"/>
-              </a:spcAft>
-              <a:buClr>
-                <a:schemeClr val="dk2"/>
-              </a:buClr>
-              <a:buSzPts val="1400"/>
-              <a:buFont typeface="Fira Code"/>
-              <a:buChar char="●"/>
-              <a:defRPr sz="1400" b="0" i="0" u="none" strike="noStrike" cap="none">
-                <a:solidFill>
-                  <a:schemeClr val="dk2"/>
-                </a:solidFill>
-                <a:latin typeface="Fira Code"/>
-                <a:ea typeface="Fira Code"/>
-                <a:cs typeface="Fira Code"/>
-                <a:sym typeface="Fira Code"/>
-              </a:defRPr>
-            </a:lvl7pPr>
-            <a:lvl8pPr marL="3657600" marR="0" lvl="7" indent="-317500" algn="l" rtl="0">
-              <a:lnSpc>
-                <a:spcPct val="100000"/>
-              </a:lnSpc>
-              <a:spcBef>
-                <a:spcPts val="0"/>
-              </a:spcBef>
-              <a:spcAft>
-                <a:spcPts val="0"/>
-              </a:spcAft>
-              <a:buClr>
-                <a:schemeClr val="dk2"/>
-              </a:buClr>
-              <a:buSzPts val="1400"/>
-              <a:buFont typeface="Fira Code"/>
-              <a:buChar char="○"/>
-              <a:defRPr sz="1400" b="0" i="0" u="none" strike="noStrike" cap="none">
-                <a:solidFill>
-                  <a:schemeClr val="dk2"/>
-                </a:solidFill>
-                <a:latin typeface="Fira Code"/>
-                <a:ea typeface="Fira Code"/>
-                <a:cs typeface="Fira Code"/>
-                <a:sym typeface="Fira Code"/>
-              </a:defRPr>
-            </a:lvl8pPr>
-            <a:lvl9pPr marL="4114800" marR="0" lvl="8" indent="-317500" algn="l" rtl="0">
-              <a:lnSpc>
-                <a:spcPct val="100000"/>
-              </a:lnSpc>
-              <a:spcBef>
-                <a:spcPts val="0"/>
-              </a:spcBef>
-              <a:spcAft>
-                <a:spcPts val="0"/>
-              </a:spcAft>
-              <a:buClr>
-                <a:schemeClr val="dk2"/>
-              </a:buClr>
-              <a:buSzPts val="1400"/>
-              <a:buFont typeface="Fira Code"/>
-              <a:buChar char="■"/>
-              <a:defRPr sz="1400" b="0" i="0" u="none" strike="noStrike" cap="none">
-                <a:solidFill>
-                  <a:schemeClr val="dk2"/>
-                </a:solidFill>
-                <a:latin typeface="Fira Code"/>
-                <a:ea typeface="Fira Code"/>
-                <a:cs typeface="Fira Code"/>
-                <a:sym typeface="Fira Code"/>
-              </a:defRPr>
-            </a:lvl9pPr>
-          </a:lstStyle>
-          <a:p>
-            <a:pPr marL="0" indent="0">
-              <a:buFont typeface="Fira Code"/>
-              <a:buNone/>
-            </a:pPr>
-            <a:r>
-              <a:rPr lang="en" sz="1100" dirty="0">
-                <a:solidFill>
-                  <a:schemeClr val="accent3"/>
-                </a:solidFill>
-              </a:rPr>
-              <a:t>1</a:t>
-            </a:r>
-            <a:endParaRPr lang="en" dirty="0">
-              <a:solidFill>
-                <a:schemeClr val="accent3"/>
-              </a:solidFill>
-            </a:endParaRPr>
-          </a:p>
-        </p:txBody>
-      </p:sp>
-      <p:sp>
-        <p:nvSpPr>
-          <p:cNvPr id="8" name="TextBox 7">
-            <a:extLst>
-              <a:ext uri="{FF2B5EF4-FFF2-40B4-BE49-F238E27FC236}">
-                <a16:creationId xmlns:a16="http://schemas.microsoft.com/office/drawing/2014/main" id="{70804389-C93A-86EA-B965-23D85362CBC8}"/>
-              </a:ext>
-            </a:extLst>
-          </p:cNvPr>
-          <p:cNvSpPr txBox="1"/>
-          <p:nvPr/>
-        </p:nvSpPr>
-        <p:spPr>
-          <a:xfrm>
-            <a:off x="1129002" y="1316889"/>
-            <a:ext cx="7993294" cy="800219"/>
-          </a:xfrm>
-          <a:prstGeom prst="rect">
-            <a:avLst/>
-          </a:prstGeom>
-          <a:noFill/>
-          <a:effectLst>
-            <a:outerShdw blurRad="50800" dist="38100" dir="10800000" algn="r" rotWithShape="0">
-              <a:prstClr val="black">
-                <a:alpha val="40000"/>
-              </a:prstClr>
-            </a:outerShdw>
-          </a:effectLst>
-        </p:spPr>
-        <p:txBody>
-          <a:bodyPr wrap="square">
-            <a:spAutoFit/>
-          </a:bodyPr>
-          <a:lstStyle/>
-          <a:p>
-            <a:pPr>
-              <a:buClr>
-                <a:schemeClr val="accent3"/>
-              </a:buClr>
-            </a:pPr>
-            <a:endParaRPr lang="en-US" dirty="0">
-              <a:solidFill>
-                <a:schemeClr val="accent3"/>
-              </a:solidFill>
-              <a:latin typeface="Fira Code"/>
-              <a:ea typeface="Fira Code"/>
-              <a:cs typeface="B Nazanin" panose="00000400000000000000" pitchFamily="2" charset="-78"/>
-              <a:sym typeface="Fira Code"/>
-            </a:endParaRPr>
-          </a:p>
-          <a:p>
-            <a:pPr>
-              <a:buClr>
-                <a:schemeClr val="accent3"/>
-              </a:buClr>
-            </a:pPr>
-            <a:endParaRPr lang="en-US" sz="1600" dirty="0">
-              <a:solidFill>
-                <a:schemeClr val="accent3"/>
-              </a:solidFill>
-              <a:latin typeface="Fira Code"/>
-              <a:ea typeface="Fira Code"/>
-              <a:cs typeface="B Nazanin" panose="00000400000000000000" pitchFamily="2" charset="-78"/>
-              <a:sym typeface="Fira Code"/>
-            </a:endParaRPr>
-          </a:p>
-          <a:p>
-            <a:pPr>
-              <a:buClr>
-                <a:schemeClr val="accent3"/>
-              </a:buClr>
-            </a:pPr>
-            <a:endParaRPr lang="fa-IR" sz="1600" dirty="0">
-              <a:solidFill>
-                <a:schemeClr val="accent3"/>
-              </a:solidFill>
-              <a:latin typeface="Fira Code"/>
-              <a:ea typeface="Fira Code"/>
-              <a:cs typeface="B Nazanin" panose="00000400000000000000" pitchFamily="2" charset="-78"/>
-              <a:sym typeface="Fira Code"/>
-            </a:endParaRPr>
-          </a:p>
-        </p:txBody>
-      </p:sp>
-      <p:sp>
-        <p:nvSpPr>
-          <p:cNvPr id="2" name="AutoShape 2" descr="Memory Management in Operating System - GeeksforGeeks">
-            <a:extLst>
-              <a:ext uri="{FF2B5EF4-FFF2-40B4-BE49-F238E27FC236}">
-                <a16:creationId xmlns:a16="http://schemas.microsoft.com/office/drawing/2014/main" id="{01E2B936-DA87-24BF-433C-CDE0431EE7D2}"/>
-              </a:ext>
-            </a:extLst>
-          </p:cNvPr>
-          <p:cNvSpPr>
-            <a:spLocks noChangeAspect="1" noChangeArrowheads="1"/>
-          </p:cNvSpPr>
-          <p:nvPr/>
-        </p:nvSpPr>
-        <p:spPr bwMode="auto">
-          <a:xfrm>
-            <a:off x="4572000" y="2571750"/>
-            <a:ext cx="304800" cy="304800"/>
-          </a:xfrm>
-          <a:prstGeom prst="rect">
-            <a:avLst/>
-          </a:prstGeom>
-          <a:noFill/>
-          <a:extLst>
-            <a:ext uri="{909E8E84-426E-40DD-AFC4-6F175D3DCCD1}">
-              <a14:hiddenFill xmlns:a14="http://schemas.microsoft.com/office/drawing/2010/main">
-                <a:solidFill>
-                  <a:srgbClr val="FFFFFF"/>
-                </a:solidFill>
-              </a14:hiddenFill>
-            </a:ext>
-          </a:extLst>
-        </p:spPr>
-        <p:txBody>
-          <a:bodyPr vert="horz" wrap="square" lIns="91440" tIns="45720" rIns="91440" bIns="45720" numCol="1" anchor="t" anchorCtr="0" compatLnSpc="1">
-            <a:prstTxWarp prst="textNoShape">
-              <a:avLst/>
-            </a:prstTxWarp>
-          </a:bodyPr>
-          <a:lstStyle/>
-          <a:p>
-            <a:endParaRPr lang="en-US"/>
-          </a:p>
-        </p:txBody>
-      </p:sp>
-      <p:sp>
-        <p:nvSpPr>
-          <p:cNvPr id="3" name="AutoShape 4" descr="Memory Management in Operating System - GeeksforGeeks">
-            <a:extLst>
-              <a:ext uri="{FF2B5EF4-FFF2-40B4-BE49-F238E27FC236}">
-                <a16:creationId xmlns:a16="http://schemas.microsoft.com/office/drawing/2014/main" id="{CC1A8521-F736-4C24-5CAF-4D24BA0E9D70}"/>
-              </a:ext>
-            </a:extLst>
-          </p:cNvPr>
-          <p:cNvSpPr>
-            <a:spLocks noChangeAspect="1" noChangeArrowheads="1"/>
-          </p:cNvSpPr>
-          <p:nvPr/>
-        </p:nvSpPr>
-        <p:spPr bwMode="auto">
-          <a:xfrm>
-            <a:off x="4419600" y="2419350"/>
-            <a:ext cx="304800" cy="304800"/>
-          </a:xfrm>
-          <a:prstGeom prst="rect">
-            <a:avLst/>
-          </a:prstGeom>
-          <a:noFill/>
-          <a:extLst>
-            <a:ext uri="{909E8E84-426E-40DD-AFC4-6F175D3DCCD1}">
-              <a14:hiddenFill xmlns:a14="http://schemas.microsoft.com/office/drawing/2010/main">
-                <a:solidFill>
-                  <a:srgbClr val="FFFFFF"/>
-                </a:solidFill>
-              </a14:hiddenFill>
-            </a:ext>
-          </a:extLst>
-        </p:spPr>
-        <p:txBody>
-          <a:bodyPr vert="horz" wrap="square" lIns="91440" tIns="45720" rIns="91440" bIns="45720" numCol="1" anchor="t" anchorCtr="0" compatLnSpc="1">
-            <a:prstTxWarp prst="textNoShape">
-              <a:avLst/>
-            </a:prstTxWarp>
-          </a:bodyPr>
-          <a:lstStyle/>
-          <a:p>
-            <a:endParaRPr lang="en-US"/>
-          </a:p>
-        </p:txBody>
-      </p:sp>
-      <p:sp>
-        <p:nvSpPr>
-          <p:cNvPr id="9" name="Google Shape;465;p27">
-            <a:extLst>
-              <a:ext uri="{FF2B5EF4-FFF2-40B4-BE49-F238E27FC236}">
-                <a16:creationId xmlns:a16="http://schemas.microsoft.com/office/drawing/2014/main" id="{8A487AE4-3AC7-9384-08B8-084152AE0A1F}"/>
-              </a:ext>
-            </a:extLst>
-          </p:cNvPr>
-          <p:cNvSpPr txBox="1">
-            <a:spLocks/>
-          </p:cNvSpPr>
-          <p:nvPr/>
-        </p:nvSpPr>
-        <p:spPr>
-          <a:xfrm>
-            <a:off x="4597685" y="55573"/>
-            <a:ext cx="4572000" cy="357300"/>
-          </a:xfrm>
-          <a:prstGeom prst="rect">
-            <a:avLst/>
-          </a:prstGeom>
-          <a:noFill/>
-          <a:ln>
-            <a:noFill/>
-          </a:ln>
-        </p:spPr>
-        <p:txBody>
-          <a:bodyPr spcFirstLastPara="1" wrap="square" lIns="91425" tIns="91425" rIns="91425" bIns="91425" anchor="ctr" anchorCtr="0">
-            <a:noAutofit/>
-          </a:bodyPr>
-          <a:lstStyle>
-            <a:defPPr marR="0" lvl="0" algn="l" rtl="0">
-              <a:lnSpc>
-                <a:spcPct val="100000"/>
-              </a:lnSpc>
-              <a:spcBef>
-                <a:spcPts val="0"/>
-              </a:spcBef>
-              <a:spcAft>
-                <a:spcPts val="0"/>
-              </a:spcAft>
-            </a:defPPr>
-            <a:lvl1pPr marL="457200" marR="0" lvl="0" indent="-317500" algn="l" rtl="0">
-              <a:lnSpc>
-                <a:spcPct val="100000"/>
-              </a:lnSpc>
-              <a:spcBef>
-                <a:spcPts val="0"/>
-              </a:spcBef>
-              <a:spcAft>
-                <a:spcPts val="0"/>
-              </a:spcAft>
-              <a:buClr>
-                <a:schemeClr val="dk2"/>
-              </a:buClr>
-              <a:buSzPts val="2800"/>
-              <a:buFont typeface="Fira Code"/>
-              <a:buNone/>
-              <a:defRPr sz="1800" b="0" i="0" u="none" strike="noStrike" cap="none">
-                <a:solidFill>
-                  <a:schemeClr val="accent3"/>
-                </a:solidFill>
-                <a:latin typeface="Fira Code"/>
-                <a:ea typeface="Fira Code"/>
-                <a:cs typeface="Fira Code"/>
-                <a:sym typeface="Fira Code"/>
-              </a:defRPr>
-            </a:lvl1pPr>
-            <a:lvl2pPr marL="914400" marR="0" lvl="1" indent="-317500" algn="ctr" rtl="0">
-              <a:lnSpc>
-                <a:spcPct val="100000"/>
-              </a:lnSpc>
-              <a:spcBef>
-                <a:spcPts val="0"/>
-              </a:spcBef>
-              <a:spcAft>
-                <a:spcPts val="0"/>
-              </a:spcAft>
-              <a:buClr>
-                <a:schemeClr val="dk2"/>
-              </a:buClr>
-              <a:buSzPts val="2800"/>
-              <a:buFont typeface="Fira Code"/>
-              <a:buNone/>
-              <a:defRPr sz="2800" b="0" i="0" u="none" strike="noStrike" cap="none">
-                <a:solidFill>
-                  <a:schemeClr val="dk2"/>
-                </a:solidFill>
-                <a:latin typeface="Fira Code"/>
-                <a:ea typeface="Fira Code"/>
-                <a:cs typeface="Fira Code"/>
-                <a:sym typeface="Fira Code"/>
-              </a:defRPr>
-            </a:lvl2pPr>
-            <a:lvl3pPr marL="1371600" marR="0" lvl="2" indent="-317500" algn="ctr" rtl="0">
-              <a:lnSpc>
-                <a:spcPct val="100000"/>
-              </a:lnSpc>
-              <a:spcBef>
-                <a:spcPts val="0"/>
-              </a:spcBef>
-              <a:spcAft>
-                <a:spcPts val="0"/>
-              </a:spcAft>
-              <a:buClr>
-                <a:schemeClr val="dk2"/>
-              </a:buClr>
-              <a:buSzPts val="2800"/>
-              <a:buFont typeface="Fira Code"/>
-              <a:buNone/>
-              <a:defRPr sz="2800" b="0" i="0" u="none" strike="noStrike" cap="none">
-                <a:solidFill>
-                  <a:schemeClr val="dk2"/>
-                </a:solidFill>
-                <a:latin typeface="Fira Code"/>
-                <a:ea typeface="Fira Code"/>
-                <a:cs typeface="Fira Code"/>
-                <a:sym typeface="Fira Code"/>
-              </a:defRPr>
-            </a:lvl3pPr>
-            <a:lvl4pPr marL="1828800" marR="0" lvl="3" indent="-317500" algn="ctr" rtl="0">
-              <a:lnSpc>
-                <a:spcPct val="100000"/>
-              </a:lnSpc>
-              <a:spcBef>
-                <a:spcPts val="0"/>
-              </a:spcBef>
-              <a:spcAft>
-                <a:spcPts val="0"/>
-              </a:spcAft>
-              <a:buClr>
-                <a:schemeClr val="dk2"/>
-              </a:buClr>
-              <a:buSzPts val="2800"/>
-              <a:buFont typeface="Fira Code"/>
-              <a:buNone/>
-              <a:defRPr sz="2800" b="0" i="0" u="none" strike="noStrike" cap="none">
-                <a:solidFill>
-                  <a:schemeClr val="dk2"/>
-                </a:solidFill>
-                <a:latin typeface="Fira Code"/>
-                <a:ea typeface="Fira Code"/>
-                <a:cs typeface="Fira Code"/>
-                <a:sym typeface="Fira Code"/>
-              </a:defRPr>
-            </a:lvl4pPr>
-            <a:lvl5pPr marL="2286000" marR="0" lvl="4" indent="-317500" algn="ctr" rtl="0">
-              <a:lnSpc>
-                <a:spcPct val="100000"/>
-              </a:lnSpc>
-              <a:spcBef>
-                <a:spcPts val="0"/>
-              </a:spcBef>
-              <a:spcAft>
-                <a:spcPts val="0"/>
-              </a:spcAft>
-              <a:buClr>
-                <a:schemeClr val="dk2"/>
-              </a:buClr>
-              <a:buSzPts val="2800"/>
-              <a:buFont typeface="Fira Code"/>
-              <a:buNone/>
-              <a:defRPr sz="2800" b="0" i="0" u="none" strike="noStrike" cap="none">
-                <a:solidFill>
-                  <a:schemeClr val="dk2"/>
-                </a:solidFill>
-                <a:latin typeface="Fira Code"/>
-                <a:ea typeface="Fira Code"/>
-                <a:cs typeface="Fira Code"/>
-                <a:sym typeface="Fira Code"/>
-              </a:defRPr>
-            </a:lvl5pPr>
-            <a:lvl6pPr marL="2743200" marR="0" lvl="5" indent="-317500" algn="ctr" rtl="0">
-              <a:lnSpc>
-                <a:spcPct val="100000"/>
-              </a:lnSpc>
-              <a:spcBef>
-                <a:spcPts val="0"/>
-              </a:spcBef>
-              <a:spcAft>
-                <a:spcPts val="0"/>
-              </a:spcAft>
-              <a:buClr>
-                <a:schemeClr val="dk2"/>
-              </a:buClr>
-              <a:buSzPts val="2800"/>
-              <a:buFont typeface="Fira Code"/>
-              <a:buNone/>
-              <a:defRPr sz="2800" b="0" i="0" u="none" strike="noStrike" cap="none">
-                <a:solidFill>
-                  <a:schemeClr val="dk2"/>
-                </a:solidFill>
-                <a:latin typeface="Fira Code"/>
-                <a:ea typeface="Fira Code"/>
-                <a:cs typeface="Fira Code"/>
-                <a:sym typeface="Fira Code"/>
-              </a:defRPr>
-            </a:lvl6pPr>
-            <a:lvl7pPr marL="3200400" marR="0" lvl="6" indent="-317500" algn="ctr" rtl="0">
-              <a:lnSpc>
-                <a:spcPct val="100000"/>
-              </a:lnSpc>
-              <a:spcBef>
-                <a:spcPts val="0"/>
-              </a:spcBef>
-              <a:spcAft>
-                <a:spcPts val="0"/>
-              </a:spcAft>
-              <a:buClr>
-                <a:schemeClr val="dk2"/>
-              </a:buClr>
-              <a:buSzPts val="2800"/>
-              <a:buFont typeface="Fira Code"/>
-              <a:buNone/>
-              <a:defRPr sz="2800" b="0" i="0" u="none" strike="noStrike" cap="none">
-                <a:solidFill>
-                  <a:schemeClr val="dk2"/>
-                </a:solidFill>
-                <a:latin typeface="Fira Code"/>
-                <a:ea typeface="Fira Code"/>
-                <a:cs typeface="Fira Code"/>
-                <a:sym typeface="Fira Code"/>
-              </a:defRPr>
-            </a:lvl7pPr>
-            <a:lvl8pPr marL="3657600" marR="0" lvl="7" indent="-317500" algn="ctr" rtl="0">
-              <a:lnSpc>
-                <a:spcPct val="100000"/>
-              </a:lnSpc>
-              <a:spcBef>
-                <a:spcPts val="0"/>
-              </a:spcBef>
-              <a:spcAft>
-                <a:spcPts val="0"/>
-              </a:spcAft>
-              <a:buClr>
-                <a:schemeClr val="dk2"/>
-              </a:buClr>
-              <a:buSzPts val="2800"/>
-              <a:buFont typeface="Fira Code"/>
-              <a:buNone/>
-              <a:defRPr sz="2800" b="0" i="0" u="none" strike="noStrike" cap="none">
-                <a:solidFill>
-                  <a:schemeClr val="dk2"/>
-                </a:solidFill>
-                <a:latin typeface="Fira Code"/>
-                <a:ea typeface="Fira Code"/>
-                <a:cs typeface="Fira Code"/>
-                <a:sym typeface="Fira Code"/>
-              </a:defRPr>
-            </a:lvl8pPr>
-            <a:lvl9pPr marL="4114800" marR="0" lvl="8" indent="-317500" algn="ctr" rtl="0">
-              <a:lnSpc>
-                <a:spcPct val="100000"/>
-              </a:lnSpc>
-              <a:spcBef>
-                <a:spcPts val="0"/>
-              </a:spcBef>
-              <a:spcAft>
-                <a:spcPts val="0"/>
-              </a:spcAft>
-              <a:buClr>
-                <a:schemeClr val="dk2"/>
-              </a:buClr>
-              <a:buSzPts val="2800"/>
-              <a:buFont typeface="Fira Code"/>
-              <a:buNone/>
-              <a:defRPr sz="2800" b="0" i="0" u="none" strike="noStrike" cap="none">
-                <a:solidFill>
-                  <a:schemeClr val="dk2"/>
-                </a:solidFill>
-                <a:latin typeface="Fira Code"/>
-                <a:ea typeface="Fira Code"/>
-                <a:cs typeface="Fira Code"/>
-                <a:sym typeface="Fira Code"/>
-              </a:defRPr>
-            </a:lvl9pPr>
-          </a:lstStyle>
-          <a:p>
-            <a:pPr marL="0" indent="0" algn="ctr"/>
-            <a:endParaRPr lang="en-US" sz="1000" dirty="0"/>
-          </a:p>
-        </p:txBody>
-      </p:sp>
-      <p:sp>
-        <p:nvSpPr>
-          <p:cNvPr id="16" name="TextBox 15">
-            <a:extLst>
-              <a:ext uri="{FF2B5EF4-FFF2-40B4-BE49-F238E27FC236}">
-                <a16:creationId xmlns:a16="http://schemas.microsoft.com/office/drawing/2014/main" id="{2C7B6DAB-7CFC-4137-336B-E5729650E18A}"/>
-              </a:ext>
-            </a:extLst>
-          </p:cNvPr>
-          <p:cNvSpPr txBox="1"/>
-          <p:nvPr/>
-        </p:nvSpPr>
-        <p:spPr>
-          <a:xfrm>
-            <a:off x="1129002" y="1121374"/>
-            <a:ext cx="7489398" cy="584775"/>
-          </a:xfrm>
-          <a:prstGeom prst="rect">
-            <a:avLst/>
-          </a:prstGeom>
-          <a:noFill/>
-          <a:effectLst>
-            <a:outerShdw blurRad="50800" dist="38100" dir="10800000" algn="r" rotWithShape="0">
-              <a:prstClr val="black">
-                <a:alpha val="40000"/>
-              </a:prstClr>
-            </a:outerShdw>
-          </a:effectLst>
-        </p:spPr>
-        <p:txBody>
-          <a:bodyPr wrap="square">
-            <a:spAutoFit/>
-          </a:bodyPr>
-          <a:lstStyle/>
-          <a:p>
-            <a:pPr algn="just">
-              <a:buClr>
-                <a:schemeClr val="accent3"/>
-              </a:buClr>
-            </a:pPr>
-            <a:r>
-              <a:rPr lang="en-US" sz="1600" dirty="0">
-                <a:solidFill>
-                  <a:schemeClr val="accent6"/>
-                </a:solidFill>
-              </a:rPr>
-              <a:t>design a small calculator that can </a:t>
-            </a:r>
-            <a:r>
-              <a:rPr lang="en-US" sz="1600" dirty="0">
-                <a:solidFill>
-                  <a:schemeClr val="accent2"/>
-                </a:solidFill>
-              </a:rPr>
-              <a:t>add</a:t>
-            </a:r>
-            <a:r>
-              <a:rPr lang="en-US" sz="1600" dirty="0">
-                <a:solidFill>
-                  <a:schemeClr val="accent6"/>
-                </a:solidFill>
-              </a:rPr>
-              <a:t>, </a:t>
-            </a:r>
-            <a:r>
-              <a:rPr lang="en-US" sz="1600" dirty="0">
-                <a:solidFill>
-                  <a:schemeClr val="accent2"/>
-                </a:solidFill>
-              </a:rPr>
-              <a:t>subtract, multiply, or divide</a:t>
-            </a:r>
-            <a:r>
-              <a:rPr lang="en-US" sz="1600" dirty="0">
-                <a:solidFill>
-                  <a:schemeClr val="accent6"/>
-                </a:solidFill>
-              </a:rPr>
-              <a:t> two integers using </a:t>
-            </a:r>
-            <a:r>
-              <a:rPr lang="en-US" sz="1600" dirty="0">
-                <a:solidFill>
-                  <a:schemeClr val="accent2"/>
-                </a:solidFill>
-              </a:rPr>
-              <a:t>function pointers</a:t>
-            </a:r>
-            <a:r>
-              <a:rPr lang="en-US" sz="1600" dirty="0">
-                <a:solidFill>
-                  <a:schemeClr val="accent6"/>
-                </a:solidFill>
-              </a:rPr>
-              <a:t>.</a:t>
-            </a:r>
-            <a:endParaRPr lang="en-US" sz="1600" dirty="0">
-              <a:solidFill>
-                <a:schemeClr val="accent6"/>
-              </a:solidFill>
-              <a:latin typeface="Fira Code"/>
-              <a:ea typeface="Fira Code"/>
-              <a:cs typeface="B Nazanin" panose="00000400000000000000" pitchFamily="2" charset="-78"/>
-              <a:sym typeface="Fira Code"/>
-            </a:endParaRPr>
-          </a:p>
-        </p:txBody>
-      </p:sp>
-      <p:pic>
-        <p:nvPicPr>
-          <p:cNvPr id="11" name="Picture 10">
-            <a:extLst>
-              <a:ext uri="{FF2B5EF4-FFF2-40B4-BE49-F238E27FC236}">
-                <a16:creationId xmlns:a16="http://schemas.microsoft.com/office/drawing/2014/main" id="{DF75FF61-B3D3-E555-31DD-6A13332A6127}"/>
-              </a:ext>
-            </a:extLst>
-          </p:cNvPr>
-          <p:cNvPicPr>
-            <a:picLocks noChangeAspect="1"/>
-          </p:cNvPicPr>
-          <p:nvPr/>
-        </p:nvPicPr>
-        <p:blipFill>
-          <a:blip r:embed="rId3"/>
-          <a:stretch>
-            <a:fillRect/>
-          </a:stretch>
-        </p:blipFill>
-        <p:spPr>
-          <a:xfrm>
-            <a:off x="5323111" y="1778054"/>
-            <a:ext cx="3608615" cy="2247990"/>
-          </a:xfrm>
-          <a:prstGeom prst="rect">
-            <a:avLst/>
-          </a:prstGeom>
-        </p:spPr>
-      </p:pic>
-      <p:sp>
-        <p:nvSpPr>
-          <p:cNvPr id="15" name="TextBox 14">
-            <a:extLst>
-              <a:ext uri="{FF2B5EF4-FFF2-40B4-BE49-F238E27FC236}">
-                <a16:creationId xmlns:a16="http://schemas.microsoft.com/office/drawing/2014/main" id="{8ADDABE1-F618-2BEE-D3B8-672FB09DCAF7}"/>
-              </a:ext>
-            </a:extLst>
-          </p:cNvPr>
-          <p:cNvSpPr txBox="1"/>
-          <p:nvPr/>
-        </p:nvSpPr>
-        <p:spPr>
-          <a:xfrm>
-            <a:off x="1294682" y="2370989"/>
-            <a:ext cx="3729074" cy="584775"/>
-          </a:xfrm>
-          <a:prstGeom prst="rect">
-            <a:avLst/>
-          </a:prstGeom>
-          <a:noFill/>
-          <a:effectLst>
-            <a:outerShdw blurRad="50800" dist="38100" dir="10800000" algn="r" rotWithShape="0">
-              <a:prstClr val="black">
-                <a:alpha val="40000"/>
-              </a:prstClr>
-            </a:outerShdw>
-          </a:effectLst>
-        </p:spPr>
-        <p:txBody>
-          <a:bodyPr wrap="square">
-            <a:spAutoFit/>
-          </a:bodyPr>
-          <a:lstStyle/>
-          <a:p>
-            <a:pPr marL="285750" indent="-285750" algn="just">
-              <a:buClr>
-                <a:schemeClr val="accent3"/>
-              </a:buClr>
-              <a:buFont typeface="Arial" panose="020B0604020202020204" pitchFamily="34" charset="0"/>
-              <a:buChar char="•"/>
-            </a:pPr>
-            <a:r>
-              <a:rPr lang="en-US" sz="1600" dirty="0">
-                <a:solidFill>
-                  <a:schemeClr val="accent6"/>
-                </a:solidFill>
-              </a:rPr>
-              <a:t>Complete the given code by doing what is asked. </a:t>
-            </a:r>
-            <a:endParaRPr lang="en-US" sz="1600" dirty="0">
-              <a:solidFill>
-                <a:schemeClr val="accent6"/>
-              </a:solidFill>
-              <a:latin typeface="Fira Code"/>
-              <a:ea typeface="Fira Code"/>
-              <a:cs typeface="B Nazanin" panose="00000400000000000000" pitchFamily="2" charset="-78"/>
-              <a:sym typeface="Fira Code"/>
-            </a:endParaRPr>
-          </a:p>
-        </p:txBody>
-      </p:sp>
-      <p:sp>
-        <p:nvSpPr>
-          <p:cNvPr id="17" name="Google Shape;465;p27">
-            <a:extLst>
-              <a:ext uri="{FF2B5EF4-FFF2-40B4-BE49-F238E27FC236}">
-                <a16:creationId xmlns:a16="http://schemas.microsoft.com/office/drawing/2014/main" id="{BDC60FA5-CD4A-C6EA-8B0C-D2C31BA14FF4}"/>
-              </a:ext>
-            </a:extLst>
-          </p:cNvPr>
-          <p:cNvSpPr txBox="1">
-            <a:spLocks/>
-          </p:cNvSpPr>
-          <p:nvPr/>
-        </p:nvSpPr>
-        <p:spPr>
-          <a:xfrm>
-            <a:off x="4645074" y="104244"/>
-            <a:ext cx="4572000" cy="357300"/>
-          </a:xfrm>
-          <a:prstGeom prst="rect">
-            <a:avLst/>
-          </a:prstGeom>
-          <a:noFill/>
-          <a:ln>
-            <a:noFill/>
-          </a:ln>
-        </p:spPr>
-        <p:txBody>
-          <a:bodyPr spcFirstLastPara="1" wrap="square" lIns="91425" tIns="91425" rIns="91425" bIns="91425" anchor="ctr" anchorCtr="0">
-            <a:noAutofit/>
-          </a:bodyPr>
-          <a:lstStyle>
-            <a:defPPr marR="0" lvl="0" algn="l" rtl="0">
-              <a:lnSpc>
-                <a:spcPct val="100000"/>
-              </a:lnSpc>
-              <a:spcBef>
-                <a:spcPts val="0"/>
-              </a:spcBef>
-              <a:spcAft>
-                <a:spcPts val="0"/>
-              </a:spcAft>
-            </a:defPPr>
-            <a:lvl1pPr marL="457200" marR="0" lvl="0" indent="-317500" algn="l" rtl="0">
-              <a:lnSpc>
-                <a:spcPct val="100000"/>
-              </a:lnSpc>
-              <a:spcBef>
-                <a:spcPts val="0"/>
-              </a:spcBef>
-              <a:spcAft>
-                <a:spcPts val="0"/>
-              </a:spcAft>
-              <a:buClr>
-                <a:schemeClr val="dk2"/>
-              </a:buClr>
-              <a:buSzPts val="2800"/>
-              <a:buFont typeface="Fira Code"/>
-              <a:buNone/>
-              <a:defRPr sz="1800" b="0" i="0" u="none" strike="noStrike" cap="none">
-                <a:solidFill>
-                  <a:schemeClr val="accent3"/>
-                </a:solidFill>
-                <a:latin typeface="Fira Code"/>
-                <a:ea typeface="Fira Code"/>
-                <a:cs typeface="Fira Code"/>
-                <a:sym typeface="Fira Code"/>
-              </a:defRPr>
-            </a:lvl1pPr>
-            <a:lvl2pPr marL="914400" marR="0" lvl="1" indent="-317500" algn="ctr" rtl="0">
-              <a:lnSpc>
-                <a:spcPct val="100000"/>
-              </a:lnSpc>
-              <a:spcBef>
-                <a:spcPts val="0"/>
-              </a:spcBef>
-              <a:spcAft>
-                <a:spcPts val="0"/>
-              </a:spcAft>
-              <a:buClr>
-                <a:schemeClr val="dk2"/>
-              </a:buClr>
-              <a:buSzPts val="2800"/>
-              <a:buFont typeface="Fira Code"/>
-              <a:buNone/>
-              <a:defRPr sz="2800" b="0" i="0" u="none" strike="noStrike" cap="none">
-                <a:solidFill>
-                  <a:schemeClr val="dk2"/>
-                </a:solidFill>
-                <a:latin typeface="Fira Code"/>
-                <a:ea typeface="Fira Code"/>
-                <a:cs typeface="Fira Code"/>
-                <a:sym typeface="Fira Code"/>
-              </a:defRPr>
-            </a:lvl2pPr>
-            <a:lvl3pPr marL="1371600" marR="0" lvl="2" indent="-317500" algn="ctr" rtl="0">
-              <a:lnSpc>
-                <a:spcPct val="100000"/>
-              </a:lnSpc>
-              <a:spcBef>
-                <a:spcPts val="0"/>
-              </a:spcBef>
-              <a:spcAft>
-                <a:spcPts val="0"/>
-              </a:spcAft>
-              <a:buClr>
-                <a:schemeClr val="dk2"/>
-              </a:buClr>
-              <a:buSzPts val="2800"/>
-              <a:buFont typeface="Fira Code"/>
-              <a:buNone/>
-              <a:defRPr sz="2800" b="0" i="0" u="none" strike="noStrike" cap="none">
-                <a:solidFill>
-                  <a:schemeClr val="dk2"/>
-                </a:solidFill>
-                <a:latin typeface="Fira Code"/>
-                <a:ea typeface="Fira Code"/>
-                <a:cs typeface="Fira Code"/>
-                <a:sym typeface="Fira Code"/>
-              </a:defRPr>
-            </a:lvl3pPr>
-            <a:lvl4pPr marL="1828800" marR="0" lvl="3" indent="-317500" algn="ctr" rtl="0">
-              <a:lnSpc>
-                <a:spcPct val="100000"/>
-              </a:lnSpc>
-              <a:spcBef>
-                <a:spcPts val="0"/>
-              </a:spcBef>
-              <a:spcAft>
-                <a:spcPts val="0"/>
-              </a:spcAft>
-              <a:buClr>
-                <a:schemeClr val="dk2"/>
-              </a:buClr>
-              <a:buSzPts val="2800"/>
-              <a:buFont typeface="Fira Code"/>
-              <a:buNone/>
-              <a:defRPr sz="2800" b="0" i="0" u="none" strike="noStrike" cap="none">
-                <a:solidFill>
-                  <a:schemeClr val="dk2"/>
-                </a:solidFill>
-                <a:latin typeface="Fira Code"/>
-                <a:ea typeface="Fira Code"/>
-                <a:cs typeface="Fira Code"/>
-                <a:sym typeface="Fira Code"/>
-              </a:defRPr>
-            </a:lvl4pPr>
-            <a:lvl5pPr marL="2286000" marR="0" lvl="4" indent="-317500" algn="ctr" rtl="0">
-              <a:lnSpc>
-                <a:spcPct val="100000"/>
-              </a:lnSpc>
-              <a:spcBef>
-                <a:spcPts val="0"/>
-              </a:spcBef>
-              <a:spcAft>
-                <a:spcPts val="0"/>
-              </a:spcAft>
-              <a:buClr>
-                <a:schemeClr val="dk2"/>
-              </a:buClr>
-              <a:buSzPts val="2800"/>
-              <a:buFont typeface="Fira Code"/>
-              <a:buNone/>
-              <a:defRPr sz="2800" b="0" i="0" u="none" strike="noStrike" cap="none">
-                <a:solidFill>
-                  <a:schemeClr val="dk2"/>
-                </a:solidFill>
-                <a:latin typeface="Fira Code"/>
-                <a:ea typeface="Fira Code"/>
-                <a:cs typeface="Fira Code"/>
-                <a:sym typeface="Fira Code"/>
-              </a:defRPr>
-            </a:lvl5pPr>
-            <a:lvl6pPr marL="2743200" marR="0" lvl="5" indent="-317500" algn="ctr" rtl="0">
-              <a:lnSpc>
-                <a:spcPct val="100000"/>
-              </a:lnSpc>
-              <a:spcBef>
-                <a:spcPts val="0"/>
-              </a:spcBef>
-              <a:spcAft>
-                <a:spcPts val="0"/>
-              </a:spcAft>
-              <a:buClr>
-                <a:schemeClr val="dk2"/>
-              </a:buClr>
-              <a:buSzPts val="2800"/>
-              <a:buFont typeface="Fira Code"/>
-              <a:buNone/>
-              <a:defRPr sz="2800" b="0" i="0" u="none" strike="noStrike" cap="none">
-                <a:solidFill>
-                  <a:schemeClr val="dk2"/>
-                </a:solidFill>
-                <a:latin typeface="Fira Code"/>
-                <a:ea typeface="Fira Code"/>
-                <a:cs typeface="Fira Code"/>
-                <a:sym typeface="Fira Code"/>
-              </a:defRPr>
-            </a:lvl6pPr>
-            <a:lvl7pPr marL="3200400" marR="0" lvl="6" indent="-317500" algn="ctr" rtl="0">
-              <a:lnSpc>
-                <a:spcPct val="100000"/>
-              </a:lnSpc>
-              <a:spcBef>
-                <a:spcPts val="0"/>
-              </a:spcBef>
-              <a:spcAft>
-                <a:spcPts val="0"/>
-              </a:spcAft>
-              <a:buClr>
-                <a:schemeClr val="dk2"/>
-              </a:buClr>
-              <a:buSzPts val="2800"/>
-              <a:buFont typeface="Fira Code"/>
-              <a:buNone/>
-              <a:defRPr sz="2800" b="0" i="0" u="none" strike="noStrike" cap="none">
-                <a:solidFill>
-                  <a:schemeClr val="dk2"/>
-                </a:solidFill>
-                <a:latin typeface="Fira Code"/>
-                <a:ea typeface="Fira Code"/>
-                <a:cs typeface="Fira Code"/>
-                <a:sym typeface="Fira Code"/>
-              </a:defRPr>
-            </a:lvl7pPr>
-            <a:lvl8pPr marL="3657600" marR="0" lvl="7" indent="-317500" algn="ctr" rtl="0">
-              <a:lnSpc>
-                <a:spcPct val="100000"/>
-              </a:lnSpc>
-              <a:spcBef>
-                <a:spcPts val="0"/>
-              </a:spcBef>
-              <a:spcAft>
-                <a:spcPts val="0"/>
-              </a:spcAft>
-              <a:buClr>
-                <a:schemeClr val="dk2"/>
-              </a:buClr>
-              <a:buSzPts val="2800"/>
-              <a:buFont typeface="Fira Code"/>
-              <a:buNone/>
-              <a:defRPr sz="2800" b="0" i="0" u="none" strike="noStrike" cap="none">
-                <a:solidFill>
-                  <a:schemeClr val="dk2"/>
-                </a:solidFill>
-                <a:latin typeface="Fira Code"/>
-                <a:ea typeface="Fira Code"/>
-                <a:cs typeface="Fira Code"/>
-                <a:sym typeface="Fira Code"/>
-              </a:defRPr>
-            </a:lvl8pPr>
-            <a:lvl9pPr marL="4114800" marR="0" lvl="8" indent="-317500" algn="ctr" rtl="0">
-              <a:lnSpc>
-                <a:spcPct val="100000"/>
-              </a:lnSpc>
-              <a:spcBef>
-                <a:spcPts val="0"/>
-              </a:spcBef>
-              <a:spcAft>
-                <a:spcPts val="0"/>
-              </a:spcAft>
-              <a:buClr>
-                <a:schemeClr val="dk2"/>
-              </a:buClr>
-              <a:buSzPts val="2800"/>
-              <a:buFont typeface="Fira Code"/>
-              <a:buNone/>
-              <a:defRPr sz="2800" b="0" i="0" u="none" strike="noStrike" cap="none">
-                <a:solidFill>
-                  <a:schemeClr val="dk2"/>
-                </a:solidFill>
-                <a:latin typeface="Fira Code"/>
-                <a:ea typeface="Fira Code"/>
-                <a:cs typeface="Fira Code"/>
-                <a:sym typeface="Fira Code"/>
-              </a:defRPr>
-            </a:lvl9pPr>
-          </a:lstStyle>
-          <a:p>
-            <a:pPr marL="0" indent="0" algn="ctr"/>
-            <a:r>
-              <a:rPr lang="en-US" sz="1000" dirty="0"/>
-              <a:t>Task 3</a:t>
-            </a:r>
-          </a:p>
-        </p:txBody>
-      </p:sp>
-    </p:spTree>
-    <p:extLst>
-      <p:ext uri="{BB962C8B-B14F-4D97-AF65-F5344CB8AC3E}">
-        <p14:creationId xmlns:p14="http://schemas.microsoft.com/office/powerpoint/2010/main" val="3625135452"/>
-      </p:ext>
-    </p:extLst>
-  </p:cSld>
-  <p:clrMapOvr>
-    <a:masterClrMapping/>
-  </p:clrMapOvr>
-</p:sld>
-</file>
-
-<file path=ppt/slides/slide12.xml><?xml version="1.0" encoding="utf-8"?>
-<p:sld xmlns:a="http://schemas.openxmlformats.org/drawingml/2006/main" xmlns:r="http://schemas.openxmlformats.org/officeDocument/2006/relationships" xmlns:p="http://schemas.openxmlformats.org/presentationml/2006/main">
-  <p:cSld>
-    <p:spTree>
-      <p:nvGrpSpPr>
-        <p:cNvPr id="1" name="Shape 457">
-          <a:extLst>
-            <a:ext uri="{FF2B5EF4-FFF2-40B4-BE49-F238E27FC236}">
               <a16:creationId xmlns:a16="http://schemas.microsoft.com/office/drawing/2014/main" id="{F328F8A8-CAF7-68F9-CFC3-77DFEF9838B6}"/>
             </a:ext>
           </a:extLst>
@@ -16286,7 +11980,7 @@
                   <a:schemeClr val="accent3"/>
                 </a:solidFill>
               </a:rPr>
-              <a:t>1</a:t>
+              <a:t>8</a:t>
             </a:r>
             <a:endParaRPr lang="en" dirty="0">
               <a:solidFill>
@@ -16813,6 +12507,9 @@
           </a:p>
           <a:p>
             <a:pPr marL="285750" indent="-285750">
+              <a:buClr>
+                <a:schemeClr val="accent2"/>
+              </a:buClr>
               <a:buFont typeface="Arial" panose="020B0604020202020204" pitchFamily="34" charset="0"/>
               <a:buChar char="•"/>
             </a:pPr>
@@ -16830,6 +12527,9 @@
           </a:p>
           <a:p>
             <a:pPr marL="285750" indent="-285750">
+              <a:buClr>
+                <a:schemeClr val="accent2"/>
+              </a:buClr>
               <a:buFont typeface="Arial" panose="020B0604020202020204" pitchFamily="34" charset="0"/>
               <a:buChar char="•"/>
             </a:pPr>
@@ -20133,12 +15833,12 @@
               <a:buNone/>
             </a:pPr>
             <a:r>
-              <a:rPr lang="en" sz="1100">
+              <a:rPr lang="en" sz="1100" dirty="0">
                 <a:solidFill>
                   <a:schemeClr val="accent3"/>
                 </a:solidFill>
               </a:rPr>
-              <a:t>1</a:t>
+              <a:t>2</a:t>
             </a:r>
             <a:endParaRPr lang="en" dirty="0">
               <a:solidFill>
@@ -20163,7 +15863,7 @@
         <p:spPr>
           <a:xfrm>
             <a:off x="1129002" y="947184"/>
-            <a:ext cx="7993294" cy="1046440"/>
+            <a:ext cx="7993294" cy="954107"/>
           </a:xfrm>
           <a:prstGeom prst="rect">
             <a:avLst/>
@@ -20188,7 +15888,7 @@
                 <a:schemeClr val="accent3"/>
               </a:buClr>
             </a:pPr>
-            <a:endParaRPr lang="en-US" dirty="0">
+            <a:endParaRPr lang="en-US" sz="1200" dirty="0">
               <a:solidFill>
                 <a:schemeClr val="accent3"/>
               </a:solidFill>
@@ -20205,7 +15905,7 @@
               </a:buClr>
             </a:pPr>
             <a:r>
-              <a:rPr lang="en-US" sz="1600" dirty="0">
+              <a:rPr lang="en-US" dirty="0">
                 <a:solidFill>
                   <a:schemeClr val="accent3"/>
                 </a:solidFill>
@@ -20217,7 +15917,7 @@
               <a:t>Run the program in different states.</a:t>
             </a:r>
             <a:br>
-              <a:rPr lang="en-US" sz="1600" dirty="0">
+              <a:rPr lang="en-US" dirty="0">
                 <a:solidFill>
                   <a:schemeClr val="accent3"/>
                 </a:solidFill>
@@ -20228,7 +15928,7 @@
               </a:rPr>
             </a:br>
             <a:r>
-              <a:rPr lang="en-US" sz="1600" dirty="0">
+              <a:rPr lang="en-US" dirty="0">
                 <a:solidFill>
                   <a:schemeClr val="accent3"/>
                 </a:solidFill>
@@ -20650,7 +16350,7 @@
         <p:spPr>
           <a:xfrm>
             <a:off x="1229510" y="2147338"/>
-            <a:ext cx="4352180" cy="584775"/>
+            <a:ext cx="3960328" cy="523220"/>
           </a:xfrm>
           <a:prstGeom prst="rect">
             <a:avLst/>
@@ -20676,7 +16376,7 @@
               </a:buClr>
             </a:pPr>
             <a:r>
-              <a:rPr lang="en-US" sz="1600" dirty="0">
+              <a:rPr lang="en-US" dirty="0">
                 <a:solidFill>
                   <a:schemeClr val="accent6"/>
                 </a:solidFill>
@@ -20687,7 +16387,7 @@
               </a:rPr>
               <a:t>Which lines (A–D) cause compile errors, and why?</a:t>
             </a:r>
-            <a:endParaRPr lang="en-US" sz="1600" dirty="0">
+            <a:endParaRPr lang="en-US" dirty="0">
               <a:solidFill>
                 <a:schemeClr val="accent3"/>
               </a:solidFill>
@@ -20699,36 +16399,6 @@
           </a:p>
         </p:txBody>
       </p:sp>
-      <p:pic>
-        <p:nvPicPr>
-          <p:cNvPr id="10" name="Picture 9">
-            <a:extLst>
-              <a:ext uri="{FF2B5EF4-FFF2-40B4-BE49-F238E27FC236}">
-                <a16:creationId xmlns:a16="http://schemas.microsoft.com/office/drawing/2014/main" id="{8AAF8063-02C7-677B-95EC-DB55A7AE6A45}"/>
-              </a:ext>
-            </a:extLst>
-          </p:cNvPr>
-          <p:cNvPicPr>
-            <a:picLocks noChangeAspect="1"/>
-          </p:cNvPicPr>
-          <p:nvPr/>
-        </p:nvPicPr>
-        <p:blipFill>
-          <a:blip r:embed="rId3"/>
-          <a:stretch>
-            <a:fillRect/>
-          </a:stretch>
-        </p:blipFill>
-        <p:spPr>
-          <a:xfrm>
-            <a:off x="5738400" y="1233565"/>
-            <a:ext cx="3293702" cy="2504585"/>
-          </a:xfrm>
-          <a:prstGeom prst="rect">
-            <a:avLst/>
-          </a:prstGeom>
-        </p:spPr>
-      </p:pic>
       <p:sp>
         <p:nvSpPr>
           <p:cNvPr id="13" name="TextBox 12">
@@ -20856,6 +16526,467 @@
                 <a:sym typeface="Fira Code"/>
               </a:rPr>
               <a:t> q</a:t>
+            </a:r>
+          </a:p>
+        </p:txBody>
+      </p:sp>
+      <p:sp>
+        <p:nvSpPr>
+          <p:cNvPr id="5" name="Rectangle: Rounded Corners 4">
+            <a:extLst>
+              <a:ext uri="{FF2B5EF4-FFF2-40B4-BE49-F238E27FC236}">
+                <a16:creationId xmlns:a16="http://schemas.microsoft.com/office/drawing/2014/main" id="{6CFD05D1-E085-9A72-3EB1-20FCE7C444E2}"/>
+              </a:ext>
+            </a:extLst>
+          </p:cNvPr>
+          <p:cNvSpPr/>
+          <p:nvPr/>
+        </p:nvSpPr>
+        <p:spPr>
+          <a:xfrm>
+            <a:off x="5335665" y="1275199"/>
+            <a:ext cx="3592091" cy="2873118"/>
+          </a:xfrm>
+          <a:prstGeom prst="roundRect">
+            <a:avLst>
+              <a:gd name="adj" fmla="val 6341"/>
+            </a:avLst>
+          </a:prstGeom>
+          <a:solidFill>
+            <a:schemeClr val="accent5"/>
+          </a:solidFill>
+          <a:ln>
+            <a:noFill/>
+          </a:ln>
+        </p:spPr>
+        <p:style>
+          <a:lnRef idx="0">
+            <a:scrgbClr r="0" g="0" b="0"/>
+          </a:lnRef>
+          <a:fillRef idx="0">
+            <a:scrgbClr r="0" g="0" b="0"/>
+          </a:fillRef>
+          <a:effectRef idx="0">
+            <a:scrgbClr r="0" g="0" b="0"/>
+          </a:effectRef>
+          <a:fontRef idx="minor">
+            <a:schemeClr val="lt1"/>
+          </a:fontRef>
+        </p:style>
+        <p:txBody>
+          <a:bodyPr rtlCol="0" anchor="ctr"/>
+          <a:lstStyle/>
+          <a:p>
+            <a:r>
+              <a:rPr lang="en-US" sz="900" dirty="0">
+                <a:solidFill>
+                  <a:schemeClr val="accent2"/>
+                </a:solidFill>
+                <a:latin typeface="Fira Code" panose="020B0809050000020004" pitchFamily="49" charset="0"/>
+                <a:ea typeface="Fira Code" panose="020B0809050000020004" pitchFamily="49" charset="0"/>
+                <a:cs typeface="Fira Code" panose="020B0809050000020004" pitchFamily="49" charset="0"/>
+              </a:rPr>
+              <a:t>#i</a:t>
+            </a:r>
+            <a:r>
+              <a:rPr lang="en-US" sz="900" dirty="0">
+                <a:solidFill>
+                  <a:schemeClr val="accent2"/>
+                </a:solidFill>
+                <a:latin typeface="Fira Code" panose="020B0809050000020004" pitchFamily="49" charset="0"/>
+                <a:ea typeface="Fira Code" panose="020B0809050000020004" pitchFamily="49" charset="0"/>
+                <a:cs typeface="Fira Code" panose="020B0809050000020004" pitchFamily="49" charset="0"/>
+                <a:sym typeface="Arial"/>
+              </a:rPr>
+              <a:t>nclude </a:t>
+            </a:r>
+            <a:r>
+              <a:rPr lang="en-US" sz="900" dirty="0">
+                <a:solidFill>
+                  <a:schemeClr val="accent1"/>
+                </a:solidFill>
+                <a:latin typeface="Fira Code" panose="020B0809050000020004" pitchFamily="49" charset="0"/>
+                <a:ea typeface="Fira Code" panose="020B0809050000020004" pitchFamily="49" charset="0"/>
+                <a:cs typeface="Fira Code" panose="020B0809050000020004" pitchFamily="49" charset="0"/>
+                <a:sym typeface="Arial"/>
+              </a:rPr>
+              <a:t>&lt;</a:t>
+            </a:r>
+            <a:r>
+              <a:rPr lang="en-US" sz="900" dirty="0" err="1">
+                <a:solidFill>
+                  <a:schemeClr val="accent1"/>
+                </a:solidFill>
+                <a:latin typeface="Fira Code" panose="020B0809050000020004" pitchFamily="49" charset="0"/>
+                <a:ea typeface="Fira Code" panose="020B0809050000020004" pitchFamily="49" charset="0"/>
+                <a:cs typeface="Fira Code" panose="020B0809050000020004" pitchFamily="49" charset="0"/>
+                <a:sym typeface="Arial"/>
+              </a:rPr>
+              <a:t>stdio.h</a:t>
+            </a:r>
+            <a:r>
+              <a:rPr lang="en-US" sz="900" dirty="0">
+                <a:solidFill>
+                  <a:schemeClr val="accent1"/>
+                </a:solidFill>
+                <a:latin typeface="Fira Code" panose="020B0809050000020004" pitchFamily="49" charset="0"/>
+                <a:ea typeface="Fira Code" panose="020B0809050000020004" pitchFamily="49" charset="0"/>
+                <a:cs typeface="Fira Code" panose="020B0809050000020004" pitchFamily="49" charset="0"/>
+                <a:sym typeface="Arial"/>
+              </a:rPr>
+              <a:t>&gt;</a:t>
+            </a:r>
+          </a:p>
+          <a:p>
+            <a:endParaRPr lang="en-US" sz="900" dirty="0">
+              <a:solidFill>
+                <a:schemeClr val="accent1"/>
+              </a:solidFill>
+              <a:latin typeface="Fira Code" panose="020B0809050000020004" pitchFamily="49" charset="0"/>
+              <a:ea typeface="Fira Code" panose="020B0809050000020004" pitchFamily="49" charset="0"/>
+              <a:cs typeface="Fira Code" panose="020B0809050000020004" pitchFamily="49" charset="0"/>
+              <a:sym typeface="Arial"/>
+            </a:endParaRPr>
+          </a:p>
+          <a:p>
+            <a:r>
+              <a:rPr lang="en-US" sz="900" dirty="0">
+                <a:solidFill>
+                  <a:schemeClr val="accent2"/>
+                </a:solidFill>
+                <a:latin typeface="Fira Code" panose="020B0809050000020004" pitchFamily="49" charset="0"/>
+                <a:ea typeface="Fira Code" panose="020B0809050000020004" pitchFamily="49" charset="0"/>
+                <a:cs typeface="Fira Code" panose="020B0809050000020004" pitchFamily="49" charset="0"/>
+                <a:sym typeface="Arial"/>
+              </a:rPr>
+              <a:t>int</a:t>
+            </a:r>
+            <a:r>
+              <a:rPr lang="en-US" sz="900" dirty="0">
+                <a:solidFill>
+                  <a:schemeClr val="accent1"/>
+                </a:solidFill>
+                <a:latin typeface="Fira Code" panose="020B0809050000020004" pitchFamily="49" charset="0"/>
+                <a:ea typeface="Fira Code" panose="020B0809050000020004" pitchFamily="49" charset="0"/>
+                <a:cs typeface="Fira Code" panose="020B0809050000020004" pitchFamily="49" charset="0"/>
+                <a:sym typeface="Arial"/>
+              </a:rPr>
+              <a:t> main() {</a:t>
+            </a:r>
+          </a:p>
+          <a:p>
+            <a:r>
+              <a:rPr lang="en-US" sz="900" dirty="0">
+                <a:solidFill>
+                  <a:schemeClr val="accent1"/>
+                </a:solidFill>
+                <a:latin typeface="Fira Code" panose="020B0809050000020004" pitchFamily="49" charset="0"/>
+                <a:ea typeface="Fira Code" panose="020B0809050000020004" pitchFamily="49" charset="0"/>
+                <a:cs typeface="Fira Code" panose="020B0809050000020004" pitchFamily="49" charset="0"/>
+                <a:sym typeface="Arial"/>
+              </a:rPr>
+              <a:t>    int x = 10, y = 20;</a:t>
+            </a:r>
+          </a:p>
+          <a:p>
+            <a:endParaRPr lang="en-US" sz="900" dirty="0">
+              <a:solidFill>
+                <a:schemeClr val="accent1"/>
+              </a:solidFill>
+              <a:latin typeface="Fira Code" panose="020B0809050000020004" pitchFamily="49" charset="0"/>
+              <a:ea typeface="Fira Code" panose="020B0809050000020004" pitchFamily="49" charset="0"/>
+              <a:cs typeface="Fira Code" panose="020B0809050000020004" pitchFamily="49" charset="0"/>
+              <a:sym typeface="Arial"/>
+            </a:endParaRPr>
+          </a:p>
+          <a:p>
+            <a:r>
+              <a:rPr lang="en-US" sz="900" dirty="0">
+                <a:solidFill>
+                  <a:schemeClr val="accent1"/>
+                </a:solidFill>
+                <a:latin typeface="Fira Code" panose="020B0809050000020004" pitchFamily="49" charset="0"/>
+                <a:ea typeface="Fira Code" panose="020B0809050000020004" pitchFamily="49" charset="0"/>
+                <a:cs typeface="Fira Code" panose="020B0809050000020004" pitchFamily="49" charset="0"/>
+                <a:sym typeface="Arial"/>
+              </a:rPr>
+              <a:t>    </a:t>
+            </a:r>
+            <a:r>
+              <a:rPr lang="en-US" sz="900" dirty="0">
+                <a:solidFill>
+                  <a:schemeClr val="accent2"/>
+                </a:solidFill>
+                <a:latin typeface="Fira Code" panose="020B0809050000020004" pitchFamily="49" charset="0"/>
+                <a:ea typeface="Fira Code" panose="020B0809050000020004" pitchFamily="49" charset="0"/>
+                <a:cs typeface="Fira Code" panose="020B0809050000020004" pitchFamily="49" charset="0"/>
+                <a:sym typeface="Arial"/>
+              </a:rPr>
+              <a:t>const int </a:t>
+            </a:r>
+            <a:r>
+              <a:rPr lang="en-US" sz="900" dirty="0">
+                <a:solidFill>
+                  <a:schemeClr val="accent1"/>
+                </a:solidFill>
+                <a:latin typeface="Fira Code" panose="020B0809050000020004" pitchFamily="49" charset="0"/>
+                <a:ea typeface="Fira Code" panose="020B0809050000020004" pitchFamily="49" charset="0"/>
+                <a:cs typeface="Fira Code" panose="020B0809050000020004" pitchFamily="49" charset="0"/>
+                <a:sym typeface="Arial"/>
+              </a:rPr>
+              <a:t>*p = &amp;x;  </a:t>
+            </a:r>
+            <a:r>
+              <a:rPr lang="en-US" sz="900" dirty="0">
+                <a:solidFill>
+                  <a:schemeClr val="accent3"/>
+                </a:solidFill>
+                <a:latin typeface="Fira Code" panose="020B0809050000020004" pitchFamily="49" charset="0"/>
+                <a:ea typeface="Fira Code" panose="020B0809050000020004" pitchFamily="49" charset="0"/>
+                <a:cs typeface="Fira Code" panose="020B0809050000020004" pitchFamily="49" charset="0"/>
+                <a:sym typeface="Arial"/>
+              </a:rPr>
+              <a:t>// pointer to const int</a:t>
+            </a:r>
+          </a:p>
+          <a:p>
+            <a:r>
+              <a:rPr lang="en-US" sz="900" dirty="0">
+                <a:solidFill>
+                  <a:schemeClr val="accent1"/>
+                </a:solidFill>
+                <a:latin typeface="Fira Code" panose="020B0809050000020004" pitchFamily="49" charset="0"/>
+                <a:ea typeface="Fira Code" panose="020B0809050000020004" pitchFamily="49" charset="0"/>
+                <a:cs typeface="Fira Code" panose="020B0809050000020004" pitchFamily="49" charset="0"/>
+                <a:sym typeface="Arial"/>
+              </a:rPr>
+              <a:t>    </a:t>
+            </a:r>
+            <a:r>
+              <a:rPr lang="en-US" sz="900" dirty="0">
+                <a:solidFill>
+                  <a:schemeClr val="accent2"/>
+                </a:solidFill>
+                <a:latin typeface="Fira Code" panose="020B0809050000020004" pitchFamily="49" charset="0"/>
+                <a:ea typeface="Fira Code" panose="020B0809050000020004" pitchFamily="49" charset="0"/>
+                <a:cs typeface="Fira Code" panose="020B0809050000020004" pitchFamily="49" charset="0"/>
+                <a:sym typeface="Arial"/>
+              </a:rPr>
+              <a:t>int *const </a:t>
+            </a:r>
+            <a:r>
+              <a:rPr lang="en-US" sz="900" dirty="0">
+                <a:solidFill>
+                  <a:schemeClr val="accent1"/>
+                </a:solidFill>
+                <a:latin typeface="Fira Code" panose="020B0809050000020004" pitchFamily="49" charset="0"/>
+                <a:ea typeface="Fira Code" panose="020B0809050000020004" pitchFamily="49" charset="0"/>
+                <a:cs typeface="Fira Code" panose="020B0809050000020004" pitchFamily="49" charset="0"/>
+                <a:sym typeface="Arial"/>
+              </a:rPr>
+              <a:t>q = &amp;y;  </a:t>
+            </a:r>
+            <a:r>
+              <a:rPr lang="en-US" sz="900" dirty="0">
+                <a:solidFill>
+                  <a:schemeClr val="accent3"/>
+                </a:solidFill>
+                <a:latin typeface="Fira Code" panose="020B0809050000020004" pitchFamily="49" charset="0"/>
+                <a:ea typeface="Fira Code" panose="020B0809050000020004" pitchFamily="49" charset="0"/>
+                <a:cs typeface="Fira Code" panose="020B0809050000020004" pitchFamily="49" charset="0"/>
+                <a:sym typeface="Arial"/>
+              </a:rPr>
+              <a:t>// const pointer to int</a:t>
+            </a:r>
+          </a:p>
+          <a:p>
+            <a:endParaRPr lang="en-US" sz="900" dirty="0">
+              <a:solidFill>
+                <a:schemeClr val="accent1"/>
+              </a:solidFill>
+              <a:latin typeface="Fira Code" panose="020B0809050000020004" pitchFamily="49" charset="0"/>
+              <a:ea typeface="Fira Code" panose="020B0809050000020004" pitchFamily="49" charset="0"/>
+              <a:cs typeface="Fira Code" panose="020B0809050000020004" pitchFamily="49" charset="0"/>
+              <a:sym typeface="Arial"/>
+            </a:endParaRPr>
+          </a:p>
+          <a:p>
+            <a:r>
+              <a:rPr lang="en-US" sz="900" dirty="0">
+                <a:solidFill>
+                  <a:schemeClr val="accent3"/>
+                </a:solidFill>
+                <a:latin typeface="Fira Code" panose="020B0809050000020004" pitchFamily="49" charset="0"/>
+                <a:ea typeface="Fira Code" panose="020B0809050000020004" pitchFamily="49" charset="0"/>
+                <a:cs typeface="Fira Code" panose="020B0809050000020004" pitchFamily="49" charset="0"/>
+                <a:sym typeface="Arial"/>
+              </a:rPr>
+              <a:t>    // *p = 15;    // (A)</a:t>
+            </a:r>
+          </a:p>
+          <a:p>
+            <a:r>
+              <a:rPr lang="en-US" sz="900" dirty="0">
+                <a:solidFill>
+                  <a:schemeClr val="accent1"/>
+                </a:solidFill>
+                <a:latin typeface="Fira Code" panose="020B0809050000020004" pitchFamily="49" charset="0"/>
+                <a:ea typeface="Fira Code" panose="020B0809050000020004" pitchFamily="49" charset="0"/>
+                <a:cs typeface="Fira Code" panose="020B0809050000020004" pitchFamily="49" charset="0"/>
+                <a:sym typeface="Arial"/>
+              </a:rPr>
+              <a:t>    p = &amp;y;      // (B)</a:t>
+            </a:r>
+          </a:p>
+          <a:p>
+            <a:endParaRPr lang="en-US" sz="900" dirty="0">
+              <a:solidFill>
+                <a:schemeClr val="accent1"/>
+              </a:solidFill>
+              <a:latin typeface="Fira Code" panose="020B0809050000020004" pitchFamily="49" charset="0"/>
+              <a:ea typeface="Fira Code" panose="020B0809050000020004" pitchFamily="49" charset="0"/>
+              <a:cs typeface="Fira Code" panose="020B0809050000020004" pitchFamily="49" charset="0"/>
+              <a:sym typeface="Arial"/>
+            </a:endParaRPr>
+          </a:p>
+          <a:p>
+            <a:r>
+              <a:rPr lang="en-US" sz="900" dirty="0">
+                <a:solidFill>
+                  <a:schemeClr val="accent1"/>
+                </a:solidFill>
+                <a:latin typeface="Fira Code" panose="020B0809050000020004" pitchFamily="49" charset="0"/>
+                <a:ea typeface="Fira Code" panose="020B0809050000020004" pitchFamily="49" charset="0"/>
+                <a:cs typeface="Fira Code" panose="020B0809050000020004" pitchFamily="49" charset="0"/>
+                <a:sym typeface="Arial"/>
+              </a:rPr>
+              <a:t>    *q = 25;     // (C)</a:t>
+            </a:r>
+          </a:p>
+          <a:p>
+            <a:r>
+              <a:rPr lang="en-US" sz="900" dirty="0">
+                <a:solidFill>
+                  <a:schemeClr val="accent3"/>
+                </a:solidFill>
+                <a:latin typeface="Fira Code" panose="020B0809050000020004" pitchFamily="49" charset="0"/>
+                <a:ea typeface="Fira Code" panose="020B0809050000020004" pitchFamily="49" charset="0"/>
+                <a:cs typeface="Fira Code" panose="020B0809050000020004" pitchFamily="49" charset="0"/>
+                <a:sym typeface="Arial"/>
+              </a:rPr>
+              <a:t>    // q = &amp;x;     // (D)</a:t>
+            </a:r>
+          </a:p>
+          <a:p>
+            <a:endParaRPr lang="en-US" sz="900" dirty="0">
+              <a:solidFill>
+                <a:schemeClr val="accent1"/>
+              </a:solidFill>
+              <a:latin typeface="Fira Code" panose="020B0809050000020004" pitchFamily="49" charset="0"/>
+              <a:ea typeface="Fira Code" panose="020B0809050000020004" pitchFamily="49" charset="0"/>
+              <a:cs typeface="Fira Code" panose="020B0809050000020004" pitchFamily="49" charset="0"/>
+              <a:sym typeface="Arial"/>
+            </a:endParaRPr>
+          </a:p>
+          <a:p>
+            <a:r>
+              <a:rPr lang="en-US" sz="900" dirty="0">
+                <a:solidFill>
+                  <a:schemeClr val="accent1"/>
+                </a:solidFill>
+                <a:latin typeface="Fira Code" panose="020B0809050000020004" pitchFamily="49" charset="0"/>
+                <a:ea typeface="Fira Code" panose="020B0809050000020004" pitchFamily="49" charset="0"/>
+                <a:cs typeface="Fira Code" panose="020B0809050000020004" pitchFamily="49" charset="0"/>
+                <a:sym typeface="Arial"/>
+              </a:rPr>
+              <a:t>    </a:t>
+            </a:r>
+            <a:r>
+              <a:rPr lang="en-US" sz="900" dirty="0" err="1">
+                <a:solidFill>
+                  <a:schemeClr val="accent2"/>
+                </a:solidFill>
+                <a:latin typeface="Fira Code" panose="020B0809050000020004" pitchFamily="49" charset="0"/>
+                <a:ea typeface="Fira Code" panose="020B0809050000020004" pitchFamily="49" charset="0"/>
+                <a:cs typeface="Fira Code" panose="020B0809050000020004" pitchFamily="49" charset="0"/>
+                <a:sym typeface="Arial"/>
+              </a:rPr>
+              <a:t>printf</a:t>
+            </a:r>
+            <a:r>
+              <a:rPr lang="en-US" sz="900" dirty="0">
+                <a:solidFill>
+                  <a:schemeClr val="accent1"/>
+                </a:solidFill>
+                <a:latin typeface="Fira Code" panose="020B0809050000020004" pitchFamily="49" charset="0"/>
+                <a:ea typeface="Fira Code" panose="020B0809050000020004" pitchFamily="49" charset="0"/>
+                <a:cs typeface="Fira Code" panose="020B0809050000020004" pitchFamily="49" charset="0"/>
+                <a:sym typeface="Arial"/>
+              </a:rPr>
+              <a:t>("x = %d, y = %d\n", x, y);</a:t>
+            </a:r>
+          </a:p>
+          <a:p>
+            <a:endParaRPr lang="en-US" sz="900" dirty="0">
+              <a:solidFill>
+                <a:schemeClr val="accent1"/>
+              </a:solidFill>
+              <a:latin typeface="Fira Code" panose="020B0809050000020004" pitchFamily="49" charset="0"/>
+              <a:ea typeface="Fira Code" panose="020B0809050000020004" pitchFamily="49" charset="0"/>
+              <a:cs typeface="Fira Code" panose="020B0809050000020004" pitchFamily="49" charset="0"/>
+              <a:sym typeface="Arial"/>
+            </a:endParaRPr>
+          </a:p>
+          <a:p>
+            <a:r>
+              <a:rPr lang="en-US" sz="900" dirty="0">
+                <a:solidFill>
+                  <a:schemeClr val="accent1"/>
+                </a:solidFill>
+                <a:latin typeface="Fira Code" panose="020B0809050000020004" pitchFamily="49" charset="0"/>
+                <a:ea typeface="Fira Code" panose="020B0809050000020004" pitchFamily="49" charset="0"/>
+                <a:cs typeface="Fira Code" panose="020B0809050000020004" pitchFamily="49" charset="0"/>
+                <a:sym typeface="Arial"/>
+              </a:rPr>
+              <a:t>    </a:t>
+            </a:r>
+            <a:r>
+              <a:rPr lang="en-US" sz="900" dirty="0">
+                <a:solidFill>
+                  <a:schemeClr val="accent2"/>
+                </a:solidFill>
+                <a:latin typeface="Fira Code" panose="020B0809050000020004" pitchFamily="49" charset="0"/>
+                <a:ea typeface="Fira Code" panose="020B0809050000020004" pitchFamily="49" charset="0"/>
+                <a:cs typeface="Fira Code" panose="020B0809050000020004" pitchFamily="49" charset="0"/>
+                <a:sym typeface="Arial"/>
+              </a:rPr>
+              <a:t>return</a:t>
+            </a:r>
+            <a:r>
+              <a:rPr lang="en-US" sz="900" dirty="0">
+                <a:solidFill>
+                  <a:schemeClr val="accent1"/>
+                </a:solidFill>
+                <a:latin typeface="Fira Code" panose="020B0809050000020004" pitchFamily="49" charset="0"/>
+                <a:ea typeface="Fira Code" panose="020B0809050000020004" pitchFamily="49" charset="0"/>
+                <a:cs typeface="Fira Code" panose="020B0809050000020004" pitchFamily="49" charset="0"/>
+                <a:sym typeface="Arial"/>
+              </a:rPr>
+              <a:t> 0;</a:t>
+            </a:r>
+          </a:p>
+          <a:p>
+            <a:r>
+              <a:rPr lang="en-US" sz="900" dirty="0">
+                <a:solidFill>
+                  <a:schemeClr val="accent1"/>
+                </a:solidFill>
+                <a:latin typeface="Fira Code" panose="020B0809050000020004" pitchFamily="49" charset="0"/>
+                <a:ea typeface="Fira Code" panose="020B0809050000020004" pitchFamily="49" charset="0"/>
+                <a:cs typeface="Fira Code" panose="020B0809050000020004" pitchFamily="49" charset="0"/>
+                <a:sym typeface="Arial"/>
+              </a:rPr>
+              <a:t>}</a:t>
             </a:r>
           </a:p>
         </p:txBody>
@@ -21925,12 +18056,12 @@
               <a:buNone/>
             </a:pPr>
             <a:r>
-              <a:rPr lang="en" sz="1100">
+              <a:rPr lang="en" sz="1100" dirty="0">
                 <a:solidFill>
                   <a:schemeClr val="accent3"/>
                 </a:solidFill>
               </a:rPr>
-              <a:t>1</a:t>
+              <a:t>3</a:t>
             </a:r>
             <a:endParaRPr lang="en" dirty="0">
               <a:solidFill>
@@ -22252,36 +18383,6 @@
           </a:p>
         </p:txBody>
       </p:sp>
-      <p:pic>
-        <p:nvPicPr>
-          <p:cNvPr id="13" name="Picture 12">
-            <a:extLst>
-              <a:ext uri="{FF2B5EF4-FFF2-40B4-BE49-F238E27FC236}">
-                <a16:creationId xmlns:a16="http://schemas.microsoft.com/office/drawing/2014/main" id="{A4320CF7-6F75-A1FA-282C-AE1EF033DEDA}"/>
-              </a:ext>
-            </a:extLst>
-          </p:cNvPr>
-          <p:cNvPicPr>
-            <a:picLocks noChangeAspect="1"/>
-          </p:cNvPicPr>
-          <p:nvPr/>
-        </p:nvPicPr>
-        <p:blipFill>
-          <a:blip r:embed="rId3"/>
-          <a:stretch>
-            <a:fillRect/>
-          </a:stretch>
-        </p:blipFill>
-        <p:spPr>
-          <a:xfrm>
-            <a:off x="5328000" y="1901664"/>
-            <a:ext cx="3671189" cy="2571086"/>
-          </a:xfrm>
-          <a:prstGeom prst="rect">
-            <a:avLst/>
-          </a:prstGeom>
-        </p:spPr>
-      </p:pic>
       <p:sp>
         <p:nvSpPr>
           <p:cNvPr id="15" name="TextBox 14">
@@ -22467,6 +18568,879 @@
               <a:latin typeface="Fira Code"/>
               <a:ea typeface="Fira Code"/>
               <a:cs typeface="B Nazanin" panose="00000400000000000000" pitchFamily="2" charset="-78"/>
+              <a:sym typeface="Fira Code"/>
+            </a:endParaRPr>
+          </a:p>
+        </p:txBody>
+      </p:sp>
+      <p:sp>
+        <p:nvSpPr>
+          <p:cNvPr id="9" name="Rectangle: Rounded Corners 8">
+            <a:extLst>
+              <a:ext uri="{FF2B5EF4-FFF2-40B4-BE49-F238E27FC236}">
+                <a16:creationId xmlns:a16="http://schemas.microsoft.com/office/drawing/2014/main" id="{ED885B1B-B142-7811-34F0-868125294EAB}"/>
+              </a:ext>
+            </a:extLst>
+          </p:cNvPr>
+          <p:cNvSpPr/>
+          <p:nvPr/>
+        </p:nvSpPr>
+        <p:spPr>
+          <a:xfrm>
+            <a:off x="5433600" y="1901664"/>
+            <a:ext cx="3451715" cy="2571086"/>
+          </a:xfrm>
+          <a:prstGeom prst="roundRect">
+            <a:avLst>
+              <a:gd name="adj" fmla="val 6691"/>
+            </a:avLst>
+          </a:prstGeom>
+          <a:solidFill>
+            <a:schemeClr val="accent5"/>
+          </a:solidFill>
+          <a:ln>
+            <a:noFill/>
+          </a:ln>
+        </p:spPr>
+        <p:style>
+          <a:lnRef idx="0">
+            <a:scrgbClr r="0" g="0" b="0"/>
+          </a:lnRef>
+          <a:fillRef idx="0">
+            <a:scrgbClr r="0" g="0" b="0"/>
+          </a:fillRef>
+          <a:effectRef idx="0">
+            <a:scrgbClr r="0" g="0" b="0"/>
+          </a:effectRef>
+          <a:fontRef idx="minor">
+            <a:schemeClr val="lt1"/>
+          </a:fontRef>
+        </p:style>
+        <p:txBody>
+          <a:bodyPr rtlCol="0" anchor="ctr"/>
+          <a:lstStyle/>
+          <a:p>
+            <a:pPr marL="139700" lvl="0">
+              <a:buClr>
+                <a:srgbClr val="72D9F0"/>
+              </a:buClr>
+              <a:buSzPts val="1400"/>
+              <a:defRPr/>
+            </a:pPr>
+            <a:r>
+              <a:rPr lang="en-US" sz="900" dirty="0">
+                <a:solidFill>
+                  <a:schemeClr val="tx2"/>
+                </a:solidFill>
+                <a:latin typeface="Fira Code" panose="020B0809050000020004" pitchFamily="49" charset="0"/>
+                <a:ea typeface="Fira Code" panose="020B0809050000020004" pitchFamily="49" charset="0"/>
+                <a:cs typeface="Fira Code" panose="020B0809050000020004" pitchFamily="49" charset="0"/>
+                <a:sym typeface="Fira Code"/>
+              </a:rPr>
+              <a:t>#include </a:t>
+            </a:r>
+            <a:r>
+              <a:rPr lang="en-US" sz="900" dirty="0">
+                <a:solidFill>
+                  <a:schemeClr val="accent1"/>
+                </a:solidFill>
+                <a:latin typeface="Fira Code" panose="020B0809050000020004" pitchFamily="49" charset="0"/>
+                <a:ea typeface="Fira Code" panose="020B0809050000020004" pitchFamily="49" charset="0"/>
+                <a:cs typeface="Fira Code" panose="020B0809050000020004" pitchFamily="49" charset="0"/>
+                <a:sym typeface="Fira Code"/>
+              </a:rPr>
+              <a:t>&lt;</a:t>
+            </a:r>
+            <a:r>
+              <a:rPr lang="en-US" sz="900" dirty="0" err="1">
+                <a:solidFill>
+                  <a:schemeClr val="accent1"/>
+                </a:solidFill>
+                <a:latin typeface="Fira Code" panose="020B0809050000020004" pitchFamily="49" charset="0"/>
+                <a:ea typeface="Fira Code" panose="020B0809050000020004" pitchFamily="49" charset="0"/>
+                <a:cs typeface="Fira Code" panose="020B0809050000020004" pitchFamily="49" charset="0"/>
+                <a:sym typeface="Fira Code"/>
+              </a:rPr>
+              <a:t>stdio.h</a:t>
+            </a:r>
+            <a:r>
+              <a:rPr lang="en-US" sz="900" dirty="0">
+                <a:solidFill>
+                  <a:schemeClr val="accent1"/>
+                </a:solidFill>
+                <a:latin typeface="Fira Code" panose="020B0809050000020004" pitchFamily="49" charset="0"/>
+                <a:ea typeface="Fira Code" panose="020B0809050000020004" pitchFamily="49" charset="0"/>
+                <a:cs typeface="Fira Code" panose="020B0809050000020004" pitchFamily="49" charset="0"/>
+                <a:sym typeface="Fira Code"/>
+              </a:rPr>
+              <a:t>&gt;</a:t>
+            </a:r>
+          </a:p>
+          <a:p>
+            <a:pPr marL="139700" lvl="0">
+              <a:buClr>
+                <a:srgbClr val="72D9F0"/>
+              </a:buClr>
+              <a:buSzPts val="1400"/>
+              <a:defRPr/>
+            </a:pPr>
+            <a:r>
+              <a:rPr lang="en-US" sz="900" dirty="0">
+                <a:solidFill>
+                  <a:schemeClr val="tx2"/>
+                </a:solidFill>
+                <a:latin typeface="Fira Code" panose="020B0809050000020004" pitchFamily="49" charset="0"/>
+                <a:ea typeface="Fira Code" panose="020B0809050000020004" pitchFamily="49" charset="0"/>
+                <a:cs typeface="Fira Code" panose="020B0809050000020004" pitchFamily="49" charset="0"/>
+                <a:sym typeface="Fira Code"/>
+              </a:rPr>
+              <a:t>#include </a:t>
+            </a:r>
+            <a:r>
+              <a:rPr lang="en-US" sz="900" dirty="0">
+                <a:solidFill>
+                  <a:schemeClr val="accent1"/>
+                </a:solidFill>
+                <a:latin typeface="Fira Code" panose="020B0809050000020004" pitchFamily="49" charset="0"/>
+                <a:ea typeface="Fira Code" panose="020B0809050000020004" pitchFamily="49" charset="0"/>
+                <a:cs typeface="Fira Code" panose="020B0809050000020004" pitchFamily="49" charset="0"/>
+                <a:sym typeface="Fira Code"/>
+              </a:rPr>
+              <a:t>&lt;</a:t>
+            </a:r>
+            <a:r>
+              <a:rPr lang="en-US" sz="900" dirty="0" err="1">
+                <a:solidFill>
+                  <a:schemeClr val="accent1"/>
+                </a:solidFill>
+                <a:latin typeface="Fira Code" panose="020B0809050000020004" pitchFamily="49" charset="0"/>
+                <a:ea typeface="Fira Code" panose="020B0809050000020004" pitchFamily="49" charset="0"/>
+                <a:cs typeface="Fira Code" panose="020B0809050000020004" pitchFamily="49" charset="0"/>
+                <a:sym typeface="Fira Code"/>
+              </a:rPr>
+              <a:t>stdlib.h</a:t>
+            </a:r>
+            <a:r>
+              <a:rPr lang="en-US" sz="900" dirty="0">
+                <a:solidFill>
+                  <a:schemeClr val="accent1"/>
+                </a:solidFill>
+                <a:latin typeface="Fira Code" panose="020B0809050000020004" pitchFamily="49" charset="0"/>
+                <a:ea typeface="Fira Code" panose="020B0809050000020004" pitchFamily="49" charset="0"/>
+                <a:cs typeface="Fira Code" panose="020B0809050000020004" pitchFamily="49" charset="0"/>
+                <a:sym typeface="Fira Code"/>
+              </a:rPr>
+              <a:t>&gt;</a:t>
+            </a:r>
+          </a:p>
+          <a:p>
+            <a:pPr marL="139700" lvl="0">
+              <a:buClr>
+                <a:srgbClr val="72D9F0"/>
+              </a:buClr>
+              <a:buSzPts val="1400"/>
+              <a:defRPr/>
+            </a:pPr>
+            <a:endParaRPr lang="en-US" sz="900" dirty="0">
+              <a:solidFill>
+                <a:schemeClr val="accent1"/>
+              </a:solidFill>
+              <a:latin typeface="Fira Code" panose="020B0809050000020004" pitchFamily="49" charset="0"/>
+              <a:ea typeface="Fira Code" panose="020B0809050000020004" pitchFamily="49" charset="0"/>
+              <a:cs typeface="Fira Code" panose="020B0809050000020004" pitchFamily="49" charset="0"/>
+              <a:sym typeface="Fira Code"/>
+            </a:endParaRPr>
+          </a:p>
+          <a:p>
+            <a:pPr marL="139700" lvl="0">
+              <a:buClr>
+                <a:srgbClr val="72D9F0"/>
+              </a:buClr>
+              <a:buSzPts val="1400"/>
+              <a:defRPr/>
+            </a:pPr>
+            <a:r>
+              <a:rPr lang="en-US" sz="900" dirty="0">
+                <a:solidFill>
+                  <a:schemeClr val="tx2"/>
+                </a:solidFill>
+                <a:latin typeface="Fira Code" panose="020B0809050000020004" pitchFamily="49" charset="0"/>
+                <a:ea typeface="Fira Code" panose="020B0809050000020004" pitchFamily="49" charset="0"/>
+                <a:cs typeface="Fira Code" panose="020B0809050000020004" pitchFamily="49" charset="0"/>
+                <a:sym typeface="Fira Code"/>
+              </a:rPr>
+              <a:t>int</a:t>
+            </a:r>
+            <a:r>
+              <a:rPr lang="en-US" sz="900" dirty="0">
+                <a:solidFill>
+                  <a:schemeClr val="accent1"/>
+                </a:solidFill>
+                <a:latin typeface="Fira Code" panose="020B0809050000020004" pitchFamily="49" charset="0"/>
+                <a:ea typeface="Fira Code" panose="020B0809050000020004" pitchFamily="49" charset="0"/>
+                <a:cs typeface="Fira Code" panose="020B0809050000020004" pitchFamily="49" charset="0"/>
+                <a:sym typeface="Fira Code"/>
+              </a:rPr>
+              <a:t> main() {</a:t>
+            </a:r>
+          </a:p>
+          <a:p>
+            <a:pPr marL="139700" lvl="0">
+              <a:buClr>
+                <a:srgbClr val="72D9F0"/>
+              </a:buClr>
+              <a:buSzPts val="1400"/>
+              <a:defRPr/>
+            </a:pPr>
+            <a:r>
+              <a:rPr lang="en-US" sz="900" dirty="0">
+                <a:solidFill>
+                  <a:schemeClr val="accent1"/>
+                </a:solidFill>
+                <a:latin typeface="Fira Code" panose="020B0809050000020004" pitchFamily="49" charset="0"/>
+                <a:ea typeface="Fira Code" panose="020B0809050000020004" pitchFamily="49" charset="0"/>
+                <a:cs typeface="Fira Code" panose="020B0809050000020004" pitchFamily="49" charset="0"/>
+                <a:sym typeface="Fira Code"/>
+              </a:rPr>
+              <a:t>    </a:t>
+            </a:r>
+            <a:r>
+              <a:rPr lang="en-US" sz="900" dirty="0">
+                <a:solidFill>
+                  <a:schemeClr val="tx2"/>
+                </a:solidFill>
+                <a:latin typeface="Fira Code" panose="020B0809050000020004" pitchFamily="49" charset="0"/>
+                <a:ea typeface="Fira Code" panose="020B0809050000020004" pitchFamily="49" charset="0"/>
+                <a:cs typeface="Fira Code" panose="020B0809050000020004" pitchFamily="49" charset="0"/>
+                <a:sym typeface="Fira Code"/>
+              </a:rPr>
+              <a:t>int</a:t>
+            </a:r>
+            <a:r>
+              <a:rPr lang="en-US" sz="900" dirty="0">
+                <a:solidFill>
+                  <a:schemeClr val="accent1"/>
+                </a:solidFill>
+                <a:latin typeface="Fira Code" panose="020B0809050000020004" pitchFamily="49" charset="0"/>
+                <a:ea typeface="Fira Code" panose="020B0809050000020004" pitchFamily="49" charset="0"/>
+                <a:cs typeface="Fira Code" panose="020B0809050000020004" pitchFamily="49" charset="0"/>
+                <a:sym typeface="Fira Code"/>
+              </a:rPr>
+              <a:t> *</a:t>
+            </a:r>
+            <a:r>
+              <a:rPr lang="en-US" sz="900" dirty="0" err="1">
+                <a:solidFill>
+                  <a:schemeClr val="accent1"/>
+                </a:solidFill>
+                <a:latin typeface="Fira Code" panose="020B0809050000020004" pitchFamily="49" charset="0"/>
+                <a:ea typeface="Fira Code" panose="020B0809050000020004" pitchFamily="49" charset="0"/>
+                <a:cs typeface="Fira Code" panose="020B0809050000020004" pitchFamily="49" charset="0"/>
+                <a:sym typeface="Fira Code"/>
+              </a:rPr>
+              <a:t>ptr</a:t>
+            </a:r>
+            <a:r>
+              <a:rPr lang="en-US" sz="900" dirty="0">
+                <a:solidFill>
+                  <a:schemeClr val="accent1"/>
+                </a:solidFill>
+                <a:latin typeface="Fira Code" panose="020B0809050000020004" pitchFamily="49" charset="0"/>
+                <a:ea typeface="Fira Code" panose="020B0809050000020004" pitchFamily="49" charset="0"/>
+                <a:cs typeface="Fira Code" panose="020B0809050000020004" pitchFamily="49" charset="0"/>
+                <a:sym typeface="Fira Code"/>
+              </a:rPr>
+              <a:t> = (int *)malloc(20);</a:t>
+            </a:r>
+          </a:p>
+          <a:p>
+            <a:pPr marL="139700" lvl="0">
+              <a:buClr>
+                <a:srgbClr val="72D9F0"/>
+              </a:buClr>
+              <a:buSzPts val="1400"/>
+              <a:defRPr/>
+            </a:pPr>
+            <a:endParaRPr lang="en-US" sz="900" dirty="0">
+              <a:solidFill>
+                <a:schemeClr val="accent1"/>
+              </a:solidFill>
+              <a:latin typeface="Fira Code" panose="020B0809050000020004" pitchFamily="49" charset="0"/>
+              <a:ea typeface="Fira Code" panose="020B0809050000020004" pitchFamily="49" charset="0"/>
+              <a:cs typeface="Fira Code" panose="020B0809050000020004" pitchFamily="49" charset="0"/>
+              <a:sym typeface="Fira Code"/>
+            </a:endParaRPr>
+          </a:p>
+          <a:p>
+            <a:pPr marL="139700" lvl="0">
+              <a:buClr>
+                <a:srgbClr val="72D9F0"/>
+              </a:buClr>
+              <a:buSzPts val="1400"/>
+              <a:defRPr/>
+            </a:pPr>
+            <a:r>
+              <a:rPr lang="en-US" sz="900" dirty="0">
+                <a:solidFill>
+                  <a:schemeClr val="accent3"/>
+                </a:solidFill>
+                <a:latin typeface="Fira Code" panose="020B0809050000020004" pitchFamily="49" charset="0"/>
+                <a:ea typeface="Fira Code" panose="020B0809050000020004" pitchFamily="49" charset="0"/>
+                <a:cs typeface="Fira Code" panose="020B0809050000020004" pitchFamily="49" charset="0"/>
+                <a:sym typeface="Fira Code"/>
+              </a:rPr>
+              <a:t>    // Populate the array</a:t>
+            </a:r>
+          </a:p>
+          <a:p>
+            <a:pPr marL="139700" lvl="0">
+              <a:buClr>
+                <a:srgbClr val="72D9F0"/>
+              </a:buClr>
+              <a:buSzPts val="1400"/>
+              <a:defRPr/>
+            </a:pPr>
+            <a:r>
+              <a:rPr lang="en-US" sz="900" dirty="0">
+                <a:solidFill>
+                  <a:schemeClr val="accent1"/>
+                </a:solidFill>
+                <a:latin typeface="Fira Code" panose="020B0809050000020004" pitchFamily="49" charset="0"/>
+                <a:ea typeface="Fira Code" panose="020B0809050000020004" pitchFamily="49" charset="0"/>
+                <a:cs typeface="Fira Code" panose="020B0809050000020004" pitchFamily="49" charset="0"/>
+                <a:sym typeface="Fira Code"/>
+              </a:rPr>
+              <a:t>    for (int </a:t>
+            </a:r>
+            <a:r>
+              <a:rPr lang="en-US" sz="900" dirty="0" err="1">
+                <a:solidFill>
+                  <a:schemeClr val="accent1"/>
+                </a:solidFill>
+                <a:latin typeface="Fira Code" panose="020B0809050000020004" pitchFamily="49" charset="0"/>
+                <a:ea typeface="Fira Code" panose="020B0809050000020004" pitchFamily="49" charset="0"/>
+                <a:cs typeface="Fira Code" panose="020B0809050000020004" pitchFamily="49" charset="0"/>
+                <a:sym typeface="Fira Code"/>
+              </a:rPr>
+              <a:t>i</a:t>
+            </a:r>
+            <a:r>
+              <a:rPr lang="en-US" sz="900" dirty="0">
+                <a:solidFill>
+                  <a:schemeClr val="accent1"/>
+                </a:solidFill>
+                <a:latin typeface="Fira Code" panose="020B0809050000020004" pitchFamily="49" charset="0"/>
+                <a:ea typeface="Fira Code" panose="020B0809050000020004" pitchFamily="49" charset="0"/>
+                <a:cs typeface="Fira Code" panose="020B0809050000020004" pitchFamily="49" charset="0"/>
+                <a:sym typeface="Fira Code"/>
+              </a:rPr>
+              <a:t> = 0; </a:t>
+            </a:r>
+            <a:r>
+              <a:rPr lang="en-US" sz="900" dirty="0" err="1">
+                <a:solidFill>
+                  <a:schemeClr val="accent1"/>
+                </a:solidFill>
+                <a:latin typeface="Fira Code" panose="020B0809050000020004" pitchFamily="49" charset="0"/>
+                <a:ea typeface="Fira Code" panose="020B0809050000020004" pitchFamily="49" charset="0"/>
+                <a:cs typeface="Fira Code" panose="020B0809050000020004" pitchFamily="49" charset="0"/>
+                <a:sym typeface="Fira Code"/>
+              </a:rPr>
+              <a:t>i</a:t>
+            </a:r>
+            <a:r>
+              <a:rPr lang="en-US" sz="900" dirty="0">
+                <a:solidFill>
+                  <a:schemeClr val="accent1"/>
+                </a:solidFill>
+                <a:latin typeface="Fira Code" panose="020B0809050000020004" pitchFamily="49" charset="0"/>
+                <a:ea typeface="Fira Code" panose="020B0809050000020004" pitchFamily="49" charset="0"/>
+                <a:cs typeface="Fira Code" panose="020B0809050000020004" pitchFamily="49" charset="0"/>
+                <a:sym typeface="Fira Code"/>
+              </a:rPr>
+              <a:t> &lt; 5; </a:t>
+            </a:r>
+            <a:r>
+              <a:rPr lang="en-US" sz="900" dirty="0" err="1">
+                <a:solidFill>
+                  <a:schemeClr val="accent1"/>
+                </a:solidFill>
+                <a:latin typeface="Fira Code" panose="020B0809050000020004" pitchFamily="49" charset="0"/>
+                <a:ea typeface="Fira Code" panose="020B0809050000020004" pitchFamily="49" charset="0"/>
+                <a:cs typeface="Fira Code" panose="020B0809050000020004" pitchFamily="49" charset="0"/>
+                <a:sym typeface="Fira Code"/>
+              </a:rPr>
+              <a:t>i</a:t>
+            </a:r>
+            <a:r>
+              <a:rPr lang="en-US" sz="900" dirty="0">
+                <a:solidFill>
+                  <a:schemeClr val="accent1"/>
+                </a:solidFill>
+                <a:latin typeface="Fira Code" panose="020B0809050000020004" pitchFamily="49" charset="0"/>
+                <a:ea typeface="Fira Code" panose="020B0809050000020004" pitchFamily="49" charset="0"/>
+                <a:cs typeface="Fira Code" panose="020B0809050000020004" pitchFamily="49" charset="0"/>
+                <a:sym typeface="Fira Code"/>
+              </a:rPr>
+              <a:t>++) {</a:t>
+            </a:r>
+          </a:p>
+          <a:p>
+            <a:pPr marL="139700" lvl="0">
+              <a:buClr>
+                <a:srgbClr val="72D9F0"/>
+              </a:buClr>
+              <a:buSzPts val="1400"/>
+              <a:defRPr/>
+            </a:pPr>
+            <a:r>
+              <a:rPr lang="en-US" sz="900" dirty="0">
+                <a:solidFill>
+                  <a:schemeClr val="accent1"/>
+                </a:solidFill>
+                <a:latin typeface="Fira Code" panose="020B0809050000020004" pitchFamily="49" charset="0"/>
+                <a:ea typeface="Fira Code" panose="020B0809050000020004" pitchFamily="49" charset="0"/>
+                <a:cs typeface="Fira Code" panose="020B0809050000020004" pitchFamily="49" charset="0"/>
+                <a:sym typeface="Fira Code"/>
+              </a:rPr>
+              <a:t>        </a:t>
+            </a:r>
+            <a:r>
+              <a:rPr lang="en-US" sz="900" dirty="0" err="1">
+                <a:solidFill>
+                  <a:schemeClr val="accent1"/>
+                </a:solidFill>
+                <a:latin typeface="Fira Code" panose="020B0809050000020004" pitchFamily="49" charset="0"/>
+                <a:ea typeface="Fira Code" panose="020B0809050000020004" pitchFamily="49" charset="0"/>
+                <a:cs typeface="Fira Code" panose="020B0809050000020004" pitchFamily="49" charset="0"/>
+                <a:sym typeface="Fira Code"/>
+              </a:rPr>
+              <a:t>ptr</a:t>
+            </a:r>
+            <a:r>
+              <a:rPr lang="en-US" sz="900" dirty="0">
+                <a:solidFill>
+                  <a:schemeClr val="accent1"/>
+                </a:solidFill>
+                <a:latin typeface="Fira Code" panose="020B0809050000020004" pitchFamily="49" charset="0"/>
+                <a:ea typeface="Fira Code" panose="020B0809050000020004" pitchFamily="49" charset="0"/>
+                <a:cs typeface="Fira Code" panose="020B0809050000020004" pitchFamily="49" charset="0"/>
+                <a:sym typeface="Fira Code"/>
+              </a:rPr>
+              <a:t>[</a:t>
+            </a:r>
+            <a:r>
+              <a:rPr lang="en-US" sz="900" dirty="0" err="1">
+                <a:solidFill>
+                  <a:schemeClr val="accent1"/>
+                </a:solidFill>
+                <a:latin typeface="Fira Code" panose="020B0809050000020004" pitchFamily="49" charset="0"/>
+                <a:ea typeface="Fira Code" panose="020B0809050000020004" pitchFamily="49" charset="0"/>
+                <a:cs typeface="Fira Code" panose="020B0809050000020004" pitchFamily="49" charset="0"/>
+                <a:sym typeface="Fira Code"/>
+              </a:rPr>
+              <a:t>i</a:t>
+            </a:r>
+            <a:r>
+              <a:rPr lang="en-US" sz="900" dirty="0">
+                <a:solidFill>
+                  <a:schemeClr val="accent1"/>
+                </a:solidFill>
+                <a:latin typeface="Fira Code" panose="020B0809050000020004" pitchFamily="49" charset="0"/>
+                <a:ea typeface="Fira Code" panose="020B0809050000020004" pitchFamily="49" charset="0"/>
+                <a:cs typeface="Fira Code" panose="020B0809050000020004" pitchFamily="49" charset="0"/>
+                <a:sym typeface="Fira Code"/>
+              </a:rPr>
+              <a:t>] = </a:t>
+            </a:r>
+            <a:r>
+              <a:rPr lang="en-US" sz="900" dirty="0" err="1">
+                <a:solidFill>
+                  <a:schemeClr val="accent1"/>
+                </a:solidFill>
+                <a:latin typeface="Fira Code" panose="020B0809050000020004" pitchFamily="49" charset="0"/>
+                <a:ea typeface="Fira Code" panose="020B0809050000020004" pitchFamily="49" charset="0"/>
+                <a:cs typeface="Fira Code" panose="020B0809050000020004" pitchFamily="49" charset="0"/>
+                <a:sym typeface="Fira Code"/>
+              </a:rPr>
+              <a:t>i</a:t>
+            </a:r>
+            <a:r>
+              <a:rPr lang="en-US" sz="900" dirty="0">
+                <a:solidFill>
+                  <a:schemeClr val="accent1"/>
+                </a:solidFill>
+                <a:latin typeface="Fira Code" panose="020B0809050000020004" pitchFamily="49" charset="0"/>
+                <a:ea typeface="Fira Code" panose="020B0809050000020004" pitchFamily="49" charset="0"/>
+                <a:cs typeface="Fira Code" panose="020B0809050000020004" pitchFamily="49" charset="0"/>
+                <a:sym typeface="Fira Code"/>
+              </a:rPr>
+              <a:t> + 1;</a:t>
+            </a:r>
+          </a:p>
+          <a:p>
+            <a:pPr marL="139700" lvl="0">
+              <a:buClr>
+                <a:srgbClr val="72D9F0"/>
+              </a:buClr>
+              <a:buSzPts val="1400"/>
+              <a:defRPr/>
+            </a:pPr>
+            <a:r>
+              <a:rPr lang="en-US" sz="900" dirty="0">
+                <a:solidFill>
+                  <a:schemeClr val="accent1"/>
+                </a:solidFill>
+                <a:latin typeface="Fira Code" panose="020B0809050000020004" pitchFamily="49" charset="0"/>
+                <a:ea typeface="Fira Code" panose="020B0809050000020004" pitchFamily="49" charset="0"/>
+                <a:cs typeface="Fira Code" panose="020B0809050000020004" pitchFamily="49" charset="0"/>
+                <a:sym typeface="Fira Code"/>
+              </a:rPr>
+              <a:t>    }</a:t>
+            </a:r>
+          </a:p>
+          <a:p>
+            <a:pPr marL="139700" lvl="0">
+              <a:buClr>
+                <a:srgbClr val="72D9F0"/>
+              </a:buClr>
+              <a:buSzPts val="1400"/>
+              <a:defRPr/>
+            </a:pPr>
+            <a:endParaRPr lang="en-US" sz="900" dirty="0">
+              <a:solidFill>
+                <a:schemeClr val="accent1"/>
+              </a:solidFill>
+              <a:latin typeface="Fira Code" panose="020B0809050000020004" pitchFamily="49" charset="0"/>
+              <a:ea typeface="Fira Code" panose="020B0809050000020004" pitchFamily="49" charset="0"/>
+              <a:cs typeface="Fira Code" panose="020B0809050000020004" pitchFamily="49" charset="0"/>
+              <a:sym typeface="Fira Code"/>
+            </a:endParaRPr>
+          </a:p>
+          <a:p>
+            <a:pPr marL="139700" lvl="0">
+              <a:buClr>
+                <a:srgbClr val="72D9F0"/>
+              </a:buClr>
+              <a:buSzPts val="1400"/>
+              <a:defRPr/>
+            </a:pPr>
+            <a:r>
+              <a:rPr lang="en-US" sz="900" dirty="0">
+                <a:solidFill>
+                  <a:schemeClr val="accent3"/>
+                </a:solidFill>
+                <a:latin typeface="Fira Code" panose="020B0809050000020004" pitchFamily="49" charset="0"/>
+                <a:ea typeface="Fira Code" panose="020B0809050000020004" pitchFamily="49" charset="0"/>
+                <a:cs typeface="Fira Code" panose="020B0809050000020004" pitchFamily="49" charset="0"/>
+                <a:sym typeface="Fira Code"/>
+              </a:rPr>
+              <a:t>    // Print the array</a:t>
+            </a:r>
+          </a:p>
+          <a:p>
+            <a:pPr marL="139700" lvl="0">
+              <a:buClr>
+                <a:srgbClr val="72D9F0"/>
+              </a:buClr>
+              <a:buSzPts val="1400"/>
+              <a:defRPr/>
+            </a:pPr>
+            <a:r>
+              <a:rPr lang="en-US" sz="900" dirty="0">
+                <a:solidFill>
+                  <a:schemeClr val="accent1"/>
+                </a:solidFill>
+                <a:latin typeface="Fira Code" panose="020B0809050000020004" pitchFamily="49" charset="0"/>
+                <a:ea typeface="Fira Code" panose="020B0809050000020004" pitchFamily="49" charset="0"/>
+                <a:cs typeface="Fira Code" panose="020B0809050000020004" pitchFamily="49" charset="0"/>
+                <a:sym typeface="Fira Code"/>
+              </a:rPr>
+              <a:t>    for (int </a:t>
+            </a:r>
+            <a:r>
+              <a:rPr lang="en-US" sz="900" dirty="0" err="1">
+                <a:solidFill>
+                  <a:schemeClr val="accent1"/>
+                </a:solidFill>
+                <a:latin typeface="Fira Code" panose="020B0809050000020004" pitchFamily="49" charset="0"/>
+                <a:ea typeface="Fira Code" panose="020B0809050000020004" pitchFamily="49" charset="0"/>
+                <a:cs typeface="Fira Code" panose="020B0809050000020004" pitchFamily="49" charset="0"/>
+                <a:sym typeface="Fira Code"/>
+              </a:rPr>
+              <a:t>i</a:t>
+            </a:r>
+            <a:r>
+              <a:rPr lang="en-US" sz="900" dirty="0">
+                <a:solidFill>
+                  <a:schemeClr val="accent1"/>
+                </a:solidFill>
+                <a:latin typeface="Fira Code" panose="020B0809050000020004" pitchFamily="49" charset="0"/>
+                <a:ea typeface="Fira Code" panose="020B0809050000020004" pitchFamily="49" charset="0"/>
+                <a:cs typeface="Fira Code" panose="020B0809050000020004" pitchFamily="49" charset="0"/>
+                <a:sym typeface="Fira Code"/>
+              </a:rPr>
+              <a:t> = 0; </a:t>
+            </a:r>
+            <a:r>
+              <a:rPr lang="en-US" sz="900" dirty="0" err="1">
+                <a:solidFill>
+                  <a:schemeClr val="accent1"/>
+                </a:solidFill>
+                <a:latin typeface="Fira Code" panose="020B0809050000020004" pitchFamily="49" charset="0"/>
+                <a:ea typeface="Fira Code" panose="020B0809050000020004" pitchFamily="49" charset="0"/>
+                <a:cs typeface="Fira Code" panose="020B0809050000020004" pitchFamily="49" charset="0"/>
+                <a:sym typeface="Fira Code"/>
+              </a:rPr>
+              <a:t>i</a:t>
+            </a:r>
+            <a:r>
+              <a:rPr lang="en-US" sz="900" dirty="0">
+                <a:solidFill>
+                  <a:schemeClr val="accent1"/>
+                </a:solidFill>
+                <a:latin typeface="Fira Code" panose="020B0809050000020004" pitchFamily="49" charset="0"/>
+                <a:ea typeface="Fira Code" panose="020B0809050000020004" pitchFamily="49" charset="0"/>
+                <a:cs typeface="Fira Code" panose="020B0809050000020004" pitchFamily="49" charset="0"/>
+                <a:sym typeface="Fira Code"/>
+              </a:rPr>
+              <a:t> &lt; 5; </a:t>
+            </a:r>
+            <a:r>
+              <a:rPr lang="en-US" sz="900" dirty="0" err="1">
+                <a:solidFill>
+                  <a:schemeClr val="accent1"/>
+                </a:solidFill>
+                <a:latin typeface="Fira Code" panose="020B0809050000020004" pitchFamily="49" charset="0"/>
+                <a:ea typeface="Fira Code" panose="020B0809050000020004" pitchFamily="49" charset="0"/>
+                <a:cs typeface="Fira Code" panose="020B0809050000020004" pitchFamily="49" charset="0"/>
+                <a:sym typeface="Fira Code"/>
+              </a:rPr>
+              <a:t>i</a:t>
+            </a:r>
+            <a:r>
+              <a:rPr lang="en-US" sz="900" dirty="0">
+                <a:solidFill>
+                  <a:schemeClr val="accent1"/>
+                </a:solidFill>
+                <a:latin typeface="Fira Code" panose="020B0809050000020004" pitchFamily="49" charset="0"/>
+                <a:ea typeface="Fira Code" panose="020B0809050000020004" pitchFamily="49" charset="0"/>
+                <a:cs typeface="Fira Code" panose="020B0809050000020004" pitchFamily="49" charset="0"/>
+                <a:sym typeface="Fira Code"/>
+              </a:rPr>
+              <a:t>++) {</a:t>
+            </a:r>
+          </a:p>
+          <a:p>
+            <a:pPr marL="139700" lvl="0">
+              <a:buClr>
+                <a:srgbClr val="72D9F0"/>
+              </a:buClr>
+              <a:buSzPts val="1400"/>
+              <a:defRPr/>
+            </a:pPr>
+            <a:r>
+              <a:rPr lang="en-US" sz="900" dirty="0">
+                <a:solidFill>
+                  <a:schemeClr val="accent1"/>
+                </a:solidFill>
+                <a:latin typeface="Fira Code" panose="020B0809050000020004" pitchFamily="49" charset="0"/>
+                <a:ea typeface="Fira Code" panose="020B0809050000020004" pitchFamily="49" charset="0"/>
+                <a:cs typeface="Fira Code" panose="020B0809050000020004" pitchFamily="49" charset="0"/>
+                <a:sym typeface="Fira Code"/>
+              </a:rPr>
+              <a:t>        </a:t>
+            </a:r>
+            <a:r>
+              <a:rPr lang="en-US" sz="900" dirty="0" err="1">
+                <a:solidFill>
+                  <a:schemeClr val="accent1"/>
+                </a:solidFill>
+                <a:latin typeface="Fira Code" panose="020B0809050000020004" pitchFamily="49" charset="0"/>
+                <a:ea typeface="Fira Code" panose="020B0809050000020004" pitchFamily="49" charset="0"/>
+                <a:cs typeface="Fira Code" panose="020B0809050000020004" pitchFamily="49" charset="0"/>
+                <a:sym typeface="Fira Code"/>
+              </a:rPr>
+              <a:t>printf</a:t>
+            </a:r>
+            <a:r>
+              <a:rPr lang="en-US" sz="900" dirty="0">
+                <a:solidFill>
+                  <a:schemeClr val="accent1"/>
+                </a:solidFill>
+                <a:latin typeface="Fira Code" panose="020B0809050000020004" pitchFamily="49" charset="0"/>
+                <a:ea typeface="Fira Code" panose="020B0809050000020004" pitchFamily="49" charset="0"/>
+                <a:cs typeface="Fira Code" panose="020B0809050000020004" pitchFamily="49" charset="0"/>
+                <a:sym typeface="Fira Code"/>
+              </a:rPr>
+              <a:t>("%d ", </a:t>
+            </a:r>
+            <a:r>
+              <a:rPr lang="en-US" sz="900" dirty="0" err="1">
+                <a:solidFill>
+                  <a:schemeClr val="accent1"/>
+                </a:solidFill>
+                <a:latin typeface="Fira Code" panose="020B0809050000020004" pitchFamily="49" charset="0"/>
+                <a:ea typeface="Fira Code" panose="020B0809050000020004" pitchFamily="49" charset="0"/>
+                <a:cs typeface="Fira Code" panose="020B0809050000020004" pitchFamily="49" charset="0"/>
+                <a:sym typeface="Fira Code"/>
+              </a:rPr>
+              <a:t>ptr</a:t>
+            </a:r>
+            <a:r>
+              <a:rPr lang="en-US" sz="900" dirty="0">
+                <a:solidFill>
+                  <a:schemeClr val="accent1"/>
+                </a:solidFill>
+                <a:latin typeface="Fira Code" panose="020B0809050000020004" pitchFamily="49" charset="0"/>
+                <a:ea typeface="Fira Code" panose="020B0809050000020004" pitchFamily="49" charset="0"/>
+                <a:cs typeface="Fira Code" panose="020B0809050000020004" pitchFamily="49" charset="0"/>
+                <a:sym typeface="Fira Code"/>
+              </a:rPr>
+              <a:t>[</a:t>
+            </a:r>
+            <a:r>
+              <a:rPr lang="en-US" sz="900" dirty="0" err="1">
+                <a:solidFill>
+                  <a:schemeClr val="accent1"/>
+                </a:solidFill>
+                <a:latin typeface="Fira Code" panose="020B0809050000020004" pitchFamily="49" charset="0"/>
+                <a:ea typeface="Fira Code" panose="020B0809050000020004" pitchFamily="49" charset="0"/>
+                <a:cs typeface="Fira Code" panose="020B0809050000020004" pitchFamily="49" charset="0"/>
+                <a:sym typeface="Fira Code"/>
+              </a:rPr>
+              <a:t>i</a:t>
+            </a:r>
+            <a:r>
+              <a:rPr lang="en-US" sz="900" dirty="0">
+                <a:solidFill>
+                  <a:schemeClr val="accent1"/>
+                </a:solidFill>
+                <a:latin typeface="Fira Code" panose="020B0809050000020004" pitchFamily="49" charset="0"/>
+                <a:ea typeface="Fira Code" panose="020B0809050000020004" pitchFamily="49" charset="0"/>
+                <a:cs typeface="Fira Code" panose="020B0809050000020004" pitchFamily="49" charset="0"/>
+                <a:sym typeface="Fira Code"/>
+              </a:rPr>
+              <a:t>]);</a:t>
+            </a:r>
+          </a:p>
+          <a:p>
+            <a:pPr marL="139700" lvl="0">
+              <a:buClr>
+                <a:srgbClr val="72D9F0"/>
+              </a:buClr>
+              <a:buSzPts val="1400"/>
+              <a:defRPr/>
+            </a:pPr>
+            <a:r>
+              <a:rPr lang="en-US" sz="900" dirty="0">
+                <a:solidFill>
+                  <a:schemeClr val="accent1"/>
+                </a:solidFill>
+                <a:latin typeface="Fira Code" panose="020B0809050000020004" pitchFamily="49" charset="0"/>
+                <a:ea typeface="Fira Code" panose="020B0809050000020004" pitchFamily="49" charset="0"/>
+                <a:cs typeface="Fira Code" panose="020B0809050000020004" pitchFamily="49" charset="0"/>
+                <a:sym typeface="Fira Code"/>
+              </a:rPr>
+              <a:t>    }</a:t>
+            </a:r>
+          </a:p>
+          <a:p>
+            <a:pPr marL="139700" lvl="0">
+              <a:buClr>
+                <a:srgbClr val="72D9F0"/>
+              </a:buClr>
+              <a:buSzPts val="1400"/>
+              <a:defRPr/>
+            </a:pPr>
+            <a:endParaRPr lang="en-US" sz="900" dirty="0">
+              <a:solidFill>
+                <a:schemeClr val="accent1"/>
+              </a:solidFill>
+              <a:latin typeface="Fira Code" panose="020B0809050000020004" pitchFamily="49" charset="0"/>
+              <a:ea typeface="Fira Code" panose="020B0809050000020004" pitchFamily="49" charset="0"/>
+              <a:cs typeface="Fira Code" panose="020B0809050000020004" pitchFamily="49" charset="0"/>
+              <a:sym typeface="Fira Code"/>
+            </a:endParaRPr>
+          </a:p>
+          <a:p>
+            <a:pPr marL="139700" lvl="0">
+              <a:buClr>
+                <a:srgbClr val="72D9F0"/>
+              </a:buClr>
+              <a:buSzPts val="1400"/>
+              <a:defRPr/>
+            </a:pPr>
+            <a:r>
+              <a:rPr lang="en-US" sz="900" dirty="0">
+                <a:solidFill>
+                  <a:schemeClr val="accent1"/>
+                </a:solidFill>
+                <a:latin typeface="Fira Code" panose="020B0809050000020004" pitchFamily="49" charset="0"/>
+                <a:ea typeface="Fira Code" panose="020B0809050000020004" pitchFamily="49" charset="0"/>
+                <a:cs typeface="Fira Code" panose="020B0809050000020004" pitchFamily="49" charset="0"/>
+                <a:sym typeface="Fira Code"/>
+              </a:rPr>
+              <a:t>    </a:t>
+            </a:r>
+            <a:r>
+              <a:rPr lang="en-US" sz="900" dirty="0">
+                <a:solidFill>
+                  <a:schemeClr val="tx2"/>
+                </a:solidFill>
+                <a:latin typeface="Fira Code" panose="020B0809050000020004" pitchFamily="49" charset="0"/>
+                <a:ea typeface="Fira Code" panose="020B0809050000020004" pitchFamily="49" charset="0"/>
+                <a:cs typeface="Fira Code" panose="020B0809050000020004" pitchFamily="49" charset="0"/>
+                <a:sym typeface="Fira Code"/>
+              </a:rPr>
+              <a:t>return</a:t>
+            </a:r>
+            <a:r>
+              <a:rPr lang="en-US" sz="900" dirty="0">
+                <a:solidFill>
+                  <a:schemeClr val="accent1"/>
+                </a:solidFill>
+                <a:latin typeface="Fira Code" panose="020B0809050000020004" pitchFamily="49" charset="0"/>
+                <a:ea typeface="Fira Code" panose="020B0809050000020004" pitchFamily="49" charset="0"/>
+                <a:cs typeface="Fira Code" panose="020B0809050000020004" pitchFamily="49" charset="0"/>
+                <a:sym typeface="Fira Code"/>
+              </a:rPr>
+              <a:t> 0;</a:t>
+            </a:r>
+          </a:p>
+          <a:p>
+            <a:pPr marL="139700" lvl="0">
+              <a:buClr>
+                <a:srgbClr val="72D9F0"/>
+              </a:buClr>
+              <a:buSzPts val="1400"/>
+              <a:defRPr/>
+            </a:pPr>
+            <a:r>
+              <a:rPr lang="en-US" sz="900" dirty="0">
+                <a:solidFill>
+                  <a:schemeClr val="accent1"/>
+                </a:solidFill>
+                <a:latin typeface="Fira Code" panose="020B0809050000020004" pitchFamily="49" charset="0"/>
+                <a:ea typeface="Fira Code" panose="020B0809050000020004" pitchFamily="49" charset="0"/>
+                <a:cs typeface="Fira Code" panose="020B0809050000020004" pitchFamily="49" charset="0"/>
+                <a:sym typeface="Fira Code"/>
+              </a:rPr>
+              <a:t>}</a:t>
+            </a:r>
+            <a:endParaRPr kumimoji="0" lang="en-US" sz="900" b="0" i="0" u="none" strike="noStrike" kern="0" cap="none" spc="0" normalizeH="0" baseline="0" noProof="0" dirty="0">
+              <a:ln>
+                <a:noFill/>
+              </a:ln>
+              <a:solidFill>
+                <a:schemeClr val="accent1"/>
+              </a:solidFill>
+              <a:effectLst/>
+              <a:uLnTx/>
+              <a:uFillTx/>
+              <a:latin typeface="Fira Code" panose="020B0809050000020004" pitchFamily="49" charset="0"/>
+              <a:ea typeface="Fira Code" panose="020B0809050000020004" pitchFamily="49" charset="0"/>
+              <a:cs typeface="Fira Code" panose="020B0809050000020004" pitchFamily="49" charset="0"/>
               <a:sym typeface="Fira Code"/>
             </a:endParaRPr>
           </a:p>
@@ -23537,12 +20511,12 @@
               <a:buNone/>
             </a:pPr>
             <a:r>
-              <a:rPr lang="en" sz="1100">
+              <a:rPr lang="en" sz="1100" dirty="0">
                 <a:solidFill>
                   <a:schemeClr val="accent3"/>
                 </a:solidFill>
               </a:rPr>
-              <a:t>1</a:t>
+              <a:t>4</a:t>
             </a:r>
             <a:endParaRPr lang="en" dirty="0">
               <a:solidFill>
@@ -24013,36 +20987,6 @@
           </a:p>
         </p:txBody>
       </p:sp>
-      <p:pic>
-        <p:nvPicPr>
-          <p:cNvPr id="11" name="Picture 10">
-            <a:extLst>
-              <a:ext uri="{FF2B5EF4-FFF2-40B4-BE49-F238E27FC236}">
-                <a16:creationId xmlns:a16="http://schemas.microsoft.com/office/drawing/2014/main" id="{1CEC998B-E856-28E6-1BAB-2F9E55266BD8}"/>
-              </a:ext>
-            </a:extLst>
-          </p:cNvPr>
-          <p:cNvPicPr>
-            <a:picLocks noChangeAspect="1"/>
-          </p:cNvPicPr>
-          <p:nvPr/>
-        </p:nvPicPr>
-        <p:blipFill>
-          <a:blip r:embed="rId3"/>
-          <a:stretch>
-            <a:fillRect/>
-          </a:stretch>
-        </p:blipFill>
-        <p:spPr>
-          <a:xfrm>
-            <a:off x="5443076" y="1135255"/>
-            <a:ext cx="3556113" cy="1895789"/>
-          </a:xfrm>
-          <a:prstGeom prst="rect">
-            <a:avLst/>
-          </a:prstGeom>
-        </p:spPr>
-      </p:pic>
       <p:sp>
         <p:nvSpPr>
           <p:cNvPr id="16" name="TextBox 15">
@@ -24180,6 +21124,403 @@
               <a:latin typeface="Fira Code"/>
               <a:ea typeface="Fira Code"/>
               <a:cs typeface="B Nazanin" panose="00000400000000000000" pitchFamily="2" charset="-78"/>
+              <a:sym typeface="Fira Code"/>
+            </a:endParaRPr>
+          </a:p>
+        </p:txBody>
+      </p:sp>
+      <p:sp>
+        <p:nvSpPr>
+          <p:cNvPr id="5" name="Rectangle: Rounded Corners 4">
+            <a:extLst>
+              <a:ext uri="{FF2B5EF4-FFF2-40B4-BE49-F238E27FC236}">
+                <a16:creationId xmlns:a16="http://schemas.microsoft.com/office/drawing/2014/main" id="{D53AB3A7-4FC8-D650-50AA-F9A521E4A659}"/>
+              </a:ext>
+            </a:extLst>
+          </p:cNvPr>
+          <p:cNvSpPr/>
+          <p:nvPr/>
+        </p:nvSpPr>
+        <p:spPr>
+          <a:xfrm>
+            <a:off x="5365726" y="1213224"/>
+            <a:ext cx="3502844" cy="1813169"/>
+          </a:xfrm>
+          <a:prstGeom prst="roundRect">
+            <a:avLst/>
+          </a:prstGeom>
+          <a:solidFill>
+            <a:schemeClr val="accent5"/>
+          </a:solidFill>
+          <a:ln>
+            <a:noFill/>
+          </a:ln>
+        </p:spPr>
+        <p:style>
+          <a:lnRef idx="0">
+            <a:scrgbClr r="0" g="0" b="0"/>
+          </a:lnRef>
+          <a:fillRef idx="0">
+            <a:scrgbClr r="0" g="0" b="0"/>
+          </a:fillRef>
+          <a:effectRef idx="0">
+            <a:scrgbClr r="0" g="0" b="0"/>
+          </a:effectRef>
+          <a:fontRef idx="minor">
+            <a:schemeClr val="lt1"/>
+          </a:fontRef>
+        </p:style>
+        <p:txBody>
+          <a:bodyPr rtlCol="0" anchor="ctr"/>
+          <a:lstStyle/>
+          <a:p>
+            <a:pPr marL="139700" lvl="0">
+              <a:buClr>
+                <a:srgbClr val="72D9F0"/>
+              </a:buClr>
+              <a:buSzPts val="1400"/>
+              <a:defRPr/>
+            </a:pPr>
+            <a:r>
+              <a:rPr lang="en-US" sz="1050" dirty="0">
+                <a:solidFill>
+                  <a:schemeClr val="tx2"/>
+                </a:solidFill>
+                <a:latin typeface="Fira Code" panose="020B0809050000020004" pitchFamily="49" charset="0"/>
+                <a:ea typeface="Fira Code" panose="020B0809050000020004" pitchFamily="49" charset="0"/>
+                <a:cs typeface="Fira Code" panose="020B0809050000020004" pitchFamily="49" charset="0"/>
+                <a:sym typeface="Fira Code"/>
+              </a:rPr>
+              <a:t>#include </a:t>
+            </a:r>
+            <a:r>
+              <a:rPr lang="en-US" sz="1050" dirty="0">
+                <a:solidFill>
+                  <a:schemeClr val="accent1"/>
+                </a:solidFill>
+                <a:latin typeface="Fira Code" panose="020B0809050000020004" pitchFamily="49" charset="0"/>
+                <a:ea typeface="Fira Code" panose="020B0809050000020004" pitchFamily="49" charset="0"/>
+                <a:cs typeface="Fira Code" panose="020B0809050000020004" pitchFamily="49" charset="0"/>
+                <a:sym typeface="Fira Code"/>
+              </a:rPr>
+              <a:t>&lt;</a:t>
+            </a:r>
+            <a:r>
+              <a:rPr lang="en-US" sz="1050" dirty="0" err="1">
+                <a:solidFill>
+                  <a:schemeClr val="accent1"/>
+                </a:solidFill>
+                <a:latin typeface="Fira Code" panose="020B0809050000020004" pitchFamily="49" charset="0"/>
+                <a:ea typeface="Fira Code" panose="020B0809050000020004" pitchFamily="49" charset="0"/>
+                <a:cs typeface="Fira Code" panose="020B0809050000020004" pitchFamily="49" charset="0"/>
+                <a:sym typeface="Fira Code"/>
+              </a:rPr>
+              <a:t>stdio.h</a:t>
+            </a:r>
+            <a:r>
+              <a:rPr lang="en-US" sz="1050" dirty="0">
+                <a:solidFill>
+                  <a:schemeClr val="accent1"/>
+                </a:solidFill>
+                <a:latin typeface="Fira Code" panose="020B0809050000020004" pitchFamily="49" charset="0"/>
+                <a:ea typeface="Fira Code" panose="020B0809050000020004" pitchFamily="49" charset="0"/>
+                <a:cs typeface="Fira Code" panose="020B0809050000020004" pitchFamily="49" charset="0"/>
+                <a:sym typeface="Fira Code"/>
+              </a:rPr>
+              <a:t>&gt;</a:t>
+            </a:r>
+          </a:p>
+          <a:p>
+            <a:pPr marL="139700" lvl="0">
+              <a:buClr>
+                <a:srgbClr val="72D9F0"/>
+              </a:buClr>
+              <a:buSzPts val="1400"/>
+              <a:defRPr/>
+            </a:pPr>
+            <a:r>
+              <a:rPr lang="en-US" sz="1050" dirty="0">
+                <a:solidFill>
+                  <a:schemeClr val="tx2"/>
+                </a:solidFill>
+                <a:latin typeface="Fira Code" panose="020B0809050000020004" pitchFamily="49" charset="0"/>
+                <a:ea typeface="Fira Code" panose="020B0809050000020004" pitchFamily="49" charset="0"/>
+                <a:cs typeface="Fira Code" panose="020B0809050000020004" pitchFamily="49" charset="0"/>
+                <a:sym typeface="Fira Code"/>
+              </a:rPr>
+              <a:t>#include </a:t>
+            </a:r>
+            <a:r>
+              <a:rPr lang="en-US" sz="1050" dirty="0">
+                <a:solidFill>
+                  <a:schemeClr val="accent1"/>
+                </a:solidFill>
+                <a:latin typeface="Fira Code" panose="020B0809050000020004" pitchFamily="49" charset="0"/>
+                <a:ea typeface="Fira Code" panose="020B0809050000020004" pitchFamily="49" charset="0"/>
+                <a:cs typeface="Fira Code" panose="020B0809050000020004" pitchFamily="49" charset="0"/>
+                <a:sym typeface="Fira Code"/>
+              </a:rPr>
+              <a:t>&lt;</a:t>
+            </a:r>
+            <a:r>
+              <a:rPr lang="en-US" sz="1050" dirty="0" err="1">
+                <a:solidFill>
+                  <a:schemeClr val="accent1"/>
+                </a:solidFill>
+                <a:latin typeface="Fira Code" panose="020B0809050000020004" pitchFamily="49" charset="0"/>
+                <a:ea typeface="Fira Code" panose="020B0809050000020004" pitchFamily="49" charset="0"/>
+                <a:cs typeface="Fira Code" panose="020B0809050000020004" pitchFamily="49" charset="0"/>
+                <a:sym typeface="Fira Code"/>
+              </a:rPr>
+              <a:t>stdlib.h</a:t>
+            </a:r>
+            <a:r>
+              <a:rPr lang="en-US" sz="1050" dirty="0">
+                <a:solidFill>
+                  <a:schemeClr val="accent1"/>
+                </a:solidFill>
+                <a:latin typeface="Fira Code" panose="020B0809050000020004" pitchFamily="49" charset="0"/>
+                <a:ea typeface="Fira Code" panose="020B0809050000020004" pitchFamily="49" charset="0"/>
+                <a:cs typeface="Fira Code" panose="020B0809050000020004" pitchFamily="49" charset="0"/>
+                <a:sym typeface="Fira Code"/>
+              </a:rPr>
+              <a:t>&gt;</a:t>
+            </a:r>
+          </a:p>
+          <a:p>
+            <a:pPr marL="139700" lvl="0">
+              <a:buClr>
+                <a:srgbClr val="72D9F0"/>
+              </a:buClr>
+              <a:buSzPts val="1400"/>
+              <a:defRPr/>
+            </a:pPr>
+            <a:endParaRPr lang="en-US" sz="1050" dirty="0">
+              <a:solidFill>
+                <a:schemeClr val="tx2"/>
+              </a:solidFill>
+              <a:latin typeface="Fira Code" panose="020B0809050000020004" pitchFamily="49" charset="0"/>
+              <a:ea typeface="Fira Code" panose="020B0809050000020004" pitchFamily="49" charset="0"/>
+              <a:cs typeface="Fira Code" panose="020B0809050000020004" pitchFamily="49" charset="0"/>
+              <a:sym typeface="Fira Code"/>
+            </a:endParaRPr>
+          </a:p>
+          <a:p>
+            <a:pPr marL="139700" lvl="0">
+              <a:buClr>
+                <a:srgbClr val="72D9F0"/>
+              </a:buClr>
+              <a:buSzPts val="1400"/>
+              <a:defRPr/>
+            </a:pPr>
+            <a:r>
+              <a:rPr lang="en-US" sz="1050" dirty="0">
+                <a:solidFill>
+                  <a:schemeClr val="tx2"/>
+                </a:solidFill>
+                <a:latin typeface="Fira Code" panose="020B0809050000020004" pitchFamily="49" charset="0"/>
+                <a:ea typeface="Fira Code" panose="020B0809050000020004" pitchFamily="49" charset="0"/>
+                <a:cs typeface="Fira Code" panose="020B0809050000020004" pitchFamily="49" charset="0"/>
+                <a:sym typeface="Fira Code"/>
+              </a:rPr>
+              <a:t>int</a:t>
+            </a:r>
+            <a:r>
+              <a:rPr lang="en-US" sz="1050" dirty="0">
+                <a:solidFill>
+                  <a:schemeClr val="accent1"/>
+                </a:solidFill>
+                <a:latin typeface="Fira Code" panose="020B0809050000020004" pitchFamily="49" charset="0"/>
+                <a:ea typeface="Fira Code" panose="020B0809050000020004" pitchFamily="49" charset="0"/>
+                <a:cs typeface="Fira Code" panose="020B0809050000020004" pitchFamily="49" charset="0"/>
+                <a:sym typeface="Fira Code"/>
+              </a:rPr>
+              <a:t> main() {</a:t>
+            </a:r>
+          </a:p>
+          <a:p>
+            <a:pPr marL="139700" lvl="0">
+              <a:buClr>
+                <a:srgbClr val="72D9F0"/>
+              </a:buClr>
+              <a:buSzPts val="1400"/>
+              <a:defRPr/>
+            </a:pPr>
+            <a:r>
+              <a:rPr lang="en-US" sz="1050" dirty="0">
+                <a:solidFill>
+                  <a:schemeClr val="accent1"/>
+                </a:solidFill>
+                <a:latin typeface="Fira Code" panose="020B0809050000020004" pitchFamily="49" charset="0"/>
+                <a:ea typeface="Fira Code" panose="020B0809050000020004" pitchFamily="49" charset="0"/>
+                <a:cs typeface="Fira Code" panose="020B0809050000020004" pitchFamily="49" charset="0"/>
+                <a:sym typeface="Fira Code"/>
+              </a:rPr>
+              <a:t>    </a:t>
+            </a:r>
+            <a:r>
+              <a:rPr lang="en-US" sz="1050" dirty="0">
+                <a:solidFill>
+                  <a:schemeClr val="tx2"/>
+                </a:solidFill>
+                <a:latin typeface="Fira Code" panose="020B0809050000020004" pitchFamily="49" charset="0"/>
+                <a:ea typeface="Fira Code" panose="020B0809050000020004" pitchFamily="49" charset="0"/>
+                <a:cs typeface="Fira Code" panose="020B0809050000020004" pitchFamily="49" charset="0"/>
+                <a:sym typeface="Fira Code"/>
+              </a:rPr>
+              <a:t>int</a:t>
+            </a:r>
+            <a:r>
+              <a:rPr lang="en-US" sz="1050" dirty="0">
+                <a:solidFill>
+                  <a:schemeClr val="accent1"/>
+                </a:solidFill>
+                <a:latin typeface="Fira Code" panose="020B0809050000020004" pitchFamily="49" charset="0"/>
+                <a:ea typeface="Fira Code" panose="020B0809050000020004" pitchFamily="49" charset="0"/>
+                <a:cs typeface="Fira Code" panose="020B0809050000020004" pitchFamily="49" charset="0"/>
+                <a:sym typeface="Fira Code"/>
+              </a:rPr>
+              <a:t> rows = 3, cols = 4;</a:t>
+            </a:r>
+          </a:p>
+          <a:p>
+            <a:pPr marL="139700" lvl="0">
+              <a:buClr>
+                <a:srgbClr val="72D9F0"/>
+              </a:buClr>
+              <a:buSzPts val="1400"/>
+              <a:defRPr/>
+            </a:pPr>
+            <a:r>
+              <a:rPr lang="en-US" sz="1050" dirty="0">
+                <a:solidFill>
+                  <a:schemeClr val="accent1"/>
+                </a:solidFill>
+                <a:latin typeface="Fira Code" panose="020B0809050000020004" pitchFamily="49" charset="0"/>
+                <a:ea typeface="Fira Code" panose="020B0809050000020004" pitchFamily="49" charset="0"/>
+                <a:cs typeface="Fira Code" panose="020B0809050000020004" pitchFamily="49" charset="0"/>
+                <a:sym typeface="Fira Code"/>
+              </a:rPr>
+              <a:t>    </a:t>
+            </a:r>
+            <a:r>
+              <a:rPr lang="en-US" sz="1050" dirty="0">
+                <a:solidFill>
+                  <a:schemeClr val="tx2"/>
+                </a:solidFill>
+                <a:latin typeface="Fira Code" panose="020B0809050000020004" pitchFamily="49" charset="0"/>
+                <a:ea typeface="Fira Code" panose="020B0809050000020004" pitchFamily="49" charset="0"/>
+                <a:cs typeface="Fira Code" panose="020B0809050000020004" pitchFamily="49" charset="0"/>
+                <a:sym typeface="Fira Code"/>
+              </a:rPr>
+              <a:t>int</a:t>
+            </a:r>
+            <a:r>
+              <a:rPr lang="en-US" sz="1050" dirty="0">
+                <a:solidFill>
+                  <a:schemeClr val="accent1"/>
+                </a:solidFill>
+                <a:latin typeface="Fira Code" panose="020B0809050000020004" pitchFamily="49" charset="0"/>
+                <a:ea typeface="Fira Code" panose="020B0809050000020004" pitchFamily="49" charset="0"/>
+                <a:cs typeface="Fira Code" panose="020B0809050000020004" pitchFamily="49" charset="0"/>
+                <a:sym typeface="Fira Code"/>
+              </a:rPr>
+              <a:t> **matrix;</a:t>
+            </a:r>
+          </a:p>
+          <a:p>
+            <a:pPr marL="139700" lvl="0">
+              <a:buClr>
+                <a:srgbClr val="72D9F0"/>
+              </a:buClr>
+              <a:buSzPts val="1400"/>
+              <a:defRPr/>
+            </a:pPr>
+            <a:endParaRPr lang="en-US" sz="1050" dirty="0">
+              <a:solidFill>
+                <a:schemeClr val="accent1"/>
+              </a:solidFill>
+              <a:latin typeface="Fira Code" panose="020B0809050000020004" pitchFamily="49" charset="0"/>
+              <a:ea typeface="Fira Code" panose="020B0809050000020004" pitchFamily="49" charset="0"/>
+              <a:cs typeface="Fira Code" panose="020B0809050000020004" pitchFamily="49" charset="0"/>
+              <a:sym typeface="Fira Code"/>
+            </a:endParaRPr>
+          </a:p>
+          <a:p>
+            <a:pPr marL="139700" lvl="0">
+              <a:buClr>
+                <a:srgbClr val="72D9F0"/>
+              </a:buClr>
+              <a:buSzPts val="1400"/>
+              <a:defRPr/>
+            </a:pPr>
+            <a:r>
+              <a:rPr lang="en-US" sz="1050" dirty="0">
+                <a:solidFill>
+                  <a:schemeClr val="accent3"/>
+                </a:solidFill>
+                <a:latin typeface="Fira Code" panose="020B0809050000020004" pitchFamily="49" charset="0"/>
+                <a:ea typeface="Fira Code" panose="020B0809050000020004" pitchFamily="49" charset="0"/>
+                <a:cs typeface="Fira Code" panose="020B0809050000020004" pitchFamily="49" charset="0"/>
+                <a:sym typeface="Fira Code"/>
+              </a:rPr>
+              <a:t>    // allocate row pointers</a:t>
+            </a:r>
+          </a:p>
+          <a:p>
+            <a:pPr marL="139700" lvl="0">
+              <a:buClr>
+                <a:srgbClr val="72D9F0"/>
+              </a:buClr>
+              <a:buSzPts val="1400"/>
+              <a:defRPr/>
+            </a:pPr>
+            <a:r>
+              <a:rPr lang="en-US" sz="1050" dirty="0">
+                <a:solidFill>
+                  <a:schemeClr val="accent1"/>
+                </a:solidFill>
+                <a:latin typeface="Fira Code" panose="020B0809050000020004" pitchFamily="49" charset="0"/>
+                <a:ea typeface="Fira Code" panose="020B0809050000020004" pitchFamily="49" charset="0"/>
+                <a:cs typeface="Fira Code" panose="020B0809050000020004" pitchFamily="49" charset="0"/>
+                <a:sym typeface="Fira Code"/>
+              </a:rPr>
+              <a:t>    matrix = (int **) malloc(...);</a:t>
+            </a:r>
+          </a:p>
+          <a:p>
+            <a:pPr marL="139700" lvl="0">
+              <a:buClr>
+                <a:srgbClr val="72D9F0"/>
+              </a:buClr>
+              <a:buSzPts val="1400"/>
+              <a:defRPr/>
+            </a:pPr>
+            <a:r>
+              <a:rPr lang="en-US" sz="1050" dirty="0">
+                <a:solidFill>
+                  <a:schemeClr val="accent1"/>
+                </a:solidFill>
+                <a:latin typeface="Fira Code" panose="020B0809050000020004" pitchFamily="49" charset="0"/>
+                <a:ea typeface="Fira Code" panose="020B0809050000020004" pitchFamily="49" charset="0"/>
+                <a:cs typeface="Fira Code" panose="020B0809050000020004" pitchFamily="49" charset="0"/>
+                <a:sym typeface="Fira Code"/>
+              </a:rPr>
+              <a:t>}</a:t>
+            </a:r>
+            <a:endParaRPr kumimoji="0" lang="en-US" sz="1050" b="0" i="0" u="none" strike="noStrike" kern="0" cap="none" spc="0" normalizeH="0" baseline="0" noProof="0" dirty="0">
+              <a:ln>
+                <a:noFill/>
+              </a:ln>
+              <a:solidFill>
+                <a:schemeClr val="accent1"/>
+              </a:solidFill>
+              <a:effectLst/>
+              <a:uLnTx/>
+              <a:uFillTx/>
+              <a:latin typeface="Fira Code" panose="020B0809050000020004" pitchFamily="49" charset="0"/>
+              <a:ea typeface="Fira Code" panose="020B0809050000020004" pitchFamily="49" charset="0"/>
+              <a:cs typeface="Fira Code" panose="020B0809050000020004" pitchFamily="49" charset="0"/>
               <a:sym typeface="Fira Code"/>
             </a:endParaRPr>
           </a:p>
@@ -25250,12 +22591,12 @@
               <a:buNone/>
             </a:pPr>
             <a:r>
-              <a:rPr lang="en" sz="1100">
+              <a:rPr lang="en" sz="1100" dirty="0">
                 <a:solidFill>
                   <a:schemeClr val="accent3"/>
                 </a:solidFill>
               </a:rPr>
-              <a:t>1</a:t>
+              <a:t>5</a:t>
             </a:r>
             <a:endParaRPr lang="en" dirty="0">
               <a:solidFill>
@@ -25892,36 +23233,522 @@
           </a:p>
         </p:txBody>
       </p:sp>
-      <p:pic>
-        <p:nvPicPr>
-          <p:cNvPr id="18" name="Picture 17">
+      <p:sp>
+        <p:nvSpPr>
+          <p:cNvPr id="5" name="Rectangle: Rounded Corners 4">
             <a:extLst>
               <a:ext uri="{FF2B5EF4-FFF2-40B4-BE49-F238E27FC236}">
-                <a16:creationId xmlns:a16="http://schemas.microsoft.com/office/drawing/2014/main" id="{8B4A6514-8FBD-E6D5-5C68-B1BA26483F6E}"/>
+                <a16:creationId xmlns:a16="http://schemas.microsoft.com/office/drawing/2014/main" id="{93404B06-C294-F1C0-A8DD-3E74D5A03664}"/>
               </a:ext>
             </a:extLst>
           </p:cNvPr>
-          <p:cNvPicPr>
-            <a:picLocks noChangeAspect="1"/>
-          </p:cNvPicPr>
+          <p:cNvSpPr/>
           <p:nvPr/>
-        </p:nvPicPr>
-        <p:blipFill>
-          <a:blip r:embed="rId3"/>
-          <a:stretch>
-            <a:fillRect/>
-          </a:stretch>
-        </p:blipFill>
+        </p:nvSpPr>
         <p:spPr>
           <a:xfrm>
-            <a:off x="4620039" y="1439612"/>
-            <a:ext cx="4379150" cy="2068424"/>
+            <a:off x="3944790" y="1489780"/>
+            <a:ext cx="4806278" cy="1813169"/>
           </a:xfrm>
-          <a:prstGeom prst="rect">
-            <a:avLst/>
+          <a:prstGeom prst="roundRect">
+            <a:avLst>
+              <a:gd name="adj" fmla="val 7126"/>
+            </a:avLst>
           </a:prstGeom>
+          <a:solidFill>
+            <a:schemeClr val="accent5"/>
+          </a:solidFill>
+          <a:ln>
+            <a:noFill/>
+          </a:ln>
         </p:spPr>
-      </p:pic>
+        <p:style>
+          <a:lnRef idx="0">
+            <a:scrgbClr r="0" g="0" b="0"/>
+          </a:lnRef>
+          <a:fillRef idx="0">
+            <a:scrgbClr r="0" g="0" b="0"/>
+          </a:fillRef>
+          <a:effectRef idx="0">
+            <a:scrgbClr r="0" g="0" b="0"/>
+          </a:effectRef>
+          <a:fontRef idx="minor">
+            <a:schemeClr val="lt1"/>
+          </a:fontRef>
+        </p:style>
+        <p:txBody>
+          <a:bodyPr rtlCol="0" anchor="ctr"/>
+          <a:lstStyle/>
+          <a:p>
+            <a:pPr marL="139700" lvl="0">
+              <a:buClr>
+                <a:srgbClr val="72D9F0"/>
+              </a:buClr>
+              <a:buSzPts val="1400"/>
+              <a:defRPr/>
+            </a:pPr>
+            <a:r>
+              <a:rPr lang="en-US" sz="900" dirty="0">
+                <a:solidFill>
+                  <a:schemeClr val="tx2"/>
+                </a:solidFill>
+                <a:latin typeface="Fira Code" panose="020B0809050000020004" pitchFamily="49" charset="0"/>
+                <a:ea typeface="Fira Code" panose="020B0809050000020004" pitchFamily="49" charset="0"/>
+                <a:cs typeface="Fira Code" panose="020B0809050000020004" pitchFamily="49" charset="0"/>
+                <a:sym typeface="Fira Code"/>
+              </a:rPr>
+              <a:t>#include </a:t>
+            </a:r>
+            <a:r>
+              <a:rPr lang="en-US" sz="900" dirty="0">
+                <a:solidFill>
+                  <a:schemeClr val="accent1"/>
+                </a:solidFill>
+                <a:latin typeface="Fira Code" panose="020B0809050000020004" pitchFamily="49" charset="0"/>
+                <a:ea typeface="Fira Code" panose="020B0809050000020004" pitchFamily="49" charset="0"/>
+                <a:cs typeface="Fira Code" panose="020B0809050000020004" pitchFamily="49" charset="0"/>
+                <a:sym typeface="Fira Code"/>
+              </a:rPr>
+              <a:t>&lt;</a:t>
+            </a:r>
+            <a:r>
+              <a:rPr lang="en-US" sz="900" dirty="0" err="1">
+                <a:solidFill>
+                  <a:schemeClr val="accent1"/>
+                </a:solidFill>
+                <a:latin typeface="Fira Code" panose="020B0809050000020004" pitchFamily="49" charset="0"/>
+                <a:ea typeface="Fira Code" panose="020B0809050000020004" pitchFamily="49" charset="0"/>
+                <a:cs typeface="Fira Code" panose="020B0809050000020004" pitchFamily="49" charset="0"/>
+                <a:sym typeface="Fira Code"/>
+              </a:rPr>
+              <a:t>stdio.h</a:t>
+            </a:r>
+            <a:r>
+              <a:rPr lang="en-US" sz="900" dirty="0">
+                <a:solidFill>
+                  <a:schemeClr val="accent1"/>
+                </a:solidFill>
+                <a:latin typeface="Fira Code" panose="020B0809050000020004" pitchFamily="49" charset="0"/>
+                <a:ea typeface="Fira Code" panose="020B0809050000020004" pitchFamily="49" charset="0"/>
+                <a:cs typeface="Fira Code" panose="020B0809050000020004" pitchFamily="49" charset="0"/>
+                <a:sym typeface="Fira Code"/>
+              </a:rPr>
+              <a:t>&gt;</a:t>
+            </a:r>
+          </a:p>
+          <a:p>
+            <a:pPr marL="139700" lvl="0">
+              <a:buClr>
+                <a:srgbClr val="72D9F0"/>
+              </a:buClr>
+              <a:buSzPts val="1400"/>
+              <a:defRPr/>
+            </a:pPr>
+            <a:endParaRPr lang="en-US" sz="900" dirty="0">
+              <a:solidFill>
+                <a:schemeClr val="accent1"/>
+              </a:solidFill>
+              <a:latin typeface="Fira Code" panose="020B0809050000020004" pitchFamily="49" charset="0"/>
+              <a:ea typeface="Fira Code" panose="020B0809050000020004" pitchFamily="49" charset="0"/>
+              <a:cs typeface="Fira Code" panose="020B0809050000020004" pitchFamily="49" charset="0"/>
+              <a:sym typeface="Fira Code"/>
+            </a:endParaRPr>
+          </a:p>
+          <a:p>
+            <a:pPr marL="139700" lvl="0">
+              <a:buClr>
+                <a:srgbClr val="72D9F0"/>
+              </a:buClr>
+              <a:buSzPts val="1400"/>
+              <a:defRPr/>
+            </a:pPr>
+            <a:r>
+              <a:rPr lang="en-US" sz="900" dirty="0">
+                <a:solidFill>
+                  <a:schemeClr val="accent1"/>
+                </a:solidFill>
+                <a:latin typeface="Fira Code" panose="020B0809050000020004" pitchFamily="49" charset="0"/>
+                <a:ea typeface="Fira Code" panose="020B0809050000020004" pitchFamily="49" charset="0"/>
+                <a:cs typeface="Fira Code" panose="020B0809050000020004" pitchFamily="49" charset="0"/>
+                <a:sym typeface="Fira Code"/>
+              </a:rPr>
+              <a:t>int main() {</a:t>
+            </a:r>
+          </a:p>
+          <a:p>
+            <a:pPr marL="139700" lvl="0">
+              <a:buClr>
+                <a:srgbClr val="72D9F0"/>
+              </a:buClr>
+              <a:buSzPts val="1400"/>
+              <a:defRPr/>
+            </a:pPr>
+            <a:r>
+              <a:rPr lang="en-US" sz="900" dirty="0">
+                <a:solidFill>
+                  <a:schemeClr val="accent1"/>
+                </a:solidFill>
+                <a:latin typeface="Fira Code" panose="020B0809050000020004" pitchFamily="49" charset="0"/>
+                <a:ea typeface="Fira Code" panose="020B0809050000020004" pitchFamily="49" charset="0"/>
+                <a:cs typeface="Fira Code" panose="020B0809050000020004" pitchFamily="49" charset="0"/>
+                <a:sym typeface="Fira Code"/>
+              </a:rPr>
+              <a:t>    </a:t>
+            </a:r>
+            <a:r>
+              <a:rPr lang="en-US" sz="900" dirty="0">
+                <a:solidFill>
+                  <a:schemeClr val="tx2"/>
+                </a:solidFill>
+                <a:latin typeface="Fira Code" panose="020B0809050000020004" pitchFamily="49" charset="0"/>
+                <a:ea typeface="Fira Code" panose="020B0809050000020004" pitchFamily="49" charset="0"/>
+                <a:cs typeface="Fira Code" panose="020B0809050000020004" pitchFamily="49" charset="0"/>
+                <a:sym typeface="Fira Code"/>
+              </a:rPr>
+              <a:t>int</a:t>
+            </a:r>
+            <a:r>
+              <a:rPr lang="en-US" sz="900" dirty="0">
+                <a:solidFill>
+                  <a:schemeClr val="accent1"/>
+                </a:solidFill>
+                <a:latin typeface="Fira Code" panose="020B0809050000020004" pitchFamily="49" charset="0"/>
+                <a:ea typeface="Fira Code" panose="020B0809050000020004" pitchFamily="49" charset="0"/>
+                <a:cs typeface="Fira Code" panose="020B0809050000020004" pitchFamily="49" charset="0"/>
+                <a:sym typeface="Fira Code"/>
+              </a:rPr>
+              <a:t> </a:t>
+            </a:r>
+            <a:r>
+              <a:rPr lang="en-US" sz="900" dirty="0" err="1">
+                <a:solidFill>
+                  <a:schemeClr val="accent1"/>
+                </a:solidFill>
+                <a:latin typeface="Fira Code" panose="020B0809050000020004" pitchFamily="49" charset="0"/>
+                <a:ea typeface="Fira Code" panose="020B0809050000020004" pitchFamily="49" charset="0"/>
+                <a:cs typeface="Fira Code" panose="020B0809050000020004" pitchFamily="49" charset="0"/>
+                <a:sym typeface="Fira Code"/>
+              </a:rPr>
+              <a:t>arr</a:t>
+            </a:r>
+            <a:r>
+              <a:rPr lang="en-US" sz="900" dirty="0">
+                <a:solidFill>
+                  <a:schemeClr val="accent1"/>
+                </a:solidFill>
+                <a:latin typeface="Fira Code" panose="020B0809050000020004" pitchFamily="49" charset="0"/>
+                <a:ea typeface="Fira Code" panose="020B0809050000020004" pitchFamily="49" charset="0"/>
+                <a:cs typeface="Fira Code" panose="020B0809050000020004" pitchFamily="49" charset="0"/>
+                <a:sym typeface="Fira Code"/>
+              </a:rPr>
+              <a:t>[2][3][4];   </a:t>
+            </a:r>
+            <a:r>
+              <a:rPr lang="en-US" sz="900" dirty="0">
+                <a:solidFill>
+                  <a:schemeClr val="accent3"/>
+                </a:solidFill>
+                <a:latin typeface="Fira Code" panose="020B0809050000020004" pitchFamily="49" charset="0"/>
+                <a:ea typeface="Fira Code" panose="020B0809050000020004" pitchFamily="49" charset="0"/>
+                <a:cs typeface="Fira Code" panose="020B0809050000020004" pitchFamily="49" charset="0"/>
+                <a:sym typeface="Fira Code"/>
+              </a:rPr>
+              <a:t>// 2 layers, 3 rows, 4 cols</a:t>
+            </a:r>
+          </a:p>
+          <a:p>
+            <a:pPr marL="139700" lvl="0">
+              <a:buClr>
+                <a:srgbClr val="72D9F0"/>
+              </a:buClr>
+              <a:buSzPts val="1400"/>
+              <a:defRPr/>
+            </a:pPr>
+            <a:r>
+              <a:rPr lang="en-US" sz="900" dirty="0">
+                <a:solidFill>
+                  <a:schemeClr val="accent1"/>
+                </a:solidFill>
+                <a:latin typeface="Fira Code" panose="020B0809050000020004" pitchFamily="49" charset="0"/>
+                <a:ea typeface="Fira Code" panose="020B0809050000020004" pitchFamily="49" charset="0"/>
+                <a:cs typeface="Fira Code" panose="020B0809050000020004" pitchFamily="49" charset="0"/>
+                <a:sym typeface="Fira Code"/>
+              </a:rPr>
+              <a:t>    </a:t>
+            </a:r>
+            <a:r>
+              <a:rPr lang="en-US" sz="900" dirty="0">
+                <a:solidFill>
+                  <a:schemeClr val="tx2"/>
+                </a:solidFill>
+                <a:latin typeface="Fira Code" panose="020B0809050000020004" pitchFamily="49" charset="0"/>
+                <a:ea typeface="Fira Code" panose="020B0809050000020004" pitchFamily="49" charset="0"/>
+                <a:cs typeface="Fira Code" panose="020B0809050000020004" pitchFamily="49" charset="0"/>
+                <a:sym typeface="Fira Code"/>
+              </a:rPr>
+              <a:t>int</a:t>
+            </a:r>
+            <a:r>
+              <a:rPr lang="en-US" sz="900" dirty="0">
+                <a:solidFill>
+                  <a:schemeClr val="accent1"/>
+                </a:solidFill>
+                <a:latin typeface="Fira Code" panose="020B0809050000020004" pitchFamily="49" charset="0"/>
+                <a:ea typeface="Fira Code" panose="020B0809050000020004" pitchFamily="49" charset="0"/>
+                <a:cs typeface="Fira Code" panose="020B0809050000020004" pitchFamily="49" charset="0"/>
+                <a:sym typeface="Fira Code"/>
+              </a:rPr>
+              <a:t> *p = (int *)</a:t>
+            </a:r>
+            <a:r>
+              <a:rPr lang="en-US" sz="900" dirty="0" err="1">
+                <a:solidFill>
+                  <a:schemeClr val="accent1"/>
+                </a:solidFill>
+                <a:latin typeface="Fira Code" panose="020B0809050000020004" pitchFamily="49" charset="0"/>
+                <a:ea typeface="Fira Code" panose="020B0809050000020004" pitchFamily="49" charset="0"/>
+                <a:cs typeface="Fira Code" panose="020B0809050000020004" pitchFamily="49" charset="0"/>
+                <a:sym typeface="Fira Code"/>
+              </a:rPr>
+              <a:t>arr</a:t>
+            </a:r>
+            <a:r>
+              <a:rPr lang="en-US" sz="900" dirty="0">
+                <a:solidFill>
+                  <a:schemeClr val="accent1"/>
+                </a:solidFill>
+                <a:latin typeface="Fira Code" panose="020B0809050000020004" pitchFamily="49" charset="0"/>
+                <a:ea typeface="Fira Code" panose="020B0809050000020004" pitchFamily="49" charset="0"/>
+                <a:cs typeface="Fira Code" panose="020B0809050000020004" pitchFamily="49" charset="0"/>
+                <a:sym typeface="Fira Code"/>
+              </a:rPr>
+              <a:t>; </a:t>
+            </a:r>
+            <a:r>
+              <a:rPr lang="en-US" sz="900" dirty="0">
+                <a:solidFill>
+                  <a:schemeClr val="accent3"/>
+                </a:solidFill>
+                <a:latin typeface="Fira Code" panose="020B0809050000020004" pitchFamily="49" charset="0"/>
+                <a:ea typeface="Fira Code" panose="020B0809050000020004" pitchFamily="49" charset="0"/>
+                <a:cs typeface="Fira Code" panose="020B0809050000020004" pitchFamily="49" charset="0"/>
+                <a:sym typeface="Fira Code"/>
+              </a:rPr>
+              <a:t>// flatten 3D array into pointer</a:t>
+            </a:r>
+          </a:p>
+          <a:p>
+            <a:pPr marL="139700" lvl="0">
+              <a:buClr>
+                <a:srgbClr val="72D9F0"/>
+              </a:buClr>
+              <a:buSzPts val="1400"/>
+              <a:defRPr/>
+            </a:pPr>
+            <a:endParaRPr lang="en-US" sz="900" dirty="0">
+              <a:solidFill>
+                <a:schemeClr val="accent1"/>
+              </a:solidFill>
+              <a:latin typeface="Fira Code" panose="020B0809050000020004" pitchFamily="49" charset="0"/>
+              <a:ea typeface="Fira Code" panose="020B0809050000020004" pitchFamily="49" charset="0"/>
+              <a:cs typeface="Fira Code" panose="020B0809050000020004" pitchFamily="49" charset="0"/>
+              <a:sym typeface="Fira Code"/>
+            </a:endParaRPr>
+          </a:p>
+          <a:p>
+            <a:pPr marL="139700" lvl="0">
+              <a:buClr>
+                <a:srgbClr val="72D9F0"/>
+              </a:buClr>
+              <a:buSzPts val="1400"/>
+              <a:defRPr/>
+            </a:pPr>
+            <a:r>
+              <a:rPr lang="en-US" sz="900" dirty="0">
+                <a:solidFill>
+                  <a:schemeClr val="accent1"/>
+                </a:solidFill>
+                <a:latin typeface="Fira Code" panose="020B0809050000020004" pitchFamily="49" charset="0"/>
+                <a:ea typeface="Fira Code" panose="020B0809050000020004" pitchFamily="49" charset="0"/>
+                <a:cs typeface="Fira Code" panose="020B0809050000020004" pitchFamily="49" charset="0"/>
+                <a:sym typeface="Fira Code"/>
+              </a:rPr>
+              <a:t>    </a:t>
+            </a:r>
+            <a:r>
+              <a:rPr lang="en-US" sz="900" dirty="0">
+                <a:solidFill>
+                  <a:schemeClr val="tx2"/>
+                </a:solidFill>
+                <a:latin typeface="Fira Code" panose="020B0809050000020004" pitchFamily="49" charset="0"/>
+                <a:ea typeface="Fira Code" panose="020B0809050000020004" pitchFamily="49" charset="0"/>
+                <a:cs typeface="Fira Code" panose="020B0809050000020004" pitchFamily="49" charset="0"/>
+                <a:sym typeface="Fira Code"/>
+              </a:rPr>
+              <a:t>int</a:t>
+            </a:r>
+            <a:r>
+              <a:rPr lang="en-US" sz="900" dirty="0">
+                <a:solidFill>
+                  <a:schemeClr val="accent1"/>
+                </a:solidFill>
+                <a:latin typeface="Fira Code" panose="020B0809050000020004" pitchFamily="49" charset="0"/>
+                <a:ea typeface="Fira Code" panose="020B0809050000020004" pitchFamily="49" charset="0"/>
+                <a:cs typeface="Fira Code" panose="020B0809050000020004" pitchFamily="49" charset="0"/>
+                <a:sym typeface="Fira Code"/>
+              </a:rPr>
+              <a:t> layers = 2, rows = 3, cols = 4;</a:t>
+            </a:r>
+          </a:p>
+          <a:p>
+            <a:pPr marL="139700" lvl="0">
+              <a:buClr>
+                <a:srgbClr val="72D9F0"/>
+              </a:buClr>
+              <a:buSzPts val="1400"/>
+              <a:defRPr/>
+            </a:pPr>
+            <a:endParaRPr lang="en-US" sz="900" dirty="0">
+              <a:solidFill>
+                <a:schemeClr val="accent1"/>
+              </a:solidFill>
+              <a:latin typeface="Fira Code" panose="020B0809050000020004" pitchFamily="49" charset="0"/>
+              <a:ea typeface="Fira Code" panose="020B0809050000020004" pitchFamily="49" charset="0"/>
+              <a:cs typeface="Fira Code" panose="020B0809050000020004" pitchFamily="49" charset="0"/>
+              <a:sym typeface="Fira Code"/>
+            </a:endParaRPr>
+          </a:p>
+          <a:p>
+            <a:pPr marL="139700" lvl="0">
+              <a:buClr>
+                <a:srgbClr val="72D9F0"/>
+              </a:buClr>
+              <a:buSzPts val="1400"/>
+              <a:defRPr/>
+            </a:pPr>
+            <a:r>
+              <a:rPr lang="en-US" sz="900" dirty="0">
+                <a:solidFill>
+                  <a:schemeClr val="accent3"/>
+                </a:solidFill>
+                <a:latin typeface="Fira Code" panose="020B0809050000020004" pitchFamily="49" charset="0"/>
+                <a:ea typeface="Fira Code" panose="020B0809050000020004" pitchFamily="49" charset="0"/>
+                <a:cs typeface="Fira Code" panose="020B0809050000020004" pitchFamily="49" charset="0"/>
+                <a:sym typeface="Fira Code"/>
+              </a:rPr>
+              <a:t>    // Fill using pointer arithmetic: </a:t>
+            </a:r>
+            <a:r>
+              <a:rPr lang="en-US" sz="900" dirty="0" err="1">
+                <a:solidFill>
+                  <a:schemeClr val="accent3"/>
+                </a:solidFill>
+                <a:latin typeface="Fira Code" panose="020B0809050000020004" pitchFamily="49" charset="0"/>
+                <a:ea typeface="Fira Code" panose="020B0809050000020004" pitchFamily="49" charset="0"/>
+                <a:cs typeface="Fira Code" panose="020B0809050000020004" pitchFamily="49" charset="0"/>
+                <a:sym typeface="Fira Code"/>
+              </a:rPr>
+              <a:t>arr</a:t>
+            </a:r>
+            <a:r>
+              <a:rPr lang="en-US" sz="900" dirty="0">
+                <a:solidFill>
+                  <a:schemeClr val="accent3"/>
+                </a:solidFill>
+                <a:latin typeface="Fira Code" panose="020B0809050000020004" pitchFamily="49" charset="0"/>
+                <a:ea typeface="Fira Code" panose="020B0809050000020004" pitchFamily="49" charset="0"/>
+                <a:cs typeface="Fira Code" panose="020B0809050000020004" pitchFamily="49" charset="0"/>
+                <a:sym typeface="Fira Code"/>
+              </a:rPr>
+              <a:t>[</a:t>
+            </a:r>
+            <a:r>
+              <a:rPr lang="en-US" sz="900" dirty="0" err="1">
+                <a:solidFill>
+                  <a:schemeClr val="accent3"/>
+                </a:solidFill>
+                <a:latin typeface="Fira Code" panose="020B0809050000020004" pitchFamily="49" charset="0"/>
+                <a:ea typeface="Fira Code" panose="020B0809050000020004" pitchFamily="49" charset="0"/>
+                <a:cs typeface="Fira Code" panose="020B0809050000020004" pitchFamily="49" charset="0"/>
+                <a:sym typeface="Fira Code"/>
+              </a:rPr>
+              <a:t>i</a:t>
+            </a:r>
+            <a:r>
+              <a:rPr lang="en-US" sz="900" dirty="0">
+                <a:solidFill>
+                  <a:schemeClr val="accent3"/>
+                </a:solidFill>
+                <a:latin typeface="Fira Code" panose="020B0809050000020004" pitchFamily="49" charset="0"/>
+                <a:ea typeface="Fira Code" panose="020B0809050000020004" pitchFamily="49" charset="0"/>
+                <a:cs typeface="Fira Code" panose="020B0809050000020004" pitchFamily="49" charset="0"/>
+                <a:sym typeface="Fira Code"/>
+              </a:rPr>
+              <a:t>][j][k] = </a:t>
+            </a:r>
+            <a:r>
+              <a:rPr lang="en-US" sz="900" dirty="0" err="1">
+                <a:solidFill>
+                  <a:schemeClr val="accent3"/>
+                </a:solidFill>
+                <a:latin typeface="Fira Code" panose="020B0809050000020004" pitchFamily="49" charset="0"/>
+                <a:ea typeface="Fira Code" panose="020B0809050000020004" pitchFamily="49" charset="0"/>
+                <a:cs typeface="Fira Code" panose="020B0809050000020004" pitchFamily="49" charset="0"/>
+                <a:sym typeface="Fira Code"/>
+              </a:rPr>
+              <a:t>i</a:t>
+            </a:r>
+            <a:r>
+              <a:rPr lang="en-US" sz="900" dirty="0">
+                <a:solidFill>
+                  <a:schemeClr val="accent3"/>
+                </a:solidFill>
+                <a:latin typeface="Fira Code" panose="020B0809050000020004" pitchFamily="49" charset="0"/>
+                <a:ea typeface="Fira Code" panose="020B0809050000020004" pitchFamily="49" charset="0"/>
+                <a:cs typeface="Fira Code" panose="020B0809050000020004" pitchFamily="49" charset="0"/>
+                <a:sym typeface="Fira Code"/>
+              </a:rPr>
+              <a:t> + j + k</a:t>
+            </a:r>
+          </a:p>
+          <a:p>
+            <a:pPr marL="139700" lvl="0">
+              <a:buClr>
+                <a:srgbClr val="72D9F0"/>
+              </a:buClr>
+              <a:buSzPts val="1400"/>
+              <a:defRPr/>
+            </a:pPr>
+            <a:r>
+              <a:rPr lang="en-US" sz="1050" dirty="0">
+                <a:solidFill>
+                  <a:schemeClr val="accent1"/>
+                </a:solidFill>
+                <a:latin typeface="Fira Code" panose="020B0809050000020004" pitchFamily="49" charset="0"/>
+                <a:ea typeface="Fira Code" panose="020B0809050000020004" pitchFamily="49" charset="0"/>
+                <a:cs typeface="Fira Code" panose="020B0809050000020004" pitchFamily="49" charset="0"/>
+                <a:sym typeface="Fira Code"/>
+              </a:rPr>
+              <a:t>}</a:t>
+            </a:r>
+            <a:endParaRPr kumimoji="0" lang="en-US" sz="1050" b="0" i="0" u="none" strike="noStrike" kern="0" cap="none" spc="0" normalizeH="0" baseline="0" noProof="0" dirty="0">
+              <a:ln>
+                <a:noFill/>
+              </a:ln>
+              <a:solidFill>
+                <a:schemeClr val="accent1"/>
+              </a:solidFill>
+              <a:effectLst/>
+              <a:uLnTx/>
+              <a:uFillTx/>
+              <a:latin typeface="Fira Code" panose="020B0809050000020004" pitchFamily="49" charset="0"/>
+              <a:ea typeface="Fira Code" panose="020B0809050000020004" pitchFamily="49" charset="0"/>
+              <a:cs typeface="Fira Code" panose="020B0809050000020004" pitchFamily="49" charset="0"/>
+              <a:sym typeface="Fira Code"/>
+            </a:endParaRPr>
+          </a:p>
+        </p:txBody>
+      </p:sp>
     </p:spTree>
     <p:extLst>
       <p:ext uri="{BB962C8B-B14F-4D97-AF65-F5344CB8AC3E}">
@@ -26987,12 +24814,12 @@
               <a:buNone/>
             </a:pPr>
             <a:r>
-              <a:rPr lang="en" sz="1100">
+              <a:rPr lang="en" sz="1100" dirty="0">
                 <a:solidFill>
                   <a:schemeClr val="accent3"/>
                 </a:solidFill>
               </a:rPr>
-              <a:t>1</a:t>
+              <a:t>6</a:t>
             </a:r>
             <a:endParaRPr lang="en" dirty="0">
               <a:solidFill>
@@ -27552,36 +25379,6 @@
           </a:p>
         </p:txBody>
       </p:sp>
-      <p:pic>
-        <p:nvPicPr>
-          <p:cNvPr id="10" name="Picture 9">
-            <a:extLst>
-              <a:ext uri="{FF2B5EF4-FFF2-40B4-BE49-F238E27FC236}">
-                <a16:creationId xmlns:a16="http://schemas.microsoft.com/office/drawing/2014/main" id="{873AFB5C-2F1F-E544-7B08-7EADF9D81A05}"/>
-              </a:ext>
-            </a:extLst>
-          </p:cNvPr>
-          <p:cNvPicPr>
-            <a:picLocks noChangeAspect="1"/>
-          </p:cNvPicPr>
-          <p:nvPr/>
-        </p:nvPicPr>
-        <p:blipFill>
-          <a:blip r:embed="rId3"/>
-          <a:stretch>
-            <a:fillRect/>
-          </a:stretch>
-        </p:blipFill>
-        <p:spPr>
-          <a:xfrm>
-            <a:off x="5462518" y="1732388"/>
-            <a:ext cx="3458282" cy="2768602"/>
-          </a:xfrm>
-          <a:prstGeom prst="rect">
-            <a:avLst/>
-          </a:prstGeom>
-        </p:spPr>
-      </p:pic>
       <p:sp>
         <p:nvSpPr>
           <p:cNvPr id="13" name="TextBox 12">
@@ -27639,6 +25436,660 @@
               <a:latin typeface="Fira Code"/>
               <a:ea typeface="Fira Code"/>
               <a:cs typeface="B Nazanin" panose="00000400000000000000" pitchFamily="2" charset="-78"/>
+              <a:sym typeface="Fira Code"/>
+            </a:endParaRPr>
+          </a:p>
+        </p:txBody>
+      </p:sp>
+      <p:sp>
+        <p:nvSpPr>
+          <p:cNvPr id="5" name="Rectangle: Rounded Corners 4">
+            <a:extLst>
+              <a:ext uri="{FF2B5EF4-FFF2-40B4-BE49-F238E27FC236}">
+                <a16:creationId xmlns:a16="http://schemas.microsoft.com/office/drawing/2014/main" id="{73EBCDDA-5538-2088-3092-7530591C0AA4}"/>
+              </a:ext>
+            </a:extLst>
+          </p:cNvPr>
+          <p:cNvSpPr/>
+          <p:nvPr/>
+        </p:nvSpPr>
+        <p:spPr>
+          <a:xfrm>
+            <a:off x="5517345" y="1901664"/>
+            <a:ext cx="3353003" cy="2591609"/>
+          </a:xfrm>
+          <a:prstGeom prst="roundRect">
+            <a:avLst>
+              <a:gd name="adj" fmla="val 8809"/>
+            </a:avLst>
+          </a:prstGeom>
+          <a:solidFill>
+            <a:schemeClr val="accent5"/>
+          </a:solidFill>
+          <a:ln>
+            <a:noFill/>
+          </a:ln>
+        </p:spPr>
+        <p:style>
+          <a:lnRef idx="0">
+            <a:scrgbClr r="0" g="0" b="0"/>
+          </a:lnRef>
+          <a:fillRef idx="0">
+            <a:scrgbClr r="0" g="0" b="0"/>
+          </a:fillRef>
+          <a:effectRef idx="0">
+            <a:scrgbClr r="0" g="0" b="0"/>
+          </a:effectRef>
+          <a:fontRef idx="minor">
+            <a:schemeClr val="lt1"/>
+          </a:fontRef>
+        </p:style>
+        <p:txBody>
+          <a:bodyPr rtlCol="0" anchor="ctr"/>
+          <a:lstStyle/>
+          <a:p>
+            <a:pPr marL="139700" lvl="0">
+              <a:buClr>
+                <a:srgbClr val="72D9F0"/>
+              </a:buClr>
+              <a:buSzPts val="1400"/>
+              <a:defRPr/>
+            </a:pPr>
+            <a:r>
+              <a:rPr lang="en-US" sz="900" dirty="0">
+                <a:solidFill>
+                  <a:schemeClr val="tx2"/>
+                </a:solidFill>
+                <a:latin typeface="Fira Code" panose="020B0809050000020004" pitchFamily="49" charset="0"/>
+                <a:ea typeface="Fira Code" panose="020B0809050000020004" pitchFamily="49" charset="0"/>
+                <a:cs typeface="Fira Code" panose="020B0809050000020004" pitchFamily="49" charset="0"/>
+                <a:sym typeface="Fira Code"/>
+              </a:rPr>
+              <a:t>#include </a:t>
+            </a:r>
+            <a:r>
+              <a:rPr lang="en-US" sz="900" dirty="0">
+                <a:solidFill>
+                  <a:schemeClr val="accent1"/>
+                </a:solidFill>
+                <a:latin typeface="Fira Code" panose="020B0809050000020004" pitchFamily="49" charset="0"/>
+                <a:ea typeface="Fira Code" panose="020B0809050000020004" pitchFamily="49" charset="0"/>
+                <a:cs typeface="Fira Code" panose="020B0809050000020004" pitchFamily="49" charset="0"/>
+                <a:sym typeface="Fira Code"/>
+              </a:rPr>
+              <a:t>&lt;</a:t>
+            </a:r>
+            <a:r>
+              <a:rPr lang="en-US" sz="900" dirty="0" err="1">
+                <a:solidFill>
+                  <a:schemeClr val="accent1"/>
+                </a:solidFill>
+                <a:latin typeface="Fira Code" panose="020B0809050000020004" pitchFamily="49" charset="0"/>
+                <a:ea typeface="Fira Code" panose="020B0809050000020004" pitchFamily="49" charset="0"/>
+                <a:cs typeface="Fira Code" panose="020B0809050000020004" pitchFamily="49" charset="0"/>
+                <a:sym typeface="Fira Code"/>
+              </a:rPr>
+              <a:t>stdio.h</a:t>
+            </a:r>
+            <a:r>
+              <a:rPr lang="en-US" sz="900" dirty="0">
+                <a:solidFill>
+                  <a:schemeClr val="accent1"/>
+                </a:solidFill>
+                <a:latin typeface="Fira Code" panose="020B0809050000020004" pitchFamily="49" charset="0"/>
+                <a:ea typeface="Fira Code" panose="020B0809050000020004" pitchFamily="49" charset="0"/>
+                <a:cs typeface="Fira Code" panose="020B0809050000020004" pitchFamily="49" charset="0"/>
+                <a:sym typeface="Fira Code"/>
+              </a:rPr>
+              <a:t>&gt;</a:t>
+            </a:r>
+          </a:p>
+          <a:p>
+            <a:pPr marL="139700" lvl="0">
+              <a:buClr>
+                <a:srgbClr val="72D9F0"/>
+              </a:buClr>
+              <a:buSzPts val="1400"/>
+              <a:defRPr/>
+            </a:pPr>
+            <a:endParaRPr lang="en-US" sz="900" dirty="0">
+              <a:solidFill>
+                <a:schemeClr val="accent1"/>
+              </a:solidFill>
+              <a:latin typeface="Fira Code" panose="020B0809050000020004" pitchFamily="49" charset="0"/>
+              <a:ea typeface="Fira Code" panose="020B0809050000020004" pitchFamily="49" charset="0"/>
+              <a:cs typeface="Fira Code" panose="020B0809050000020004" pitchFamily="49" charset="0"/>
+              <a:sym typeface="Fira Code"/>
+            </a:endParaRPr>
+          </a:p>
+          <a:p>
+            <a:pPr marL="139700" lvl="0">
+              <a:buClr>
+                <a:srgbClr val="72D9F0"/>
+              </a:buClr>
+              <a:buSzPts val="1400"/>
+              <a:defRPr/>
+            </a:pPr>
+            <a:r>
+              <a:rPr lang="en-US" sz="900" dirty="0">
+                <a:solidFill>
+                  <a:schemeClr val="tx2"/>
+                </a:solidFill>
+                <a:latin typeface="Fira Code" panose="020B0809050000020004" pitchFamily="49" charset="0"/>
+                <a:ea typeface="Fira Code" panose="020B0809050000020004" pitchFamily="49" charset="0"/>
+                <a:cs typeface="Fira Code" panose="020B0809050000020004" pitchFamily="49" charset="0"/>
+                <a:sym typeface="Fira Code"/>
+              </a:rPr>
+              <a:t>int</a:t>
+            </a:r>
+            <a:r>
+              <a:rPr lang="en-US" sz="900" dirty="0">
+                <a:solidFill>
+                  <a:schemeClr val="accent1"/>
+                </a:solidFill>
+                <a:latin typeface="Fira Code" panose="020B0809050000020004" pitchFamily="49" charset="0"/>
+                <a:ea typeface="Fira Code" panose="020B0809050000020004" pitchFamily="49" charset="0"/>
+                <a:cs typeface="Fira Code" panose="020B0809050000020004" pitchFamily="49" charset="0"/>
+                <a:sym typeface="Fira Code"/>
+              </a:rPr>
+              <a:t> square(int n) {</a:t>
+            </a:r>
+          </a:p>
+          <a:p>
+            <a:pPr marL="139700" lvl="0">
+              <a:buClr>
+                <a:srgbClr val="72D9F0"/>
+              </a:buClr>
+              <a:buSzPts val="1400"/>
+              <a:defRPr/>
+            </a:pPr>
+            <a:r>
+              <a:rPr lang="en-US" sz="900" dirty="0">
+                <a:solidFill>
+                  <a:schemeClr val="accent1"/>
+                </a:solidFill>
+                <a:latin typeface="Fira Code" panose="020B0809050000020004" pitchFamily="49" charset="0"/>
+                <a:ea typeface="Fira Code" panose="020B0809050000020004" pitchFamily="49" charset="0"/>
+                <a:cs typeface="Fira Code" panose="020B0809050000020004" pitchFamily="49" charset="0"/>
+                <a:sym typeface="Fira Code"/>
+              </a:rPr>
+              <a:t>    </a:t>
+            </a:r>
+            <a:r>
+              <a:rPr lang="en-US" sz="900" dirty="0">
+                <a:solidFill>
+                  <a:schemeClr val="tx2"/>
+                </a:solidFill>
+                <a:latin typeface="Fira Code" panose="020B0809050000020004" pitchFamily="49" charset="0"/>
+                <a:ea typeface="Fira Code" panose="020B0809050000020004" pitchFamily="49" charset="0"/>
+                <a:cs typeface="Fira Code" panose="020B0809050000020004" pitchFamily="49" charset="0"/>
+                <a:sym typeface="Fira Code"/>
+              </a:rPr>
+              <a:t>return</a:t>
+            </a:r>
+            <a:r>
+              <a:rPr lang="en-US" sz="900" dirty="0">
+                <a:solidFill>
+                  <a:schemeClr val="accent1"/>
+                </a:solidFill>
+                <a:latin typeface="Fira Code" panose="020B0809050000020004" pitchFamily="49" charset="0"/>
+                <a:ea typeface="Fira Code" panose="020B0809050000020004" pitchFamily="49" charset="0"/>
+                <a:cs typeface="Fira Code" panose="020B0809050000020004" pitchFamily="49" charset="0"/>
+                <a:sym typeface="Fira Code"/>
+              </a:rPr>
+              <a:t> n * n;</a:t>
+            </a:r>
+          </a:p>
+          <a:p>
+            <a:pPr marL="139700" lvl="0">
+              <a:buClr>
+                <a:srgbClr val="72D9F0"/>
+              </a:buClr>
+              <a:buSzPts val="1400"/>
+              <a:defRPr/>
+            </a:pPr>
+            <a:r>
+              <a:rPr lang="en-US" sz="900" dirty="0">
+                <a:solidFill>
+                  <a:schemeClr val="accent1"/>
+                </a:solidFill>
+                <a:latin typeface="Fira Code" panose="020B0809050000020004" pitchFamily="49" charset="0"/>
+                <a:ea typeface="Fira Code" panose="020B0809050000020004" pitchFamily="49" charset="0"/>
+                <a:cs typeface="Fira Code" panose="020B0809050000020004" pitchFamily="49" charset="0"/>
+                <a:sym typeface="Fira Code"/>
+              </a:rPr>
+              <a:t>}</a:t>
+            </a:r>
+          </a:p>
+          <a:p>
+            <a:pPr marL="139700" lvl="0">
+              <a:buClr>
+                <a:srgbClr val="72D9F0"/>
+              </a:buClr>
+              <a:buSzPts val="1400"/>
+              <a:defRPr/>
+            </a:pPr>
+            <a:endParaRPr lang="en-US" sz="900" dirty="0">
+              <a:solidFill>
+                <a:schemeClr val="accent1"/>
+              </a:solidFill>
+              <a:latin typeface="Fira Code" panose="020B0809050000020004" pitchFamily="49" charset="0"/>
+              <a:ea typeface="Fira Code" panose="020B0809050000020004" pitchFamily="49" charset="0"/>
+              <a:cs typeface="Fira Code" panose="020B0809050000020004" pitchFamily="49" charset="0"/>
+              <a:sym typeface="Fira Code"/>
+            </a:endParaRPr>
+          </a:p>
+          <a:p>
+            <a:pPr marL="139700" lvl="0">
+              <a:buClr>
+                <a:srgbClr val="72D9F0"/>
+              </a:buClr>
+              <a:buSzPts val="1400"/>
+              <a:defRPr/>
+            </a:pPr>
+            <a:r>
+              <a:rPr lang="en-US" sz="900" dirty="0">
+                <a:solidFill>
+                  <a:schemeClr val="tx2"/>
+                </a:solidFill>
+                <a:latin typeface="Fira Code" panose="020B0809050000020004" pitchFamily="49" charset="0"/>
+                <a:ea typeface="Fira Code" panose="020B0809050000020004" pitchFamily="49" charset="0"/>
+                <a:cs typeface="Fira Code" panose="020B0809050000020004" pitchFamily="49" charset="0"/>
+                <a:sym typeface="Fira Code"/>
+              </a:rPr>
+              <a:t>int</a:t>
+            </a:r>
+            <a:r>
+              <a:rPr lang="en-US" sz="900" dirty="0">
+                <a:solidFill>
+                  <a:schemeClr val="accent1"/>
+                </a:solidFill>
+                <a:latin typeface="Fira Code" panose="020B0809050000020004" pitchFamily="49" charset="0"/>
+                <a:ea typeface="Fira Code" panose="020B0809050000020004" pitchFamily="49" charset="0"/>
+                <a:cs typeface="Fira Code" panose="020B0809050000020004" pitchFamily="49" charset="0"/>
+                <a:sym typeface="Fira Code"/>
+              </a:rPr>
+              <a:t> main() {</a:t>
+            </a:r>
+          </a:p>
+          <a:p>
+            <a:pPr marL="139700" lvl="0">
+              <a:buClr>
+                <a:srgbClr val="72D9F0"/>
+              </a:buClr>
+              <a:buSzPts val="1400"/>
+              <a:defRPr/>
+            </a:pPr>
+            <a:r>
+              <a:rPr lang="en-US" sz="900" dirty="0">
+                <a:solidFill>
+                  <a:schemeClr val="accent3"/>
+                </a:solidFill>
+                <a:latin typeface="Fira Code" panose="020B0809050000020004" pitchFamily="49" charset="0"/>
+                <a:ea typeface="Fira Code" panose="020B0809050000020004" pitchFamily="49" charset="0"/>
+                <a:cs typeface="Fira Code" panose="020B0809050000020004" pitchFamily="49" charset="0"/>
+                <a:sym typeface="Fira Code"/>
+              </a:rPr>
+              <a:t>    // declare a function pointer</a:t>
+            </a:r>
+          </a:p>
+          <a:p>
+            <a:pPr marL="139700" lvl="0">
+              <a:buClr>
+                <a:srgbClr val="72D9F0"/>
+              </a:buClr>
+              <a:buSzPts val="1400"/>
+              <a:defRPr/>
+            </a:pPr>
+            <a:r>
+              <a:rPr lang="en-US" sz="900" dirty="0">
+                <a:solidFill>
+                  <a:schemeClr val="accent1"/>
+                </a:solidFill>
+                <a:latin typeface="Fira Code" panose="020B0809050000020004" pitchFamily="49" charset="0"/>
+                <a:ea typeface="Fira Code" panose="020B0809050000020004" pitchFamily="49" charset="0"/>
+                <a:cs typeface="Fira Code" panose="020B0809050000020004" pitchFamily="49" charset="0"/>
+                <a:sym typeface="Fira Code"/>
+              </a:rPr>
+              <a:t>    </a:t>
+            </a:r>
+            <a:r>
+              <a:rPr lang="en-US" sz="900" dirty="0">
+                <a:solidFill>
+                  <a:schemeClr val="tx2"/>
+                </a:solidFill>
+                <a:latin typeface="Fira Code" panose="020B0809050000020004" pitchFamily="49" charset="0"/>
+                <a:ea typeface="Fira Code" panose="020B0809050000020004" pitchFamily="49" charset="0"/>
+                <a:cs typeface="Fira Code" panose="020B0809050000020004" pitchFamily="49" charset="0"/>
+                <a:sym typeface="Fira Code"/>
+              </a:rPr>
+              <a:t>int</a:t>
+            </a:r>
+            <a:r>
+              <a:rPr lang="en-US" sz="900" dirty="0">
+                <a:solidFill>
+                  <a:schemeClr val="accent1"/>
+                </a:solidFill>
+                <a:latin typeface="Fira Code" panose="020B0809050000020004" pitchFamily="49" charset="0"/>
+                <a:ea typeface="Fira Code" panose="020B0809050000020004" pitchFamily="49" charset="0"/>
+                <a:cs typeface="Fira Code" panose="020B0809050000020004" pitchFamily="49" charset="0"/>
+                <a:sym typeface="Fira Code"/>
+              </a:rPr>
+              <a:t> (*</a:t>
+            </a:r>
+            <a:r>
+              <a:rPr lang="en-US" sz="900" dirty="0" err="1">
+                <a:solidFill>
+                  <a:schemeClr val="accent1"/>
+                </a:solidFill>
+                <a:latin typeface="Fira Code" panose="020B0809050000020004" pitchFamily="49" charset="0"/>
+                <a:ea typeface="Fira Code" panose="020B0809050000020004" pitchFamily="49" charset="0"/>
+                <a:cs typeface="Fira Code" panose="020B0809050000020004" pitchFamily="49" charset="0"/>
+                <a:sym typeface="Fira Code"/>
+              </a:rPr>
+              <a:t>fp</a:t>
+            </a:r>
+            <a:r>
+              <a:rPr lang="en-US" sz="900" dirty="0">
+                <a:solidFill>
+                  <a:schemeClr val="accent1"/>
+                </a:solidFill>
+                <a:latin typeface="Fira Code" panose="020B0809050000020004" pitchFamily="49" charset="0"/>
+                <a:ea typeface="Fira Code" panose="020B0809050000020004" pitchFamily="49" charset="0"/>
+                <a:cs typeface="Fira Code" panose="020B0809050000020004" pitchFamily="49" charset="0"/>
+                <a:sym typeface="Fira Code"/>
+              </a:rPr>
+              <a:t>)(int);</a:t>
+            </a:r>
+          </a:p>
+          <a:p>
+            <a:pPr marL="139700" lvl="0">
+              <a:buClr>
+                <a:srgbClr val="72D9F0"/>
+              </a:buClr>
+              <a:buSzPts val="1400"/>
+              <a:defRPr/>
+            </a:pPr>
+            <a:endParaRPr lang="en-US" sz="900" dirty="0">
+              <a:solidFill>
+                <a:schemeClr val="accent1"/>
+              </a:solidFill>
+              <a:latin typeface="Fira Code" panose="020B0809050000020004" pitchFamily="49" charset="0"/>
+              <a:ea typeface="Fira Code" panose="020B0809050000020004" pitchFamily="49" charset="0"/>
+              <a:cs typeface="Fira Code" panose="020B0809050000020004" pitchFamily="49" charset="0"/>
+              <a:sym typeface="Fira Code"/>
+            </a:endParaRPr>
+          </a:p>
+          <a:p>
+            <a:pPr marL="139700" lvl="0">
+              <a:buClr>
+                <a:srgbClr val="72D9F0"/>
+              </a:buClr>
+              <a:buSzPts val="1400"/>
+              <a:defRPr/>
+            </a:pPr>
+            <a:r>
+              <a:rPr lang="en-US" sz="900" dirty="0">
+                <a:solidFill>
+                  <a:schemeClr val="accent3"/>
+                </a:solidFill>
+                <a:latin typeface="Fira Code" panose="020B0809050000020004" pitchFamily="49" charset="0"/>
+                <a:ea typeface="Fira Code" panose="020B0809050000020004" pitchFamily="49" charset="0"/>
+                <a:cs typeface="Fira Code" panose="020B0809050000020004" pitchFamily="49" charset="0"/>
+                <a:sym typeface="Fira Code"/>
+              </a:rPr>
+              <a:t>    // assign function address</a:t>
+            </a:r>
+          </a:p>
+          <a:p>
+            <a:pPr marL="139700" lvl="0">
+              <a:buClr>
+                <a:srgbClr val="72D9F0"/>
+              </a:buClr>
+              <a:buSzPts val="1400"/>
+              <a:defRPr/>
+            </a:pPr>
+            <a:r>
+              <a:rPr lang="en-US" sz="900" dirty="0">
+                <a:solidFill>
+                  <a:schemeClr val="accent1"/>
+                </a:solidFill>
+                <a:latin typeface="Fira Code" panose="020B0809050000020004" pitchFamily="49" charset="0"/>
+                <a:ea typeface="Fira Code" panose="020B0809050000020004" pitchFamily="49" charset="0"/>
+                <a:cs typeface="Fira Code" panose="020B0809050000020004" pitchFamily="49" charset="0"/>
+                <a:sym typeface="Fira Code"/>
+              </a:rPr>
+              <a:t>    </a:t>
+            </a:r>
+            <a:r>
+              <a:rPr lang="en-US" sz="900" dirty="0" err="1">
+                <a:solidFill>
+                  <a:schemeClr val="accent1"/>
+                </a:solidFill>
+                <a:latin typeface="Fira Code" panose="020B0809050000020004" pitchFamily="49" charset="0"/>
+                <a:ea typeface="Fira Code" panose="020B0809050000020004" pitchFamily="49" charset="0"/>
+                <a:cs typeface="Fira Code" panose="020B0809050000020004" pitchFamily="49" charset="0"/>
+                <a:sym typeface="Fira Code"/>
+              </a:rPr>
+              <a:t>fp</a:t>
+            </a:r>
+            <a:r>
+              <a:rPr lang="en-US" sz="900" dirty="0">
+                <a:solidFill>
+                  <a:schemeClr val="accent1"/>
+                </a:solidFill>
+                <a:latin typeface="Fira Code" panose="020B0809050000020004" pitchFamily="49" charset="0"/>
+                <a:ea typeface="Fira Code" panose="020B0809050000020004" pitchFamily="49" charset="0"/>
+                <a:cs typeface="Fira Code" panose="020B0809050000020004" pitchFamily="49" charset="0"/>
+                <a:sym typeface="Fira Code"/>
+              </a:rPr>
+              <a:t> = square;</a:t>
+            </a:r>
+          </a:p>
+          <a:p>
+            <a:pPr marL="139700" lvl="0">
+              <a:buClr>
+                <a:srgbClr val="72D9F0"/>
+              </a:buClr>
+              <a:buSzPts val="1400"/>
+              <a:defRPr/>
+            </a:pPr>
+            <a:endParaRPr lang="en-US" sz="900" dirty="0">
+              <a:solidFill>
+                <a:schemeClr val="accent1"/>
+              </a:solidFill>
+              <a:latin typeface="Fira Code" panose="020B0809050000020004" pitchFamily="49" charset="0"/>
+              <a:ea typeface="Fira Code" panose="020B0809050000020004" pitchFamily="49" charset="0"/>
+              <a:cs typeface="Fira Code" panose="020B0809050000020004" pitchFamily="49" charset="0"/>
+              <a:sym typeface="Fira Code"/>
+            </a:endParaRPr>
+          </a:p>
+          <a:p>
+            <a:pPr marL="139700" lvl="0">
+              <a:buClr>
+                <a:srgbClr val="72D9F0"/>
+              </a:buClr>
+              <a:buSzPts val="1400"/>
+              <a:defRPr/>
+            </a:pPr>
+            <a:r>
+              <a:rPr lang="en-US" sz="900" dirty="0">
+                <a:solidFill>
+                  <a:schemeClr val="accent3"/>
+                </a:solidFill>
+                <a:latin typeface="Fira Code" panose="020B0809050000020004" pitchFamily="49" charset="0"/>
+                <a:ea typeface="Fira Code" panose="020B0809050000020004" pitchFamily="49" charset="0"/>
+                <a:cs typeface="Fira Code" panose="020B0809050000020004" pitchFamily="49" charset="0"/>
+                <a:sym typeface="Fira Code"/>
+              </a:rPr>
+              <a:t>    // call function using pointer</a:t>
+            </a:r>
+          </a:p>
+          <a:p>
+            <a:pPr marL="139700" lvl="0">
+              <a:buClr>
+                <a:srgbClr val="72D9F0"/>
+              </a:buClr>
+              <a:buSzPts val="1400"/>
+              <a:defRPr/>
+            </a:pPr>
+            <a:r>
+              <a:rPr lang="en-US" sz="900" dirty="0">
+                <a:solidFill>
+                  <a:schemeClr val="accent1"/>
+                </a:solidFill>
+                <a:latin typeface="Fira Code" panose="020B0809050000020004" pitchFamily="49" charset="0"/>
+                <a:ea typeface="Fira Code" panose="020B0809050000020004" pitchFamily="49" charset="0"/>
+                <a:cs typeface="Fira Code" panose="020B0809050000020004" pitchFamily="49" charset="0"/>
+                <a:sym typeface="Fira Code"/>
+              </a:rPr>
+              <a:t>    </a:t>
+            </a:r>
+            <a:r>
+              <a:rPr lang="en-US" sz="900" dirty="0" err="1">
+                <a:solidFill>
+                  <a:schemeClr val="tx2"/>
+                </a:solidFill>
+                <a:latin typeface="Fira Code" panose="020B0809050000020004" pitchFamily="49" charset="0"/>
+                <a:ea typeface="Fira Code" panose="020B0809050000020004" pitchFamily="49" charset="0"/>
+                <a:cs typeface="Fira Code" panose="020B0809050000020004" pitchFamily="49" charset="0"/>
+                <a:sym typeface="Fira Code"/>
+              </a:rPr>
+              <a:t>printf</a:t>
+            </a:r>
+            <a:r>
+              <a:rPr lang="en-US" sz="900" dirty="0">
+                <a:solidFill>
+                  <a:schemeClr val="accent1"/>
+                </a:solidFill>
+                <a:latin typeface="Fira Code" panose="020B0809050000020004" pitchFamily="49" charset="0"/>
+                <a:ea typeface="Fira Code" panose="020B0809050000020004" pitchFamily="49" charset="0"/>
+                <a:cs typeface="Fira Code" panose="020B0809050000020004" pitchFamily="49" charset="0"/>
+                <a:sym typeface="Fira Code"/>
+              </a:rPr>
+              <a:t>("%d\n", </a:t>
+            </a:r>
+            <a:r>
+              <a:rPr lang="en-US" sz="900" dirty="0" err="1">
+                <a:solidFill>
+                  <a:schemeClr val="accent1"/>
+                </a:solidFill>
+                <a:latin typeface="Fira Code" panose="020B0809050000020004" pitchFamily="49" charset="0"/>
+                <a:ea typeface="Fira Code" panose="020B0809050000020004" pitchFamily="49" charset="0"/>
+                <a:cs typeface="Fira Code" panose="020B0809050000020004" pitchFamily="49" charset="0"/>
+                <a:sym typeface="Fira Code"/>
+              </a:rPr>
+              <a:t>fp</a:t>
+            </a:r>
+            <a:r>
+              <a:rPr lang="en-US" sz="900" dirty="0">
+                <a:solidFill>
+                  <a:schemeClr val="accent1"/>
+                </a:solidFill>
+                <a:latin typeface="Fira Code" panose="020B0809050000020004" pitchFamily="49" charset="0"/>
+                <a:ea typeface="Fira Code" panose="020B0809050000020004" pitchFamily="49" charset="0"/>
+                <a:cs typeface="Fira Code" panose="020B0809050000020004" pitchFamily="49" charset="0"/>
+                <a:sym typeface="Fira Code"/>
+              </a:rPr>
+              <a:t>(5));</a:t>
+            </a:r>
+          </a:p>
+          <a:p>
+            <a:pPr marL="139700" lvl="0">
+              <a:buClr>
+                <a:srgbClr val="72D9F0"/>
+              </a:buClr>
+              <a:buSzPts val="1400"/>
+              <a:defRPr/>
+            </a:pPr>
+            <a:endParaRPr lang="en-US" sz="900" dirty="0">
+              <a:solidFill>
+                <a:schemeClr val="accent1"/>
+              </a:solidFill>
+              <a:latin typeface="Fira Code" panose="020B0809050000020004" pitchFamily="49" charset="0"/>
+              <a:ea typeface="Fira Code" panose="020B0809050000020004" pitchFamily="49" charset="0"/>
+              <a:cs typeface="Fira Code" panose="020B0809050000020004" pitchFamily="49" charset="0"/>
+              <a:sym typeface="Fira Code"/>
+            </a:endParaRPr>
+          </a:p>
+          <a:p>
+            <a:pPr marL="139700" lvl="0">
+              <a:buClr>
+                <a:srgbClr val="72D9F0"/>
+              </a:buClr>
+              <a:buSzPts val="1400"/>
+              <a:defRPr/>
+            </a:pPr>
+            <a:r>
+              <a:rPr lang="en-US" sz="900" dirty="0">
+                <a:solidFill>
+                  <a:schemeClr val="accent1"/>
+                </a:solidFill>
+                <a:latin typeface="Fira Code" panose="020B0809050000020004" pitchFamily="49" charset="0"/>
+                <a:ea typeface="Fira Code" panose="020B0809050000020004" pitchFamily="49" charset="0"/>
+                <a:cs typeface="Fira Code" panose="020B0809050000020004" pitchFamily="49" charset="0"/>
+                <a:sym typeface="Fira Code"/>
+              </a:rPr>
+              <a:t>    </a:t>
+            </a:r>
+            <a:r>
+              <a:rPr lang="en-US" sz="900" dirty="0">
+                <a:solidFill>
+                  <a:schemeClr val="tx2"/>
+                </a:solidFill>
+                <a:latin typeface="Fira Code" panose="020B0809050000020004" pitchFamily="49" charset="0"/>
+                <a:ea typeface="Fira Code" panose="020B0809050000020004" pitchFamily="49" charset="0"/>
+                <a:cs typeface="Fira Code" panose="020B0809050000020004" pitchFamily="49" charset="0"/>
+                <a:sym typeface="Fira Code"/>
+              </a:rPr>
+              <a:t>return</a:t>
+            </a:r>
+            <a:r>
+              <a:rPr lang="en-US" sz="900" dirty="0">
+                <a:solidFill>
+                  <a:schemeClr val="accent1"/>
+                </a:solidFill>
+                <a:latin typeface="Fira Code" panose="020B0809050000020004" pitchFamily="49" charset="0"/>
+                <a:ea typeface="Fira Code" panose="020B0809050000020004" pitchFamily="49" charset="0"/>
+                <a:cs typeface="Fira Code" panose="020B0809050000020004" pitchFamily="49" charset="0"/>
+                <a:sym typeface="Fira Code"/>
+              </a:rPr>
+              <a:t> 0;</a:t>
+            </a:r>
+          </a:p>
+          <a:p>
+            <a:pPr marL="139700" lvl="0">
+              <a:buClr>
+                <a:srgbClr val="72D9F0"/>
+              </a:buClr>
+              <a:buSzPts val="1400"/>
+              <a:defRPr/>
+            </a:pPr>
+            <a:r>
+              <a:rPr lang="en-US" sz="900" dirty="0">
+                <a:solidFill>
+                  <a:schemeClr val="accent1"/>
+                </a:solidFill>
+                <a:latin typeface="Fira Code" panose="020B0809050000020004" pitchFamily="49" charset="0"/>
+                <a:ea typeface="Fira Code" panose="020B0809050000020004" pitchFamily="49" charset="0"/>
+                <a:cs typeface="Fira Code" panose="020B0809050000020004" pitchFamily="49" charset="0"/>
+                <a:sym typeface="Fira Code"/>
+              </a:rPr>
+              <a:t>}</a:t>
+            </a:r>
+            <a:endParaRPr kumimoji="0" lang="en-US" sz="900" b="0" i="0" u="none" strike="noStrike" kern="0" cap="none" spc="0" normalizeH="0" baseline="0" noProof="0" dirty="0">
+              <a:ln>
+                <a:noFill/>
+              </a:ln>
+              <a:solidFill>
+                <a:schemeClr val="accent1"/>
+              </a:solidFill>
+              <a:effectLst/>
+              <a:uLnTx/>
+              <a:uFillTx/>
+              <a:latin typeface="Fira Code" panose="020B0809050000020004" pitchFamily="49" charset="0"/>
+              <a:ea typeface="Fira Code" panose="020B0809050000020004" pitchFamily="49" charset="0"/>
+              <a:cs typeface="Fira Code" panose="020B0809050000020004" pitchFamily="49" charset="0"/>
               <a:sym typeface="Fira Code"/>
             </a:endParaRPr>
           </a:p>
@@ -28714,7 +27165,7 @@
                   <a:schemeClr val="accent3"/>
                 </a:solidFill>
               </a:rPr>
-              <a:t>1</a:t>
+              <a:t>7</a:t>
             </a:r>
             <a:endParaRPr lang="en" dirty="0">
               <a:solidFill>
@@ -29290,36 +27741,6 @@
           </a:p>
         </p:txBody>
       </p:sp>
-      <p:pic>
-        <p:nvPicPr>
-          <p:cNvPr id="11" name="Picture 10">
-            <a:extLst>
-              <a:ext uri="{FF2B5EF4-FFF2-40B4-BE49-F238E27FC236}">
-                <a16:creationId xmlns:a16="http://schemas.microsoft.com/office/drawing/2014/main" id="{FE8C55F4-8CB2-F4A2-FB46-B34F1739D4A6}"/>
-              </a:ext>
-            </a:extLst>
-          </p:cNvPr>
-          <p:cNvPicPr>
-            <a:picLocks noChangeAspect="1"/>
-          </p:cNvPicPr>
-          <p:nvPr/>
-        </p:nvPicPr>
-        <p:blipFill>
-          <a:blip r:embed="rId3"/>
-          <a:stretch>
-            <a:fillRect/>
-          </a:stretch>
-        </p:blipFill>
-        <p:spPr>
-          <a:xfrm>
-            <a:off x="5323111" y="1778054"/>
-            <a:ext cx="3608615" cy="2247990"/>
-          </a:xfrm>
-          <a:prstGeom prst="rect">
-            <a:avLst/>
-          </a:prstGeom>
-        </p:spPr>
-      </p:pic>
       <p:sp>
         <p:nvSpPr>
           <p:cNvPr id="15" name="TextBox 14">
@@ -29666,6 +28087,498 @@
               <a:rPr lang="en-US" sz="1000" dirty="0"/>
               <a:t>Task 4</a:t>
             </a:r>
+          </a:p>
+        </p:txBody>
+      </p:sp>
+      <p:sp>
+        <p:nvSpPr>
+          <p:cNvPr id="5" name="Rectangle: Rounded Corners 4">
+            <a:extLst>
+              <a:ext uri="{FF2B5EF4-FFF2-40B4-BE49-F238E27FC236}">
+                <a16:creationId xmlns:a16="http://schemas.microsoft.com/office/drawing/2014/main" id="{BABC7CC3-1603-A880-C6EB-85C194D24337}"/>
+              </a:ext>
+            </a:extLst>
+          </p:cNvPr>
+          <p:cNvSpPr/>
+          <p:nvPr/>
+        </p:nvSpPr>
+        <p:spPr>
+          <a:xfrm>
+            <a:off x="5212202" y="1957672"/>
+            <a:ext cx="3684664" cy="1971253"/>
+          </a:xfrm>
+          <a:prstGeom prst="roundRect">
+            <a:avLst>
+              <a:gd name="adj" fmla="val 5005"/>
+            </a:avLst>
+          </a:prstGeom>
+          <a:solidFill>
+            <a:schemeClr val="accent5"/>
+          </a:solidFill>
+          <a:ln>
+            <a:noFill/>
+          </a:ln>
+        </p:spPr>
+        <p:style>
+          <a:lnRef idx="0">
+            <a:scrgbClr r="0" g="0" b="0"/>
+          </a:lnRef>
+          <a:fillRef idx="0">
+            <a:scrgbClr r="0" g="0" b="0"/>
+          </a:fillRef>
+          <a:effectRef idx="0">
+            <a:scrgbClr r="0" g="0" b="0"/>
+          </a:effectRef>
+          <a:fontRef idx="minor">
+            <a:schemeClr val="lt1"/>
+          </a:fontRef>
+        </p:style>
+        <p:txBody>
+          <a:bodyPr rtlCol="0" anchor="ctr"/>
+          <a:lstStyle/>
+          <a:p>
+            <a:pPr marL="139700" lvl="0">
+              <a:buClr>
+                <a:srgbClr val="72D9F0"/>
+              </a:buClr>
+              <a:buSzPts val="1400"/>
+              <a:defRPr/>
+            </a:pPr>
+            <a:r>
+              <a:rPr lang="en-US" sz="800" dirty="0">
+                <a:solidFill>
+                  <a:schemeClr val="tx2"/>
+                </a:solidFill>
+                <a:latin typeface="Fira Code" panose="020B0809050000020004" pitchFamily="49" charset="0"/>
+                <a:ea typeface="Fira Code" panose="020B0809050000020004" pitchFamily="49" charset="0"/>
+                <a:cs typeface="Fira Code" panose="020B0809050000020004" pitchFamily="49" charset="0"/>
+                <a:sym typeface="Fira Code"/>
+              </a:rPr>
+              <a:t>#include </a:t>
+            </a:r>
+            <a:r>
+              <a:rPr lang="en-US" sz="800" dirty="0">
+                <a:solidFill>
+                  <a:schemeClr val="accent1"/>
+                </a:solidFill>
+                <a:latin typeface="Fira Code" panose="020B0809050000020004" pitchFamily="49" charset="0"/>
+                <a:ea typeface="Fira Code" panose="020B0809050000020004" pitchFamily="49" charset="0"/>
+                <a:cs typeface="Fira Code" panose="020B0809050000020004" pitchFamily="49" charset="0"/>
+                <a:sym typeface="Fira Code"/>
+              </a:rPr>
+              <a:t>&lt;</a:t>
+            </a:r>
+            <a:r>
+              <a:rPr lang="en-US" sz="800" dirty="0" err="1">
+                <a:solidFill>
+                  <a:schemeClr val="accent1"/>
+                </a:solidFill>
+                <a:latin typeface="Fira Code" panose="020B0809050000020004" pitchFamily="49" charset="0"/>
+                <a:ea typeface="Fira Code" panose="020B0809050000020004" pitchFamily="49" charset="0"/>
+                <a:cs typeface="Fira Code" panose="020B0809050000020004" pitchFamily="49" charset="0"/>
+                <a:sym typeface="Fira Code"/>
+              </a:rPr>
+              <a:t>stdio.h</a:t>
+            </a:r>
+            <a:r>
+              <a:rPr lang="en-US" sz="800" dirty="0">
+                <a:solidFill>
+                  <a:schemeClr val="accent1"/>
+                </a:solidFill>
+                <a:latin typeface="Fira Code" panose="020B0809050000020004" pitchFamily="49" charset="0"/>
+                <a:ea typeface="Fira Code" panose="020B0809050000020004" pitchFamily="49" charset="0"/>
+                <a:cs typeface="Fira Code" panose="020B0809050000020004" pitchFamily="49" charset="0"/>
+                <a:sym typeface="Fira Code"/>
+              </a:rPr>
+              <a:t>&gt;</a:t>
+            </a:r>
+          </a:p>
+          <a:p>
+            <a:pPr marL="139700" lvl="0">
+              <a:buClr>
+                <a:srgbClr val="72D9F0"/>
+              </a:buClr>
+              <a:buSzPts val="1400"/>
+              <a:defRPr/>
+            </a:pPr>
+            <a:endParaRPr lang="en-US" sz="800" dirty="0">
+              <a:solidFill>
+                <a:schemeClr val="accent1"/>
+              </a:solidFill>
+              <a:latin typeface="Fira Code" panose="020B0809050000020004" pitchFamily="49" charset="0"/>
+              <a:ea typeface="Fira Code" panose="020B0809050000020004" pitchFamily="49" charset="0"/>
+              <a:cs typeface="Fira Code" panose="020B0809050000020004" pitchFamily="49" charset="0"/>
+              <a:sym typeface="Fira Code"/>
+            </a:endParaRPr>
+          </a:p>
+          <a:p>
+            <a:pPr marL="139700" lvl="0">
+              <a:buClr>
+                <a:srgbClr val="72D9F0"/>
+              </a:buClr>
+              <a:buSzPts val="1400"/>
+              <a:defRPr/>
+            </a:pPr>
+            <a:r>
+              <a:rPr lang="en-US" sz="800" dirty="0">
+                <a:solidFill>
+                  <a:schemeClr val="tx2"/>
+                </a:solidFill>
+                <a:latin typeface="Fira Code" panose="020B0809050000020004" pitchFamily="49" charset="0"/>
+                <a:ea typeface="Fira Code" panose="020B0809050000020004" pitchFamily="49" charset="0"/>
+                <a:cs typeface="Fira Code" panose="020B0809050000020004" pitchFamily="49" charset="0"/>
+                <a:sym typeface="Fira Code"/>
+              </a:rPr>
+              <a:t>int</a:t>
+            </a:r>
+            <a:r>
+              <a:rPr lang="en-US" sz="800" dirty="0">
+                <a:solidFill>
+                  <a:schemeClr val="accent1"/>
+                </a:solidFill>
+                <a:latin typeface="Fira Code" panose="020B0809050000020004" pitchFamily="49" charset="0"/>
+                <a:ea typeface="Fira Code" panose="020B0809050000020004" pitchFamily="49" charset="0"/>
+                <a:cs typeface="Fira Code" panose="020B0809050000020004" pitchFamily="49" charset="0"/>
+                <a:sym typeface="Fira Code"/>
+              </a:rPr>
+              <a:t> add(int a, int b) { return a + b; }</a:t>
+            </a:r>
+          </a:p>
+          <a:p>
+            <a:pPr marL="139700" lvl="0">
+              <a:buClr>
+                <a:srgbClr val="72D9F0"/>
+              </a:buClr>
+              <a:buSzPts val="1400"/>
+              <a:defRPr/>
+            </a:pPr>
+            <a:r>
+              <a:rPr lang="en-US" sz="800" dirty="0">
+                <a:solidFill>
+                  <a:schemeClr val="tx2"/>
+                </a:solidFill>
+                <a:latin typeface="Fira Code" panose="020B0809050000020004" pitchFamily="49" charset="0"/>
+                <a:ea typeface="Fira Code" panose="020B0809050000020004" pitchFamily="49" charset="0"/>
+                <a:cs typeface="Fira Code" panose="020B0809050000020004" pitchFamily="49" charset="0"/>
+                <a:sym typeface="Fira Code"/>
+              </a:rPr>
+              <a:t>int</a:t>
+            </a:r>
+            <a:r>
+              <a:rPr lang="en-US" sz="800" dirty="0">
+                <a:solidFill>
+                  <a:schemeClr val="accent1"/>
+                </a:solidFill>
+                <a:latin typeface="Fira Code" panose="020B0809050000020004" pitchFamily="49" charset="0"/>
+                <a:ea typeface="Fira Code" panose="020B0809050000020004" pitchFamily="49" charset="0"/>
+                <a:cs typeface="Fira Code" panose="020B0809050000020004" pitchFamily="49" charset="0"/>
+                <a:sym typeface="Fira Code"/>
+              </a:rPr>
+              <a:t> sub(int a, int b) { return a - b; }</a:t>
+            </a:r>
+          </a:p>
+          <a:p>
+            <a:pPr marL="139700" lvl="0">
+              <a:buClr>
+                <a:srgbClr val="72D9F0"/>
+              </a:buClr>
+              <a:buSzPts val="1400"/>
+              <a:defRPr/>
+            </a:pPr>
+            <a:r>
+              <a:rPr lang="en-US" sz="800" dirty="0">
+                <a:solidFill>
+                  <a:schemeClr val="tx2"/>
+                </a:solidFill>
+                <a:latin typeface="Fira Code" panose="020B0809050000020004" pitchFamily="49" charset="0"/>
+                <a:ea typeface="Fira Code" panose="020B0809050000020004" pitchFamily="49" charset="0"/>
+                <a:cs typeface="Fira Code" panose="020B0809050000020004" pitchFamily="49" charset="0"/>
+                <a:sym typeface="Fira Code"/>
+              </a:rPr>
+              <a:t>int</a:t>
+            </a:r>
+            <a:r>
+              <a:rPr lang="en-US" sz="800" dirty="0">
+                <a:solidFill>
+                  <a:schemeClr val="accent1"/>
+                </a:solidFill>
+                <a:latin typeface="Fira Code" panose="020B0809050000020004" pitchFamily="49" charset="0"/>
+                <a:ea typeface="Fira Code" panose="020B0809050000020004" pitchFamily="49" charset="0"/>
+                <a:cs typeface="Fira Code" panose="020B0809050000020004" pitchFamily="49" charset="0"/>
+                <a:sym typeface="Fira Code"/>
+              </a:rPr>
+              <a:t> </a:t>
+            </a:r>
+            <a:r>
+              <a:rPr lang="en-US" sz="800" dirty="0" err="1">
+                <a:solidFill>
+                  <a:schemeClr val="accent1"/>
+                </a:solidFill>
+                <a:latin typeface="Fira Code" panose="020B0809050000020004" pitchFamily="49" charset="0"/>
+                <a:ea typeface="Fira Code" panose="020B0809050000020004" pitchFamily="49" charset="0"/>
+                <a:cs typeface="Fira Code" panose="020B0809050000020004" pitchFamily="49" charset="0"/>
+                <a:sym typeface="Fira Code"/>
+              </a:rPr>
+              <a:t>mul</a:t>
+            </a:r>
+            <a:r>
+              <a:rPr lang="en-US" sz="800" dirty="0">
+                <a:solidFill>
+                  <a:schemeClr val="accent1"/>
+                </a:solidFill>
+                <a:latin typeface="Fira Code" panose="020B0809050000020004" pitchFamily="49" charset="0"/>
+                <a:ea typeface="Fira Code" panose="020B0809050000020004" pitchFamily="49" charset="0"/>
+                <a:cs typeface="Fira Code" panose="020B0809050000020004" pitchFamily="49" charset="0"/>
+                <a:sym typeface="Fira Code"/>
+              </a:rPr>
+              <a:t>(int a, int b) { return a * b; }</a:t>
+            </a:r>
+          </a:p>
+          <a:p>
+            <a:pPr marL="139700" lvl="0">
+              <a:buClr>
+                <a:srgbClr val="72D9F0"/>
+              </a:buClr>
+              <a:buSzPts val="1400"/>
+              <a:defRPr/>
+            </a:pPr>
+            <a:r>
+              <a:rPr lang="en-US" sz="800" dirty="0">
+                <a:solidFill>
+                  <a:schemeClr val="tx2"/>
+                </a:solidFill>
+                <a:latin typeface="Fira Code" panose="020B0809050000020004" pitchFamily="49" charset="0"/>
+                <a:ea typeface="Fira Code" panose="020B0809050000020004" pitchFamily="49" charset="0"/>
+                <a:cs typeface="Fira Code" panose="020B0809050000020004" pitchFamily="49" charset="0"/>
+                <a:sym typeface="Fira Code"/>
+              </a:rPr>
+              <a:t>int</a:t>
+            </a:r>
+            <a:r>
+              <a:rPr lang="en-US" sz="800" dirty="0">
+                <a:solidFill>
+                  <a:schemeClr val="accent1"/>
+                </a:solidFill>
+                <a:latin typeface="Fira Code" panose="020B0809050000020004" pitchFamily="49" charset="0"/>
+                <a:ea typeface="Fira Code" panose="020B0809050000020004" pitchFamily="49" charset="0"/>
+                <a:cs typeface="Fira Code" panose="020B0809050000020004" pitchFamily="49" charset="0"/>
+                <a:sym typeface="Fira Code"/>
+              </a:rPr>
+              <a:t> divide(int a, int b) { return b != 0 ? a / b : 0; }</a:t>
+            </a:r>
+          </a:p>
+          <a:p>
+            <a:pPr marL="139700" lvl="0">
+              <a:buClr>
+                <a:srgbClr val="72D9F0"/>
+              </a:buClr>
+              <a:buSzPts val="1400"/>
+              <a:defRPr/>
+            </a:pPr>
+            <a:endParaRPr lang="en-US" sz="800" dirty="0">
+              <a:solidFill>
+                <a:schemeClr val="accent1"/>
+              </a:solidFill>
+              <a:latin typeface="Fira Code" panose="020B0809050000020004" pitchFamily="49" charset="0"/>
+              <a:ea typeface="Fira Code" panose="020B0809050000020004" pitchFamily="49" charset="0"/>
+              <a:cs typeface="Fira Code" panose="020B0809050000020004" pitchFamily="49" charset="0"/>
+              <a:sym typeface="Fira Code"/>
+            </a:endParaRPr>
+          </a:p>
+          <a:p>
+            <a:pPr marL="139700" lvl="0">
+              <a:buClr>
+                <a:srgbClr val="72D9F0"/>
+              </a:buClr>
+              <a:buSzPts val="1400"/>
+              <a:defRPr/>
+            </a:pPr>
+            <a:r>
+              <a:rPr lang="en-US" sz="800" dirty="0">
+                <a:solidFill>
+                  <a:schemeClr val="tx2"/>
+                </a:solidFill>
+                <a:latin typeface="Fira Code" panose="020B0809050000020004" pitchFamily="49" charset="0"/>
+                <a:ea typeface="Fira Code" panose="020B0809050000020004" pitchFamily="49" charset="0"/>
+                <a:cs typeface="Fira Code" panose="020B0809050000020004" pitchFamily="49" charset="0"/>
+                <a:sym typeface="Fira Code"/>
+              </a:rPr>
+              <a:t>int</a:t>
+            </a:r>
+            <a:r>
+              <a:rPr lang="en-US" sz="800" dirty="0">
+                <a:solidFill>
+                  <a:schemeClr val="accent1"/>
+                </a:solidFill>
+                <a:latin typeface="Fira Code" panose="020B0809050000020004" pitchFamily="49" charset="0"/>
+                <a:ea typeface="Fira Code" panose="020B0809050000020004" pitchFamily="49" charset="0"/>
+                <a:cs typeface="Fira Code" panose="020B0809050000020004" pitchFamily="49" charset="0"/>
+                <a:sym typeface="Fira Code"/>
+              </a:rPr>
+              <a:t> main() {</a:t>
+            </a:r>
+          </a:p>
+          <a:p>
+            <a:pPr marL="139700" lvl="0">
+              <a:buClr>
+                <a:srgbClr val="72D9F0"/>
+              </a:buClr>
+              <a:buSzPts val="1400"/>
+              <a:defRPr/>
+            </a:pPr>
+            <a:r>
+              <a:rPr lang="en-US" sz="800" dirty="0">
+                <a:solidFill>
+                  <a:schemeClr val="accent3"/>
+                </a:solidFill>
+                <a:latin typeface="Fira Code" panose="020B0809050000020004" pitchFamily="49" charset="0"/>
+                <a:ea typeface="Fira Code" panose="020B0809050000020004" pitchFamily="49" charset="0"/>
+                <a:cs typeface="Fira Code" panose="020B0809050000020004" pitchFamily="49" charset="0"/>
+                <a:sym typeface="Fira Code"/>
+              </a:rPr>
+              <a:t>    // : declare a function pointer</a:t>
+            </a:r>
+          </a:p>
+          <a:p>
+            <a:pPr marL="139700" lvl="0">
+              <a:buClr>
+                <a:srgbClr val="72D9F0"/>
+              </a:buClr>
+              <a:buSzPts val="1400"/>
+              <a:defRPr/>
+            </a:pPr>
+            <a:r>
+              <a:rPr lang="en-US" sz="800" dirty="0">
+                <a:solidFill>
+                  <a:schemeClr val="accent3"/>
+                </a:solidFill>
+                <a:latin typeface="Fira Code" panose="020B0809050000020004" pitchFamily="49" charset="0"/>
+                <a:ea typeface="Fira Code" panose="020B0809050000020004" pitchFamily="49" charset="0"/>
+                <a:cs typeface="Fira Code" panose="020B0809050000020004" pitchFamily="49" charset="0"/>
+                <a:sym typeface="Fira Code"/>
+              </a:rPr>
+              <a:t>    // : store address of different functions</a:t>
+            </a:r>
+          </a:p>
+          <a:p>
+            <a:pPr marL="139700" lvl="0">
+              <a:buClr>
+                <a:srgbClr val="72D9F0"/>
+              </a:buClr>
+              <a:buSzPts val="1400"/>
+              <a:defRPr/>
+            </a:pPr>
+            <a:r>
+              <a:rPr lang="en-US" sz="800" dirty="0">
+                <a:solidFill>
+                  <a:schemeClr val="accent3"/>
+                </a:solidFill>
+                <a:latin typeface="Fira Code" panose="020B0809050000020004" pitchFamily="49" charset="0"/>
+                <a:ea typeface="Fira Code" panose="020B0809050000020004" pitchFamily="49" charset="0"/>
+                <a:cs typeface="Fira Code" panose="020B0809050000020004" pitchFamily="49" charset="0"/>
+                <a:sym typeface="Fira Code"/>
+              </a:rPr>
+              <a:t>    // : call functions using the pointer</a:t>
+            </a:r>
+          </a:p>
+          <a:p>
+            <a:pPr marL="139700" lvl="0">
+              <a:buClr>
+                <a:srgbClr val="72D9F0"/>
+              </a:buClr>
+              <a:buSzPts val="1400"/>
+              <a:defRPr/>
+            </a:pPr>
+            <a:endParaRPr lang="en-US" sz="800" dirty="0">
+              <a:solidFill>
+                <a:schemeClr val="accent1"/>
+              </a:solidFill>
+              <a:latin typeface="Fira Code" panose="020B0809050000020004" pitchFamily="49" charset="0"/>
+              <a:ea typeface="Fira Code" panose="020B0809050000020004" pitchFamily="49" charset="0"/>
+              <a:cs typeface="Fira Code" panose="020B0809050000020004" pitchFamily="49" charset="0"/>
+              <a:sym typeface="Fira Code"/>
+            </a:endParaRPr>
+          </a:p>
+          <a:p>
+            <a:pPr marL="139700" lvl="0">
+              <a:buClr>
+                <a:srgbClr val="72D9F0"/>
+              </a:buClr>
+              <a:buSzPts val="1400"/>
+              <a:defRPr/>
+            </a:pPr>
+            <a:r>
+              <a:rPr lang="en-US" sz="800" dirty="0">
+                <a:solidFill>
+                  <a:schemeClr val="accent1"/>
+                </a:solidFill>
+                <a:latin typeface="Fira Code" panose="020B0809050000020004" pitchFamily="49" charset="0"/>
+                <a:ea typeface="Fira Code" panose="020B0809050000020004" pitchFamily="49" charset="0"/>
+                <a:cs typeface="Fira Code" panose="020B0809050000020004" pitchFamily="49" charset="0"/>
+                <a:sym typeface="Fira Code"/>
+              </a:rPr>
+              <a:t>    </a:t>
+            </a:r>
+            <a:r>
+              <a:rPr lang="en-US" sz="800" dirty="0">
+                <a:solidFill>
+                  <a:schemeClr val="tx2"/>
+                </a:solidFill>
+                <a:latin typeface="Fira Code" panose="020B0809050000020004" pitchFamily="49" charset="0"/>
+                <a:ea typeface="Fira Code" panose="020B0809050000020004" pitchFamily="49" charset="0"/>
+                <a:cs typeface="Fira Code" panose="020B0809050000020004" pitchFamily="49" charset="0"/>
+                <a:sym typeface="Fira Code"/>
+              </a:rPr>
+              <a:t>return</a:t>
+            </a:r>
+            <a:r>
+              <a:rPr lang="en-US" sz="800" dirty="0">
+                <a:solidFill>
+                  <a:schemeClr val="accent1"/>
+                </a:solidFill>
+                <a:latin typeface="Fira Code" panose="020B0809050000020004" pitchFamily="49" charset="0"/>
+                <a:ea typeface="Fira Code" panose="020B0809050000020004" pitchFamily="49" charset="0"/>
+                <a:cs typeface="Fira Code" panose="020B0809050000020004" pitchFamily="49" charset="0"/>
+                <a:sym typeface="Fira Code"/>
+              </a:rPr>
+              <a:t> 0;</a:t>
+            </a:r>
+          </a:p>
+          <a:p>
+            <a:pPr marL="139700" lvl="0">
+              <a:buClr>
+                <a:srgbClr val="72D9F0"/>
+              </a:buClr>
+              <a:buSzPts val="1400"/>
+              <a:defRPr/>
+            </a:pPr>
+            <a:r>
+              <a:rPr lang="en-US" sz="800" dirty="0">
+                <a:solidFill>
+                  <a:schemeClr val="accent1"/>
+                </a:solidFill>
+                <a:latin typeface="Fira Code" panose="020B0809050000020004" pitchFamily="49" charset="0"/>
+                <a:ea typeface="Fira Code" panose="020B0809050000020004" pitchFamily="49" charset="0"/>
+                <a:cs typeface="Fira Code" panose="020B0809050000020004" pitchFamily="49" charset="0"/>
+                <a:sym typeface="Fira Code"/>
+              </a:rPr>
+              <a:t>}</a:t>
+            </a:r>
+            <a:endParaRPr kumimoji="0" lang="en-US" sz="800" b="0" i="0" u="none" strike="noStrike" kern="0" cap="none" spc="0" normalizeH="0" baseline="0" noProof="0" dirty="0">
+              <a:ln>
+                <a:noFill/>
+              </a:ln>
+              <a:solidFill>
+                <a:schemeClr val="accent1"/>
+              </a:solidFill>
+              <a:effectLst/>
+              <a:uLnTx/>
+              <a:uFillTx/>
+              <a:latin typeface="Fira Code" panose="020B0809050000020004" pitchFamily="49" charset="0"/>
+              <a:ea typeface="Fira Code" panose="020B0809050000020004" pitchFamily="49" charset="0"/>
+              <a:cs typeface="Fira Code" panose="020B0809050000020004" pitchFamily="49" charset="0"/>
+              <a:sym typeface="Fira Code"/>
+            </a:endParaRPr>
           </a:p>
         </p:txBody>
       </p:sp>
